--- a/Deutsch_7A/Balladen/Woche2/Freitag_06-11_Deutsch_7A.pptx
+++ b/Deutsch_7A/Balladen/Woche2/Freitag_06-11_Deutsch_7A.pptx
@@ -18,9 +18,10 @@
     <p:sldId id="266" r:id="rId12"/>
     <p:sldId id="267" r:id="rId13"/>
     <p:sldId id="268" r:id="rId14"/>
+    <p:sldId id="269" r:id="rId15"/>
   </p:sldIdLst>
   <p:notesMasterIdLst>
-    <p:notesMasterId r:id="rId15"/>
+    <p:notesMasterId r:id="rId16"/>
   </p:notesMasterIdLst>
   <p:sldSz cx="12192000" cy="6858000"/>
   <p:notesSz cx="6858000" cy="12192000"/>
@@ -602,7 +603,7 @@
           <a:p>
             <a:r>
               <a:rPr lang="en-US" dirty="0"/>
-              <a:t>Erst einen Schüler seine Lösung mit Strophe nennen lassen, dann aufdecken. Alle verbessern mit Grün. Bei Nr. 5 sind andere begründete Grenzen auch richtig.</a:t>
+              <a:t>Erst einen Schüler seine Lösung mit Strophe nennen lassen, dann aufdecken. Alle verbessern mit Grün.</a:t>
             </a:r>
             <a:endParaRPr lang="en-US" dirty="0"/>
           </a:p>
@@ -690,7 +691,7 @@
           <a:p>
             <a:r>
               <a:rPr lang="en-US" dirty="0"/>
-              <a:t>Erst einen Schüler seine Lösung mit Strophe nennen lassen, dann aufdecken. Alle verbessern mit Grün. Nr. 7: Es reicht, zwei Figuren mit Strophe zu nennen.</a:t>
+              <a:t>Erst einen Schüler seine Lösung mit Strophe nennen lassen, dann aufdecken. Alle verbessern mit Grün. Bei Nr. 5 sind andere begründete Grenzen auch richtig.</a:t>
             </a:r>
             <a:endParaRPr lang="en-US" dirty="0"/>
           </a:p>
@@ -778,7 +779,7 @@
           <a:p>
             <a:r>
               <a:rPr lang="en-US" dirty="0"/>
-              <a:t>Allein im Heft, 4 Minuten, dann Lösungsfolie. Herumgehen: Wer noch Fehler hat, wird am Montag in der Wiederholung gezielt drangenommen.</a:t>
+              <a:t>Erst einen Schüler seine Lösung mit Strophe nennen lassen, dann aufdecken. Alle verbessern mit Grün. Nr. 7: Wörtliche Rede allein reicht nicht – entscheidend ist, dass kein Erzähler dazwischen ist.</a:t>
             </a:r>
             <a:endParaRPr lang="en-US" dirty="0"/>
           </a:p>
@@ -866,7 +867,7 @@
           <a:p>
             <a:r>
               <a:rPr lang="en-US" dirty="0"/>
-              <a:t>Mit Grün verbessern. Alles richtig? Dann ist das Ziel erreicht.</a:t>
+              <a:t>Allein im Heft, 4 Minuten, dann Lösungsfolie. D ist der Prüfstein: Hier steht zwar wörtliche Rede, aber der Erzähler leitet sie ein. Herumgehen: Wer noch Fehler hat, wird am Montag in der Wiederholung gezielt drangenommen.</a:t>
             </a:r>
             <a:endParaRPr lang="en-US" dirty="0"/>
           </a:p>
@@ -890,6 +891,94 @@
             <a:fld id="{F7021451-1387-4CA6-816F-3879F97B5CBC}" type="slidenum">
               <a:rPr lang="en-US"/>
               <a:t>13</a:t>
+            </a:fld>
+            <a:endParaRPr lang="en-US"/>
+          </a:p>
+        </p:txBody>
+      </p:sp>
+    </p:spTree>
+    <p:extLst>
+      <p:ext uri="{BB962C8B-B14F-4D97-AF65-F5344CB8AC3E}">
+        <p14:creationId xmlns:p14="http://schemas.microsoft.com/office/powerpoint/2010/main" val="1024086991"/>
+      </p:ext>
+    </p:extLst>
+  </p:cSld>
+  <p:clrMapOvr>
+    <a:masterClrMapping/>
+  </p:clrMapOvr>
+</p:notes>
+</file>
+
+<file path=ppt/notesSlides/notesSlide14.xml><?xml version="1.0" encoding="utf-8"?>
+<p:notes xmlns:a="http://schemas.openxmlformats.org/drawingml/2006/main" xmlns:r="http://schemas.openxmlformats.org/officeDocument/2006/relationships" xmlns:p="http://schemas.openxmlformats.org/presentationml/2006/main">
+  <p:cSld>
+    <p:spTree>
+      <p:nvGrpSpPr>
+        <p:cNvPr id="1" name=""/>
+        <p:cNvGrpSpPr/>
+        <p:nvPr/>
+      </p:nvGrpSpPr>
+      <p:grpSpPr>
+        <a:xfrm>
+          <a:off x="0" y="0"/>
+          <a:ext cx="0" cy="0"/>
+          <a:chOff x="0" y="0"/>
+          <a:chExt cx="0" cy="0"/>
+        </a:xfrm>
+      </p:grpSpPr>
+      <p:sp>
+        <p:nvSpPr>
+          <p:cNvPr id="2" name="Slide Image Placeholder 1"/>
+          <p:cNvSpPr>
+            <a:spLocks noGrp="1" noRot="1" noChangeAspect="1"/>
+          </p:cNvSpPr>
+          <p:nvPr>
+            <p:ph type="sldImg"/>
+          </p:nvPr>
+        </p:nvSpPr>
+        <p:spPr/>
+      </p:sp>
+      <p:sp>
+        <p:nvSpPr>
+          <p:cNvPr id="3" name="Notes Placeholder 2"/>
+          <p:cNvSpPr>
+            <a:spLocks noGrp="1"/>
+          </p:cNvSpPr>
+          <p:nvPr>
+            <p:ph type="body" idx="1"/>
+          </p:nvPr>
+        </p:nvSpPr>
+        <p:spPr/>
+        <p:txBody>
+          <a:bodyPr/>
+          <a:lstStyle/>
+          <a:p>
+            <a:r>
+              <a:rPr lang="en-US" dirty="0"/>
+              <a:t>Mit Grün verbessern. Bei D gilt auch eine gut begründete andere Antwort, wenn das Merkmal „Erzähler“ richtig benutzt wird.</a:t>
+            </a:r>
+            <a:endParaRPr lang="en-US" dirty="0"/>
+          </a:p>
+        </p:txBody>
+      </p:sp>
+      <p:sp>
+        <p:nvSpPr>
+          <p:cNvPr id="4" name="Slide Number Placeholder 3"/>
+          <p:cNvSpPr>
+            <a:spLocks noGrp="1"/>
+          </p:cNvSpPr>
+          <p:nvPr>
+            <p:ph type="sldNum" sz="quarter" idx="10"/>
+          </p:nvPr>
+        </p:nvSpPr>
+        <p:spPr/>
+        <p:txBody>
+          <a:bodyPr/>
+          <a:lstStyle/>
+          <a:p>
+            <a:fld id="{F7021451-1387-4CA6-816F-3879F97B5CBC}" type="slidenum">
+              <a:rPr lang="en-US"/>
+              <a:t>14</a:t>
             </a:fld>
             <a:endParaRPr lang="en-US"/>
           </a:p>
@@ -1306,7 +1395,7 @@
           <a:p>
             <a:r>
               <a:rPr lang="en-US" dirty="0"/>
-              <a:t>Wir-Phase: Die Klasse nennt Merkmale. Impulse: Was hat jeder Song? (Strophen, Refrain, Reime) – Was braucht ein Spielbericht? (jemand erzählt, was passiert ist, in der Vergangenheit) – Was passiert in einer Serienszene? (Figuren reden miteinander, es gibt Streit, man will wissen, wie es weitergeht).</a:t>
+              <a:t>Wir-Phase, zu zweit (3 Min.): Ordnet A, B, C zu und notiert je ein Merkmal. Dann einzelne Paare nennen lassen. Impuls: Wer erzählt hier? Gibt es überhaupt einen Erzähler?</a:t>
             </a:r>
             <a:endParaRPr lang="en-US" dirty="0"/>
           </a:p>
@@ -1394,7 +1483,7 @@
           <a:p>
             <a:r>
               <a:rPr lang="en-US" dirty="0"/>
-              <a:t>Wir-Phase abschließen: Merkmale aufdecken, mit den Schülerantworten vergleichen. Überleitung: Jetzt weist ihr diese Merkmale an Paddy Fingal nach – Schnipsel austeilen.</a:t>
+              <a:t>Merkmale aufdecken und mit den Antworten der Paare vergleichen. Entscheidend: Epik = ein Erzähler vermittelt (Er- oder Ich-Erzähler) und leitet Figurenrede ein; Dramatik = kein Erzähler, die Figuren sprechen unmittelbar. Wörtliche Rede gibt es in beiden – sie allein entscheidet nicht! Dieselbe Szene in drei Formen: Die Gattung hängt an der Form, nicht am Inhalt. Diese drei Texte werden am Montag wiederholt.</a:t>
             </a:r>
             <a:endParaRPr lang="en-US" dirty="0"/>
           </a:p>
@@ -1482,7 +1571,7 @@
           <a:p>
             <a:r>
               <a:rPr lang="en-US" dirty="0"/>
-              <a:t>Schnipsel „Die Ballade – ein Ur-Ei“ (Woche 1) austeilen und einkleben lassen. Herumgehen. Typische Hürde: Höhepunkt (Nr. 5) – die Stelle, an der sich alles entscheidet (der Schotte steht vor dem Bett und sieht die Nase). Bei Nr. 6 Bezug zur Verb-Einheit: Woran erkennst du das Präteritum? (war, kroch, lief).</a:t>
+              <a:t>Gemeinsam: Der Erzähler leitet Paddys Rede ein (Epik). In Str. 7 und 9 sprechen die Figuren eine ganze Strophe lang ohne Erzähler – wie auf der Bühne (Dramatik). Und alles in Versen mit Reim (Lyrik). Überleitung: Jetzt weist ihr das selbst nach – Schnipsel austeilen.</a:t>
             </a:r>
             <a:endParaRPr lang="en-US" dirty="0"/>
           </a:p>
@@ -1570,7 +1659,7 @@
           <a:p>
             <a:r>
               <a:rPr lang="en-US" dirty="0"/>
-              <a:t>Erst einen Schüler seine Lösung mit Strophe nennen lassen, dann aufdecken. Alle verbessern mit Grün.</a:t>
+              <a:t>Schnipsel „Die Ballade – ein Ur-Ei“ (geänderte Fassung in Woche 2: Nr. 6 und 7 geschärft) austeilen und einkleben lassen. Herumgehen. Typische Hürde: Höhepunkt (Nr. 5) – die Stelle, an der sich alles entscheidet (der Schotte steht vor dem Bett und sieht die Nase). Bei Nr. 6 Bezug zur Verb-Einheit: Woran erkennst du das Präteritum? (war, kroch, lief).</a:t>
             </a:r>
             <a:endParaRPr lang="en-US" dirty="0"/>
           </a:p>
@@ -2226,7 +2315,7 @@
                 <a:ea typeface="Cambria" pitchFamily="34" charset="-122"/>
                 <a:cs typeface="Cambria" pitchFamily="34" charset="-120"/>
               </a:rPr>
-              <a:t>Ü2  Lösung – Epik – wie eine Erzählung</a:t>
+              <a:t>Ü2  Lösung – Lyrik – wie ein Gedicht</a:t>
             </a:r>
             <a:endParaRPr lang="en-US" sz="3200" dirty="0"/>
           </a:p>
@@ -2327,7 +2416,7 @@
             </a:avLst>
           </a:prstGeom>
           <a:solidFill>
-            <a:srgbClr val="7A5BA6"/>
+            <a:srgbClr val="2A8C8C"/>
           </a:solidFill>
           <a:ln/>
         </p:spPr>
@@ -2381,13 +2470,13 @@
             <a:r>
               <a:rPr lang="en-US" sz="2200" b="1" dirty="0">
                 <a:solidFill>
-                  <a:srgbClr val="7A5BA6"/>
-                </a:solidFill>
-                <a:latin typeface="Calibri" pitchFamily="34" charset="0"/>
-                <a:ea typeface="Calibri" pitchFamily="34" charset="-122"/>
-                <a:cs typeface="Calibri" pitchFamily="34" charset="-120"/>
-              </a:rPr>
-              <a:t>4</a:t>
+                  <a:srgbClr val="2A8C8C"/>
+                </a:solidFill>
+                <a:latin typeface="Calibri" pitchFamily="34" charset="0"/>
+                <a:ea typeface="Calibri" pitchFamily="34" charset="-122"/>
+                <a:cs typeface="Calibri" pitchFamily="34" charset="-120"/>
+              </a:rPr>
+              <a:t>1</a:t>
             </a:r>
             <a:endParaRPr lang="en-US" sz="2200" dirty="0"/>
           </a:p>
@@ -2426,7 +2515,7 @@
                 <a:ea typeface="Calibri" pitchFamily="34" charset="-122"/>
                 <a:cs typeface="Calibri" pitchFamily="34" charset="-120"/>
               </a:rPr>
-              <a:t>Figuren: Paddy Fingal, Schaya, der Schotte (* die Nachbarn)</a:t>
+              <a:t>11 Strophen mit je 5 Versen</a:t>
             </a:r>
             <a:endParaRPr lang="en-US" sz="2000" dirty="0"/>
           </a:p>
@@ -2481,13 +2570,13 @@
             <a:r>
               <a:rPr lang="en-US" sz="2200" b="1" dirty="0">
                 <a:solidFill>
-                  <a:srgbClr val="7A5BA6"/>
-                </a:solidFill>
-                <a:latin typeface="Calibri" pitchFamily="34" charset="0"/>
-                <a:ea typeface="Calibri" pitchFamily="34" charset="-122"/>
-                <a:cs typeface="Calibri" pitchFamily="34" charset="-120"/>
-              </a:rPr>
-              <a:t>5</a:t>
+                  <a:srgbClr val="2A8C8C"/>
+                </a:solidFill>
+                <a:latin typeface="Calibri" pitchFamily="34" charset="0"/>
+                <a:ea typeface="Calibri" pitchFamily="34" charset="-122"/>
+                <a:cs typeface="Calibri" pitchFamily="34" charset="-120"/>
+              </a:rPr>
+              <a:t>2</a:t>
             </a:r>
             <a:endParaRPr lang="en-US" sz="2200" dirty="0"/>
           </a:p>
@@ -2526,7 +2615,7 @@
                 <a:ea typeface="Calibri" pitchFamily="34" charset="-122"/>
                 <a:cs typeface="Calibri" pitchFamily="34" charset="-120"/>
               </a:rPr>
-              <a:t>Anfang Str. 1–3 · Höhepunkt Str. 8–9 (der Schotte sieht die Nase) · Ende Str. 10–11</a:t>
+              <a:t>Paarreim (aabb), z. B. Riesenart / Bart (Str. 1)</a:t>
             </a:r>
             <a:endParaRPr lang="en-US" sz="2000" dirty="0"/>
           </a:p>
@@ -2581,13 +2670,13 @@
             <a:r>
               <a:rPr lang="en-US" sz="2200" b="1" dirty="0">
                 <a:solidFill>
-                  <a:srgbClr val="7A5BA6"/>
-                </a:solidFill>
-                <a:latin typeface="Calibri" pitchFamily="34" charset="0"/>
-                <a:ea typeface="Calibri" pitchFamily="34" charset="-122"/>
-                <a:cs typeface="Calibri" pitchFamily="34" charset="-120"/>
-              </a:rPr>
-              <a:t>6</a:t>
+                  <a:srgbClr val="2A8C8C"/>
+                </a:solidFill>
+                <a:latin typeface="Calibri" pitchFamily="34" charset="0"/>
+                <a:ea typeface="Calibri" pitchFamily="34" charset="-122"/>
+                <a:cs typeface="Calibri" pitchFamily="34" charset="-120"/>
+              </a:rPr>
+              <a:t>3</a:t>
             </a:r>
             <a:endParaRPr lang="en-US" sz="2200" dirty="0"/>
           </a:p>
@@ -2626,7 +2715,7 @@
                 <a:ea typeface="Calibri" pitchFamily="34" charset="-122"/>
                 <a:cs typeface="Calibri" pitchFamily="34" charset="-120"/>
               </a:rPr>
-              <a:t>Präteritum, z. B. „Paddy Fingal war von Riesenart“ (Str. 1), „Ins Bette Paddy Fingal kroch“ (Str. 5)</a:t>
+              <a:t>„… Paddy Fingal“ – der Kehrreim (wird leicht abgewandelt)</a:t>
             </a:r>
             <a:endParaRPr lang="en-US" sz="2000" dirty="0"/>
           </a:p>
@@ -2736,7 +2825,7 @@
                 <a:ea typeface="Cambria" pitchFamily="34" charset="-122"/>
                 <a:cs typeface="Cambria" pitchFamily="34" charset="-120"/>
               </a:rPr>
-              <a:t>Ü2  Lösung – Dramatik – wie ein Theaterstück</a:t>
+              <a:t>Ü2  Lösung – Epik – wie eine Erzählung</a:t>
             </a:r>
             <a:endParaRPr lang="en-US" sz="3200" dirty="0"/>
           </a:p>
@@ -2837,7 +2926,7 @@
             </a:avLst>
           </a:prstGeom>
           <a:solidFill>
-            <a:srgbClr val="C77C12"/>
+            <a:srgbClr val="7A5BA6"/>
           </a:solidFill>
           <a:ln/>
         </p:spPr>
@@ -2891,13 +2980,13 @@
             <a:r>
               <a:rPr lang="en-US" sz="2200" b="1" dirty="0">
                 <a:solidFill>
-                  <a:srgbClr val="C77C12"/>
-                </a:solidFill>
-                <a:latin typeface="Calibri" pitchFamily="34" charset="0"/>
-                <a:ea typeface="Calibri" pitchFamily="34" charset="-122"/>
-                <a:cs typeface="Calibri" pitchFamily="34" charset="-120"/>
-              </a:rPr>
-              <a:t>7</a:t>
+                  <a:srgbClr val="7A5BA6"/>
+                </a:solidFill>
+                <a:latin typeface="Calibri" pitchFamily="34" charset="0"/>
+                <a:ea typeface="Calibri" pitchFamily="34" charset="-122"/>
+                <a:cs typeface="Calibri" pitchFamily="34" charset="-120"/>
+              </a:rPr>
+              <a:t>4</a:t>
             </a:r>
             <a:endParaRPr lang="en-US" sz="2200" dirty="0"/>
           </a:p>
@@ -2936,7 +3025,7 @@
                 <a:ea typeface="Calibri" pitchFamily="34" charset="-122"/>
                 <a:cs typeface="Calibri" pitchFamily="34" charset="-120"/>
               </a:rPr>
-              <a:t>Wörtliche Rede: Paddy (Str. 4), der Schotte (Str. 6, 9), Schaya (Str. 7)</a:t>
+              <a:t>Figuren: Paddy Fingal, Schaya, der Schotte (* die Nachbarn)</a:t>
             </a:r>
             <a:endParaRPr lang="en-US" sz="2000" dirty="0"/>
           </a:p>
@@ -2991,13 +3080,13 @@
             <a:r>
               <a:rPr lang="en-US" sz="2200" b="1" dirty="0">
                 <a:solidFill>
-                  <a:srgbClr val="C77C12"/>
-                </a:solidFill>
-                <a:latin typeface="Calibri" pitchFamily="34" charset="0"/>
-                <a:ea typeface="Calibri" pitchFamily="34" charset="-122"/>
-                <a:cs typeface="Calibri" pitchFamily="34" charset="-120"/>
-              </a:rPr>
-              <a:t>* 8</a:t>
+                  <a:srgbClr val="7A5BA6"/>
+                </a:solidFill>
+                <a:latin typeface="Calibri" pitchFamily="34" charset="0"/>
+                <a:ea typeface="Calibri" pitchFamily="34" charset="-122"/>
+                <a:cs typeface="Calibri" pitchFamily="34" charset="-120"/>
+              </a:rPr>
+              <a:t>5</a:t>
             </a:r>
             <a:endParaRPr lang="en-US" sz="2200" dirty="0"/>
           </a:p>
@@ -3036,7 +3125,107 @@
                 <a:ea typeface="Calibri" pitchFamily="34" charset="-122"/>
                 <a:cs typeface="Calibri" pitchFamily="34" charset="-120"/>
               </a:rPr>
-              <a:t>Paddy gegen den Schotten – Frage: Findet der Schotte Paddy? Wer ist stärker?</a:t>
+              <a:t>Anfang Str. 1–3 · Höhepunkt Str. 8–9 (der Schotte sieht die Nase) · Ende Str. 10–11</a:t>
+            </a:r>
+            <a:endParaRPr lang="en-US" sz="2000" dirty="0"/>
+          </a:p>
+        </p:txBody>
+      </p:sp>
+      <p:sp>
+        <p:nvSpPr>
+          <p:cNvPr id="14" name="Shape 11"/>
+          <p:cNvSpPr/>
+          <p:nvPr/>
+        </p:nvSpPr>
+        <p:spPr>
+          <a:xfrm>
+            <a:off x="548640" y="3931920"/>
+            <a:ext cx="11064240" cy="914400"/>
+          </a:xfrm>
+          <a:prstGeom prst="roundRect">
+            <a:avLst>
+              <a:gd name="adj" fmla="val 8000"/>
+            </a:avLst>
+          </a:prstGeom>
+          <a:solidFill>
+            <a:srgbClr val="F4F7FD"/>
+          </a:solidFill>
+          <a:ln/>
+        </p:spPr>
+      </p:sp>
+      <p:sp>
+        <p:nvSpPr>
+          <p:cNvPr id="15" name="Text 12"/>
+          <p:cNvSpPr txBox="1"/>
+          <p:nvPr/>
+        </p:nvSpPr>
+        <p:spPr>
+          <a:xfrm>
+            <a:off x="731520" y="4160520"/>
+            <a:ext cx="731520" cy="457200"/>
+          </a:xfrm>
+          <a:prstGeom prst="rect">
+            <a:avLst/>
+          </a:prstGeom>
+          <a:noFill/>
+          <a:ln/>
+        </p:spPr>
+        <p:txBody>
+          <a:bodyPr wrap="square" lIns="0" tIns="0" rIns="0" bIns="0" rtlCol="0" anchor="t"/>
+          <a:lstStyle/>
+          <a:p>
+            <a:pPr indent="0" marL="0">
+              <a:buNone/>
+            </a:pPr>
+            <a:r>
+              <a:rPr lang="en-US" sz="2200" b="1" dirty="0">
+                <a:solidFill>
+                  <a:srgbClr val="7A5BA6"/>
+                </a:solidFill>
+                <a:latin typeface="Calibri" pitchFamily="34" charset="0"/>
+                <a:ea typeface="Calibri" pitchFamily="34" charset="-122"/>
+                <a:cs typeface="Calibri" pitchFamily="34" charset="-120"/>
+              </a:rPr>
+              <a:t>6</a:t>
+            </a:r>
+            <a:endParaRPr lang="en-US" sz="2200" dirty="0"/>
+          </a:p>
+        </p:txBody>
+      </p:sp>
+      <p:sp>
+        <p:nvSpPr>
+          <p:cNvPr id="16" name="Text 13"/>
+          <p:cNvSpPr txBox="1"/>
+          <p:nvPr/>
+        </p:nvSpPr>
+        <p:spPr>
+          <a:xfrm>
+            <a:off x="1463040" y="4069080"/>
+            <a:ext cx="9966960" cy="685800"/>
+          </a:xfrm>
+          <a:prstGeom prst="rect">
+            <a:avLst/>
+          </a:prstGeom>
+          <a:noFill/>
+          <a:ln/>
+        </p:spPr>
+        <p:txBody>
+          <a:bodyPr wrap="square" lIns="0" tIns="0" rIns="0" bIns="0" rtlCol="0" anchor="ctr"/>
+          <a:lstStyle/>
+          <a:p>
+            <a:pPr indent="0" marL="0">
+              <a:buNone/>
+            </a:pPr>
+            <a:r>
+              <a:rPr lang="en-US" sz="2000" dirty="0">
+                <a:solidFill>
+                  <a:srgbClr val="1E2761"/>
+                </a:solidFill>
+                <a:latin typeface="Calibri" pitchFamily="34" charset="0"/>
+                <a:ea typeface="Calibri" pitchFamily="34" charset="-122"/>
+                <a:cs typeface="Calibri" pitchFamily="34" charset="-120"/>
+              </a:rPr>
+              <a:t>Er-Erzähler · Präteritum („war“, „kroch“) · er leitet Figurenrede ein, z. B. Str. 4, V. 16 „Da lief er heim in jähem Schreck:“ oder Str. 6, V. 29</a:t>
             </a:r>
             <a:endParaRPr lang="en-US" sz="2000" dirty="0"/>
           </a:p>
@@ -3107,7 +3296,7 @@
                 <a:ea typeface="Calibri" pitchFamily="34" charset="-122"/>
                 <a:cs typeface="Calibri" pitchFamily="34" charset="-120"/>
               </a:rPr>
-              <a:t>AUSWERTEN</a:t>
+              <a:t>AUSWERTEN · Ü2 GEMEINSAM PRÜFEN</a:t>
             </a:r>
             <a:endParaRPr lang="en-US" sz="1200" dirty="0"/>
           </a:p>
@@ -3146,7 +3335,7 @@
                 <a:ea typeface="Cambria" pitchFamily="34" charset="-122"/>
                 <a:cs typeface="Cambria" pitchFamily="34" charset="-120"/>
               </a:rPr>
-              <a:t>Zielcheck: Hast du das Ziel erreicht?</a:t>
+              <a:t>Ü2  Lösung – Dramatik – wie ein Theaterstück</a:t>
             </a:r>
             <a:endParaRPr lang="en-US" sz="3200" dirty="0"/>
           </a:p>
@@ -3232,42 +3421,25 @@
       </p:sp>
       <p:sp>
         <p:nvSpPr>
-          <p:cNvPr id="7" name="Text 4"/>
-          <p:cNvSpPr txBox="1"/>
-          <p:nvPr/>
-        </p:nvSpPr>
-        <p:spPr>
-          <a:xfrm>
-            <a:off x="548640" y="1463040"/>
-            <a:ext cx="11064240" cy="457200"/>
-          </a:xfrm>
-          <a:prstGeom prst="rect">
-            <a:avLst/>
-          </a:prstGeom>
-          <a:noFill/>
-          <a:ln/>
-        </p:spPr>
-        <p:txBody>
-          <a:bodyPr wrap="square" lIns="0" tIns="0" rIns="0" bIns="0" rtlCol="0" anchor="t"/>
-          <a:lstStyle/>
-          <a:p>
-            <a:pPr indent="0" marL="0">
-              <a:buNone/>
-            </a:pPr>
-            <a:r>
-              <a:rPr lang="en-US" sz="1900" b="1" dirty="0">
-                <a:solidFill>
-                  <a:srgbClr val="1E2761"/>
-                </a:solidFill>
-                <a:latin typeface="Calibri" pitchFamily="34" charset="0"/>
-                <a:ea typeface="Calibri" pitchFamily="34" charset="-122"/>
-                <a:cs typeface="Calibri" pitchFamily="34" charset="-120"/>
-              </a:rPr>
-              <a:t>Ordne jede Stelle einer Gattung zu: Lyrik, Epik oder Dramatik. Begründe mit dem Merkmal.</a:t>
-            </a:r>
-            <a:endParaRPr lang="en-US" sz="1900" dirty="0"/>
-          </a:p>
-        </p:txBody>
+          <p:cNvPr id="7" name="Shape 4"/>
+          <p:cNvSpPr/>
+          <p:nvPr/>
+        </p:nvSpPr>
+        <p:spPr>
+          <a:xfrm>
+            <a:off x="548640" y="1417320"/>
+            <a:ext cx="11064240" cy="109728"/>
+          </a:xfrm>
+          <a:prstGeom prst="roundRect">
+            <a:avLst>
+              <a:gd name="adj" fmla="val 66667"/>
+            </a:avLst>
+          </a:prstGeom>
+          <a:solidFill>
+            <a:srgbClr val="C77C12"/>
+          </a:solidFill>
+          <a:ln/>
+        </p:spPr>
       </p:sp>
       <p:sp>
         <p:nvSpPr>
@@ -3277,12 +3449,12 @@
         </p:nvSpPr>
         <p:spPr>
           <a:xfrm>
-            <a:off x="548640" y="2103120"/>
-            <a:ext cx="11064240" cy="868680"/>
+            <a:off x="548640" y="1737360"/>
+            <a:ext cx="11064240" cy="914400"/>
           </a:xfrm>
           <a:prstGeom prst="roundRect">
             <a:avLst>
-              <a:gd name="adj" fmla="val 8421"/>
+              <a:gd name="adj" fmla="val 8000"/>
             </a:avLst>
           </a:prstGeom>
           <a:solidFill>
@@ -3299,34 +3471,34 @@
         </p:nvSpPr>
         <p:spPr>
           <a:xfrm>
-            <a:off x="777240" y="2267712"/>
-            <a:ext cx="548640" cy="548640"/>
-          </a:xfrm>
-          <a:prstGeom prst="rect">
-            <a:avLst/>
-          </a:prstGeom>
-          <a:noFill/>
-          <a:ln/>
-        </p:spPr>
-        <p:txBody>
-          <a:bodyPr wrap="square" lIns="0" tIns="0" rIns="0" bIns="0" rtlCol="0" anchor="t"/>
-          <a:lstStyle/>
-          <a:p>
-            <a:pPr indent="0" marL="0">
-              <a:buNone/>
-            </a:pPr>
-            <a:r>
-              <a:rPr lang="en-US" sz="2800" b="1" dirty="0">
-                <a:solidFill>
-                  <a:srgbClr val="D9534F"/>
-                </a:solidFill>
-                <a:latin typeface="Cambria" pitchFamily="34" charset="0"/>
-                <a:ea typeface="Cambria" pitchFamily="34" charset="-122"/>
-                <a:cs typeface="Cambria" pitchFamily="34" charset="-120"/>
-              </a:rPr>
-              <a:t>A</a:t>
-            </a:r>
-            <a:endParaRPr lang="en-US" sz="2800" dirty="0"/>
+            <a:off x="731520" y="1965960"/>
+            <a:ext cx="731520" cy="457200"/>
+          </a:xfrm>
+          <a:prstGeom prst="rect">
+            <a:avLst/>
+          </a:prstGeom>
+          <a:noFill/>
+          <a:ln/>
+        </p:spPr>
+        <p:txBody>
+          <a:bodyPr wrap="square" lIns="0" tIns="0" rIns="0" bIns="0" rtlCol="0" anchor="t"/>
+          <a:lstStyle/>
+          <a:p>
+            <a:pPr indent="0" marL="0">
+              <a:buNone/>
+            </a:pPr>
+            <a:r>
+              <a:rPr lang="en-US" sz="2200" b="1" dirty="0">
+                <a:solidFill>
+                  <a:srgbClr val="C77C12"/>
+                </a:solidFill>
+                <a:latin typeface="Calibri" pitchFamily="34" charset="0"/>
+                <a:ea typeface="Calibri" pitchFamily="34" charset="-122"/>
+                <a:cs typeface="Calibri" pitchFamily="34" charset="-120"/>
+              </a:rPr>
+              <a:t>7</a:t>
+            </a:r>
+            <a:endParaRPr lang="en-US" sz="2200" dirty="0"/>
           </a:p>
         </p:txBody>
       </p:sp>
@@ -3338,90 +3510,51 @@
         </p:nvSpPr>
         <p:spPr>
           <a:xfrm>
-            <a:off x="1463040" y="2304288"/>
-            <a:ext cx="7863840" cy="502920"/>
-          </a:xfrm>
-          <a:prstGeom prst="rect">
-            <a:avLst/>
-          </a:prstGeom>
-          <a:noFill/>
-          <a:ln/>
-        </p:spPr>
-        <p:txBody>
-          <a:bodyPr wrap="square" lIns="0" tIns="0" rIns="0" bIns="0" rtlCol="0" anchor="t"/>
-          <a:lstStyle/>
-          <a:p>
-            <a:pPr indent="0" marL="0">
-              <a:buNone/>
-            </a:pPr>
-            <a:r>
-              <a:rPr lang="en-US" sz="2400" dirty="0">
+            <a:off x="1463040" y="1874520"/>
+            <a:ext cx="9966960" cy="685800"/>
+          </a:xfrm>
+          <a:prstGeom prst="rect">
+            <a:avLst/>
+          </a:prstGeom>
+          <a:noFill/>
+          <a:ln/>
+        </p:spPr>
+        <p:txBody>
+          <a:bodyPr wrap="square" lIns="0" tIns="0" rIns="0" bIns="0" rtlCol="0" anchor="ctr"/>
+          <a:lstStyle/>
+          <a:p>
+            <a:pPr indent="0" marL="0">
+              <a:buNone/>
+            </a:pPr>
+            <a:r>
+              <a:rPr lang="en-US" sz="2000" dirty="0">
                 <a:solidFill>
                   <a:srgbClr val="1E2761"/>
                 </a:solidFill>
-                <a:latin typeface="Cambria" pitchFamily="34" charset="0"/>
-                <a:ea typeface="Cambria" pitchFamily="34" charset="-122"/>
-                <a:cs typeface="Cambria" pitchFamily="34" charset="-120"/>
-              </a:rPr>
-              <a:t>Riesenart – Bart</a:t>
-            </a:r>
-            <a:endParaRPr lang="en-US" sz="2400" dirty="0"/>
-          </a:p>
-        </p:txBody>
-      </p:sp>
-      <p:sp>
-        <p:nvSpPr>
-          <p:cNvPr id="11" name="Text 8"/>
-          <p:cNvSpPr txBox="1"/>
-          <p:nvPr/>
-        </p:nvSpPr>
-        <p:spPr>
-          <a:xfrm>
-            <a:off x="9418320" y="2377440"/>
-            <a:ext cx="2011680" cy="365760"/>
-          </a:xfrm>
-          <a:prstGeom prst="rect">
-            <a:avLst/>
-          </a:prstGeom>
-          <a:noFill/>
-          <a:ln/>
-        </p:spPr>
-        <p:txBody>
-          <a:bodyPr wrap="square" lIns="0" tIns="0" rIns="0" bIns="0" rtlCol="0" anchor="t"/>
-          <a:lstStyle/>
-          <a:p>
-            <a:pPr algn="r" indent="0" marL="0">
-              <a:buNone/>
-            </a:pPr>
-            <a:r>
-              <a:rPr lang="en-US" sz="1500" dirty="0">
-                <a:solidFill>
-                  <a:srgbClr val="5B6B8C"/>
-                </a:solidFill>
-                <a:latin typeface="Calibri" pitchFamily="34" charset="0"/>
-                <a:ea typeface="Calibri" pitchFamily="34" charset="-122"/>
-                <a:cs typeface="Calibri" pitchFamily="34" charset="-120"/>
-              </a:rPr>
-              <a:t>Str. 1</a:t>
-            </a:r>
-            <a:endParaRPr lang="en-US" sz="1500" dirty="0"/>
-          </a:p>
-        </p:txBody>
-      </p:sp>
-      <p:sp>
-        <p:nvSpPr>
-          <p:cNvPr id="12" name="Shape 9"/>
+                <a:latin typeface="Calibri" pitchFamily="34" charset="0"/>
+                <a:ea typeface="Calibri" pitchFamily="34" charset="-122"/>
+                <a:cs typeface="Calibri" pitchFamily="34" charset="-120"/>
+              </a:rPr>
+              <a:t>Str. 7 (Schaya) oder Str. 9 (der Schotte): die ganze Strophe ist Figurenrede, kein Erzähler</a:t>
+            </a:r>
+            <a:endParaRPr lang="en-US" sz="2000" dirty="0"/>
+          </a:p>
+        </p:txBody>
+      </p:sp>
+      <p:sp>
+        <p:nvSpPr>
+          <p:cNvPr id="11" name="Shape 8"/>
           <p:cNvSpPr/>
           <p:nvPr/>
         </p:nvSpPr>
         <p:spPr>
           <a:xfrm>
-            <a:off x="548640" y="3154680"/>
-            <a:ext cx="11064240" cy="868680"/>
+            <a:off x="548640" y="2834640"/>
+            <a:ext cx="11064240" cy="914400"/>
           </a:xfrm>
           <a:prstGeom prst="roundRect">
             <a:avLst>
-              <a:gd name="adj" fmla="val 8421"/>
+              <a:gd name="adj" fmla="val 8000"/>
             </a:avLst>
           </a:prstGeom>
           <a:solidFill>
@@ -3432,346 +3565,79 @@
       </p:sp>
       <p:sp>
         <p:nvSpPr>
+          <p:cNvPr id="12" name="Text 9"/>
+          <p:cNvSpPr txBox="1"/>
+          <p:nvPr/>
+        </p:nvSpPr>
+        <p:spPr>
+          <a:xfrm>
+            <a:off x="731520" y="3063240"/>
+            <a:ext cx="731520" cy="457200"/>
+          </a:xfrm>
+          <a:prstGeom prst="rect">
+            <a:avLst/>
+          </a:prstGeom>
+          <a:noFill/>
+          <a:ln/>
+        </p:spPr>
+        <p:txBody>
+          <a:bodyPr wrap="square" lIns="0" tIns="0" rIns="0" bIns="0" rtlCol="0" anchor="t"/>
+          <a:lstStyle/>
+          <a:p>
+            <a:pPr indent="0" marL="0">
+              <a:buNone/>
+            </a:pPr>
+            <a:r>
+              <a:rPr lang="en-US" sz="2200" b="1" dirty="0">
+                <a:solidFill>
+                  <a:srgbClr val="C77C12"/>
+                </a:solidFill>
+                <a:latin typeface="Calibri" pitchFamily="34" charset="0"/>
+                <a:ea typeface="Calibri" pitchFamily="34" charset="-122"/>
+                <a:cs typeface="Calibri" pitchFamily="34" charset="-120"/>
+              </a:rPr>
+              <a:t>* 8</a:t>
+            </a:r>
+            <a:endParaRPr lang="en-US" sz="2200" dirty="0"/>
+          </a:p>
+        </p:txBody>
+      </p:sp>
+      <p:sp>
+        <p:nvSpPr>
           <p:cNvPr id="13" name="Text 10"/>
           <p:cNvSpPr txBox="1"/>
           <p:nvPr/>
         </p:nvSpPr>
         <p:spPr>
           <a:xfrm>
-            <a:off x="777240" y="3319272"/>
-            <a:ext cx="548640" cy="548640"/>
-          </a:xfrm>
-          <a:prstGeom prst="rect">
-            <a:avLst/>
-          </a:prstGeom>
-          <a:noFill/>
-          <a:ln/>
-        </p:spPr>
-        <p:txBody>
-          <a:bodyPr wrap="square" lIns="0" tIns="0" rIns="0" bIns="0" rtlCol="0" anchor="t"/>
-          <a:lstStyle/>
-          <a:p>
-            <a:pPr indent="0" marL="0">
-              <a:buNone/>
-            </a:pPr>
-            <a:r>
-              <a:rPr lang="en-US" sz="2800" b="1" dirty="0">
-                <a:solidFill>
-                  <a:srgbClr val="D9534F"/>
-                </a:solidFill>
-                <a:latin typeface="Cambria" pitchFamily="34" charset="0"/>
-                <a:ea typeface="Cambria" pitchFamily="34" charset="-122"/>
-                <a:cs typeface="Cambria" pitchFamily="34" charset="-120"/>
-              </a:rPr>
-              <a:t>B</a:t>
-            </a:r>
-            <a:endParaRPr lang="en-US" sz="2800" dirty="0"/>
-          </a:p>
-        </p:txBody>
-      </p:sp>
-      <p:sp>
-        <p:nvSpPr>
-          <p:cNvPr id="14" name="Text 11"/>
-          <p:cNvSpPr txBox="1"/>
-          <p:nvPr/>
-        </p:nvSpPr>
-        <p:spPr>
-          <a:xfrm>
-            <a:off x="1463040" y="3355848"/>
-            <a:ext cx="7863840" cy="502920"/>
-          </a:xfrm>
-          <a:prstGeom prst="rect">
-            <a:avLst/>
-          </a:prstGeom>
-          <a:noFill/>
-          <a:ln/>
-        </p:spPr>
-        <p:txBody>
-          <a:bodyPr wrap="square" lIns="0" tIns="0" rIns="0" bIns="0" rtlCol="0" anchor="t"/>
-          <a:lstStyle/>
-          <a:p>
-            <a:pPr indent="0" marL="0">
-              <a:buNone/>
-            </a:pPr>
-            <a:r>
-              <a:rPr lang="en-US" sz="2400" dirty="0">
+            <a:off x="1463040" y="2971800"/>
+            <a:ext cx="9966960" cy="685800"/>
+          </a:xfrm>
+          <a:prstGeom prst="rect">
+            <a:avLst/>
+          </a:prstGeom>
+          <a:noFill/>
+          <a:ln/>
+        </p:spPr>
+        <p:txBody>
+          <a:bodyPr wrap="square" lIns="0" tIns="0" rIns="0" bIns="0" rtlCol="0" anchor="ctr"/>
+          <a:lstStyle/>
+          <a:p>
+            <a:pPr indent="0" marL="0">
+              <a:buNone/>
+            </a:pPr>
+            <a:r>
+              <a:rPr lang="en-US" sz="2000" dirty="0">
                 <a:solidFill>
                   <a:srgbClr val="1E2761"/>
                 </a:solidFill>
-                <a:latin typeface="Cambria" pitchFamily="34" charset="0"/>
-                <a:ea typeface="Cambria" pitchFamily="34" charset="-122"/>
-                <a:cs typeface="Cambria" pitchFamily="34" charset="-120"/>
-              </a:rPr>
-              <a:t>Da lief er heim in jähem Schreck.</a:t>
-            </a:r>
-            <a:endParaRPr lang="en-US" sz="2400" dirty="0"/>
-          </a:p>
-        </p:txBody>
-      </p:sp>
-      <p:sp>
-        <p:nvSpPr>
-          <p:cNvPr id="15" name="Text 12"/>
-          <p:cNvSpPr txBox="1"/>
-          <p:nvPr/>
-        </p:nvSpPr>
-        <p:spPr>
-          <a:xfrm>
-            <a:off x="9418320" y="3429000"/>
-            <a:ext cx="2011680" cy="365760"/>
-          </a:xfrm>
-          <a:prstGeom prst="rect">
-            <a:avLst/>
-          </a:prstGeom>
-          <a:noFill/>
-          <a:ln/>
-        </p:spPr>
-        <p:txBody>
-          <a:bodyPr wrap="square" lIns="0" tIns="0" rIns="0" bIns="0" rtlCol="0" anchor="t"/>
-          <a:lstStyle/>
-          <a:p>
-            <a:pPr algn="r" indent="0" marL="0">
-              <a:buNone/>
-            </a:pPr>
-            <a:r>
-              <a:rPr lang="en-US" sz="1500" dirty="0">
-                <a:solidFill>
-                  <a:srgbClr val="5B6B8C"/>
-                </a:solidFill>
-                <a:latin typeface="Calibri" pitchFamily="34" charset="0"/>
-                <a:ea typeface="Calibri" pitchFamily="34" charset="-122"/>
-                <a:cs typeface="Calibri" pitchFamily="34" charset="-120"/>
-              </a:rPr>
-              <a:t>Str. 4, V. 16</a:t>
-            </a:r>
-            <a:endParaRPr lang="en-US" sz="1500" dirty="0"/>
-          </a:p>
-        </p:txBody>
-      </p:sp>
-      <p:sp>
-        <p:nvSpPr>
-          <p:cNvPr id="16" name="Shape 13"/>
-          <p:cNvSpPr/>
-          <p:nvPr/>
-        </p:nvSpPr>
-        <p:spPr>
-          <a:xfrm>
-            <a:off x="548640" y="4206240"/>
-            <a:ext cx="11064240" cy="868680"/>
-          </a:xfrm>
-          <a:prstGeom prst="roundRect">
-            <a:avLst>
-              <a:gd name="adj" fmla="val 8421"/>
-            </a:avLst>
-          </a:prstGeom>
-          <a:solidFill>
-            <a:srgbClr val="F4F7FD"/>
-          </a:solidFill>
-          <a:ln/>
-        </p:spPr>
-      </p:sp>
-      <p:sp>
-        <p:nvSpPr>
-          <p:cNvPr id="17" name="Text 14"/>
-          <p:cNvSpPr txBox="1"/>
-          <p:nvPr/>
-        </p:nvSpPr>
-        <p:spPr>
-          <a:xfrm>
-            <a:off x="777240" y="4370832"/>
-            <a:ext cx="548640" cy="548640"/>
-          </a:xfrm>
-          <a:prstGeom prst="rect">
-            <a:avLst/>
-          </a:prstGeom>
-          <a:noFill/>
-          <a:ln/>
-        </p:spPr>
-        <p:txBody>
-          <a:bodyPr wrap="square" lIns="0" tIns="0" rIns="0" bIns="0" rtlCol="0" anchor="t"/>
-          <a:lstStyle/>
-          <a:p>
-            <a:pPr indent="0" marL="0">
-              <a:buNone/>
-            </a:pPr>
-            <a:r>
-              <a:rPr lang="en-US" sz="2800" b="1" dirty="0">
-                <a:solidFill>
-                  <a:srgbClr val="D9534F"/>
-                </a:solidFill>
-                <a:latin typeface="Cambria" pitchFamily="34" charset="0"/>
-                <a:ea typeface="Cambria" pitchFamily="34" charset="-122"/>
-                <a:cs typeface="Cambria" pitchFamily="34" charset="-120"/>
-              </a:rPr>
-              <a:t>C</a:t>
-            </a:r>
-            <a:endParaRPr lang="en-US" sz="2800" dirty="0"/>
-          </a:p>
-        </p:txBody>
-      </p:sp>
-      <p:sp>
-        <p:nvSpPr>
-          <p:cNvPr id="18" name="Text 15"/>
-          <p:cNvSpPr txBox="1"/>
-          <p:nvPr/>
-        </p:nvSpPr>
-        <p:spPr>
-          <a:xfrm>
-            <a:off x="1463040" y="4407408"/>
-            <a:ext cx="7863840" cy="502920"/>
-          </a:xfrm>
-          <a:prstGeom prst="rect">
-            <a:avLst/>
-          </a:prstGeom>
-          <a:noFill/>
-          <a:ln/>
-        </p:spPr>
-        <p:txBody>
-          <a:bodyPr wrap="square" lIns="0" tIns="0" rIns="0" bIns="0" rtlCol="0" anchor="t"/>
-          <a:lstStyle/>
-          <a:p>
-            <a:pPr indent="0" marL="0">
-              <a:buNone/>
-            </a:pPr>
-            <a:r>
-              <a:rPr lang="en-US" sz="2400" dirty="0">
-                <a:solidFill>
-                  <a:srgbClr val="1E2761"/>
-                </a:solidFill>
-                <a:latin typeface="Cambria" pitchFamily="34" charset="0"/>
-                <a:ea typeface="Cambria" pitchFamily="34" charset="-122"/>
-                <a:cs typeface="Cambria" pitchFamily="34" charset="-120"/>
-              </a:rPr>
-              <a:t>„O Schaya, birg mich im Versteck!“</a:t>
-            </a:r>
-            <a:endParaRPr lang="en-US" sz="2400" dirty="0"/>
-          </a:p>
-        </p:txBody>
-      </p:sp>
-      <p:sp>
-        <p:nvSpPr>
-          <p:cNvPr id="19" name="Text 16"/>
-          <p:cNvSpPr txBox="1"/>
-          <p:nvPr/>
-        </p:nvSpPr>
-        <p:spPr>
-          <a:xfrm>
-            <a:off x="9418320" y="4480560"/>
-            <a:ext cx="2011680" cy="365760"/>
-          </a:xfrm>
-          <a:prstGeom prst="rect">
-            <a:avLst/>
-          </a:prstGeom>
-          <a:noFill/>
-          <a:ln/>
-        </p:spPr>
-        <p:txBody>
-          <a:bodyPr wrap="square" lIns="0" tIns="0" rIns="0" bIns="0" rtlCol="0" anchor="t"/>
-          <a:lstStyle/>
-          <a:p>
-            <a:pPr algn="r" indent="0" marL="0">
-              <a:buNone/>
-            </a:pPr>
-            <a:r>
-              <a:rPr lang="en-US" sz="1500" dirty="0">
-                <a:solidFill>
-                  <a:srgbClr val="5B6B8C"/>
-                </a:solidFill>
-                <a:latin typeface="Calibri" pitchFamily="34" charset="0"/>
-                <a:ea typeface="Calibri" pitchFamily="34" charset="-122"/>
-                <a:cs typeface="Calibri" pitchFamily="34" charset="-120"/>
-              </a:rPr>
-              <a:t>Str. 4, V. 17</a:t>
-            </a:r>
-            <a:endParaRPr lang="en-US" sz="1500" dirty="0"/>
-          </a:p>
-        </p:txBody>
-      </p:sp>
-      <p:sp>
-        <p:nvSpPr>
-          <p:cNvPr id="20" name="Shape 17"/>
-          <p:cNvSpPr/>
-          <p:nvPr/>
-        </p:nvSpPr>
-        <p:spPr>
-          <a:xfrm>
-            <a:off x="548640" y="5715000"/>
-            <a:ext cx="11064240" cy="502920"/>
-          </a:xfrm>
-          <a:prstGeom prst="roundRect">
-            <a:avLst>
-              <a:gd name="adj" fmla="val 14545"/>
-            </a:avLst>
-          </a:prstGeom>
-          <a:solidFill>
-            <a:srgbClr val="EAF0FA"/>
-          </a:solidFill>
-          <a:ln/>
-        </p:spPr>
-      </p:sp>
-      <p:sp>
-        <p:nvSpPr>
-          <p:cNvPr id="21" name="Text 18"/>
-          <p:cNvSpPr txBox="1"/>
-          <p:nvPr/>
-        </p:nvSpPr>
-        <p:spPr>
-          <a:xfrm>
-            <a:off x="777240" y="5788152"/>
-            <a:ext cx="10698480" cy="365760"/>
-          </a:xfrm>
-          <a:prstGeom prst="rect">
-            <a:avLst/>
-          </a:prstGeom>
-          <a:noFill/>
-          <a:ln/>
-        </p:spPr>
-        <p:txBody>
-          <a:bodyPr wrap="square" lIns="0" tIns="0" rIns="0" bIns="0" rtlCol="0" anchor="t"/>
-          <a:lstStyle/>
-          <a:p>
-            <a:pPr indent="0" marL="0">
-              <a:buNone/>
-            </a:pPr>
-            <a:r>
-              <a:rPr lang="en-US" sz="1600" b="1" dirty="0">
-                <a:solidFill>
-                  <a:srgbClr val="1E2761"/>
-                </a:solidFill>
-                <a:latin typeface="Calibri" pitchFamily="34" charset="0"/>
-                <a:ea typeface="Calibri" pitchFamily="34" charset="-122"/>
-                <a:cs typeface="Calibri" pitchFamily="34" charset="-120"/>
-              </a:rPr>
-              <a:t>Zeit: </a:t>
-            </a:r>
-            <a:pPr indent="0" marL="0">
-              <a:buNone/>
-            </a:pPr>
-            <a:r>
-              <a:rPr lang="en-US" sz="1600" dirty="0">
-                <a:solidFill>
-                  <a:srgbClr val="1E2761"/>
-                </a:solidFill>
-                <a:latin typeface="Calibri" pitchFamily="34" charset="0"/>
-                <a:ea typeface="Calibri" pitchFamily="34" charset="-122"/>
-                <a:cs typeface="Calibri" pitchFamily="34" charset="-120"/>
-              </a:rPr>
-              <a:t>4 Minuten · allein im Heft      </a:t>
-            </a:r>
-            <a:pPr indent="0" marL="0">
-              <a:buNone/>
-            </a:pPr>
-            <a:r>
-              <a:rPr lang="en-US" sz="1600" i="1" dirty="0">
-                <a:solidFill>
-                  <a:srgbClr val="5B6B8C"/>
-                </a:solidFill>
-                <a:latin typeface="Calibri" pitchFamily="34" charset="0"/>
-                <a:ea typeface="Calibri" pitchFamily="34" charset="-122"/>
-                <a:cs typeface="Calibri" pitchFamily="34" charset="-120"/>
-              </a:rPr>
-              <a:t>Fertig? Stift hinlegen.</a:t>
-            </a:r>
-            <a:endParaRPr lang="en-US" sz="1600" dirty="0"/>
+                <a:latin typeface="Calibri" pitchFamily="34" charset="0"/>
+                <a:ea typeface="Calibri" pitchFamily="34" charset="-122"/>
+                <a:cs typeface="Calibri" pitchFamily="34" charset="-120"/>
+              </a:rPr>
+              <a:t>Paddy gegen den Schotten – Frage: Findet der Schotte Paddy? Wer ist stärker?</a:t>
+            </a:r>
+            <a:endParaRPr lang="en-US" sz="2000" dirty="0"/>
           </a:p>
         </p:txBody>
       </p:sp>
@@ -3840,7 +3706,7 @@
                 <a:ea typeface="Calibri" pitchFamily="34" charset="-122"/>
                 <a:cs typeface="Calibri" pitchFamily="34" charset="-120"/>
               </a:rPr>
-              <a:t>AUSWERTEN · SELBSTKONTROLLE</a:t>
+              <a:t>AUSWERTEN</a:t>
             </a:r>
             <a:endParaRPr lang="en-US" sz="1200" dirty="0"/>
           </a:p>
@@ -3879,7 +3745,7 @@
                 <a:ea typeface="Cambria" pitchFamily="34" charset="-122"/>
                 <a:cs typeface="Cambria" pitchFamily="34" charset="-120"/>
               </a:rPr>
-              <a:t>Zielcheck – Lösung</a:t>
+              <a:t>Zielcheck: Hast du das Ziel erreicht?</a:t>
             </a:r>
             <a:endParaRPr lang="en-US" sz="3200" dirty="0"/>
           </a:p>
@@ -3965,18 +3831,57 @@
       </p:sp>
       <p:sp>
         <p:nvSpPr>
-          <p:cNvPr id="7" name="Shape 4"/>
+          <p:cNvPr id="7" name="Text 4"/>
+          <p:cNvSpPr txBox="1"/>
+          <p:nvPr/>
+        </p:nvSpPr>
+        <p:spPr>
+          <a:xfrm>
+            <a:off x="548640" y="1371600"/>
+            <a:ext cx="11064240" cy="411480"/>
+          </a:xfrm>
+          <a:prstGeom prst="rect">
+            <a:avLst/>
+          </a:prstGeom>
+          <a:noFill/>
+          <a:ln/>
+        </p:spPr>
+        <p:txBody>
+          <a:bodyPr wrap="square" lIns="0" tIns="0" rIns="0" bIns="0" rtlCol="0" anchor="t"/>
+          <a:lstStyle/>
+          <a:p>
+            <a:pPr indent="0" marL="0">
+              <a:buNone/>
+            </a:pPr>
+            <a:r>
+              <a:rPr lang="en-US" sz="1800" b="1" dirty="0">
+                <a:solidFill>
+                  <a:srgbClr val="1E2761"/>
+                </a:solidFill>
+                <a:latin typeface="Calibri" pitchFamily="34" charset="0"/>
+                <a:ea typeface="Calibri" pitchFamily="34" charset="-122"/>
+                <a:cs typeface="Calibri" pitchFamily="34" charset="-120"/>
+              </a:rPr>
+              <a:t>Ordne jede Stelle einer Gattung zu: Lyrik, Epik oder Dramatik. Begründe mit dem Merkmal.</a:t>
+            </a:r>
+            <a:endParaRPr lang="en-US" sz="1800" dirty="0"/>
+          </a:p>
+        </p:txBody>
+      </p:sp>
+      <p:sp>
+        <p:nvSpPr>
+          <p:cNvPr id="8" name="Shape 5"/>
           <p:cNvSpPr/>
           <p:nvPr/>
         </p:nvSpPr>
         <p:spPr>
           <a:xfrm>
-            <a:off x="548640" y="1554480"/>
-            <a:ext cx="11064240" cy="1005840"/>
+            <a:off x="548640" y="1874520"/>
+            <a:ext cx="11064240" cy="713232"/>
           </a:xfrm>
           <a:prstGeom prst="roundRect">
             <a:avLst>
-              <a:gd name="adj" fmla="val 7273"/>
+              <a:gd name="adj" fmla="val 10256"/>
             </a:avLst>
           </a:prstGeom>
           <a:solidFill>
@@ -3987,14 +3892,803 @@
       </p:sp>
       <p:sp>
         <p:nvSpPr>
+          <p:cNvPr id="9" name="Text 6"/>
+          <p:cNvSpPr txBox="1"/>
+          <p:nvPr/>
+        </p:nvSpPr>
+        <p:spPr>
+          <a:xfrm>
+            <a:off x="777240" y="1984248"/>
+            <a:ext cx="548640" cy="502920"/>
+          </a:xfrm>
+          <a:prstGeom prst="rect">
+            <a:avLst/>
+          </a:prstGeom>
+          <a:noFill/>
+          <a:ln/>
+        </p:spPr>
+        <p:txBody>
+          <a:bodyPr wrap="square" lIns="0" tIns="0" rIns="0" bIns="0" rtlCol="0" anchor="t"/>
+          <a:lstStyle/>
+          <a:p>
+            <a:pPr indent="0" marL="0">
+              <a:buNone/>
+            </a:pPr>
+            <a:r>
+              <a:rPr lang="en-US" sz="2400" b="1" dirty="0">
+                <a:solidFill>
+                  <a:srgbClr val="D9534F"/>
+                </a:solidFill>
+                <a:latin typeface="Cambria" pitchFamily="34" charset="0"/>
+                <a:ea typeface="Cambria" pitchFamily="34" charset="-122"/>
+                <a:cs typeface="Cambria" pitchFamily="34" charset="-120"/>
+              </a:rPr>
+              <a:t>A</a:t>
+            </a:r>
+            <a:endParaRPr lang="en-US" sz="2400" dirty="0"/>
+          </a:p>
+        </p:txBody>
+      </p:sp>
+      <p:sp>
+        <p:nvSpPr>
+          <p:cNvPr id="10" name="Text 7"/>
+          <p:cNvSpPr txBox="1"/>
+          <p:nvPr/>
+        </p:nvSpPr>
+        <p:spPr>
+          <a:xfrm>
+            <a:off x="1463040" y="2020824"/>
+            <a:ext cx="8138160" cy="457200"/>
+          </a:xfrm>
+          <a:prstGeom prst="rect">
+            <a:avLst/>
+          </a:prstGeom>
+          <a:noFill/>
+          <a:ln/>
+        </p:spPr>
+        <p:txBody>
+          <a:bodyPr wrap="square" lIns="0" tIns="0" rIns="0" bIns="0" rtlCol="0" anchor="t"/>
+          <a:lstStyle/>
+          <a:p>
+            <a:pPr indent="0" marL="0">
+              <a:buNone/>
+            </a:pPr>
+            <a:r>
+              <a:rPr lang="en-US" sz="1900" dirty="0">
+                <a:solidFill>
+                  <a:srgbClr val="1E2761"/>
+                </a:solidFill>
+                <a:latin typeface="Cambria" pitchFamily="34" charset="0"/>
+                <a:ea typeface="Cambria" pitchFamily="34" charset="-122"/>
+                <a:cs typeface="Cambria" pitchFamily="34" charset="-120"/>
+              </a:rPr>
+              <a:t>Riesenart – Bart</a:t>
+            </a:r>
+            <a:endParaRPr lang="en-US" sz="1900" dirty="0"/>
+          </a:p>
+        </p:txBody>
+      </p:sp>
+      <p:sp>
+        <p:nvSpPr>
+          <p:cNvPr id="11" name="Text 8"/>
+          <p:cNvSpPr txBox="1"/>
+          <p:nvPr/>
+        </p:nvSpPr>
+        <p:spPr>
+          <a:xfrm>
+            <a:off x="9509760" y="2075688"/>
+            <a:ext cx="1920240" cy="365760"/>
+          </a:xfrm>
+          <a:prstGeom prst="rect">
+            <a:avLst/>
+          </a:prstGeom>
+          <a:noFill/>
+          <a:ln/>
+        </p:spPr>
+        <p:txBody>
+          <a:bodyPr wrap="square" lIns="0" tIns="0" rIns="0" bIns="0" rtlCol="0" anchor="t"/>
+          <a:lstStyle/>
+          <a:p>
+            <a:pPr algn="r" indent="0" marL="0">
+              <a:buNone/>
+            </a:pPr>
+            <a:r>
+              <a:rPr lang="en-US" sz="1400" dirty="0">
+                <a:solidFill>
+                  <a:srgbClr val="5B6B8C"/>
+                </a:solidFill>
+                <a:latin typeface="Calibri" pitchFamily="34" charset="0"/>
+                <a:ea typeface="Calibri" pitchFamily="34" charset="-122"/>
+                <a:cs typeface="Calibri" pitchFamily="34" charset="-120"/>
+              </a:rPr>
+              <a:t>Str. 1</a:t>
+            </a:r>
+            <a:endParaRPr lang="en-US" sz="1400" dirty="0"/>
+          </a:p>
+        </p:txBody>
+      </p:sp>
+      <p:sp>
+        <p:nvSpPr>
+          <p:cNvPr id="12" name="Shape 9"/>
+          <p:cNvSpPr/>
+          <p:nvPr/>
+        </p:nvSpPr>
+        <p:spPr>
+          <a:xfrm>
+            <a:off x="548640" y="2697480"/>
+            <a:ext cx="11064240" cy="713232"/>
+          </a:xfrm>
+          <a:prstGeom prst="roundRect">
+            <a:avLst>
+              <a:gd name="adj" fmla="val 10256"/>
+            </a:avLst>
+          </a:prstGeom>
+          <a:solidFill>
+            <a:srgbClr val="F4F7FD"/>
+          </a:solidFill>
+          <a:ln/>
+        </p:spPr>
+      </p:sp>
+      <p:sp>
+        <p:nvSpPr>
+          <p:cNvPr id="13" name="Text 10"/>
+          <p:cNvSpPr txBox="1"/>
+          <p:nvPr/>
+        </p:nvSpPr>
+        <p:spPr>
+          <a:xfrm>
+            <a:off x="777240" y="2807208"/>
+            <a:ext cx="548640" cy="502920"/>
+          </a:xfrm>
+          <a:prstGeom prst="rect">
+            <a:avLst/>
+          </a:prstGeom>
+          <a:noFill/>
+          <a:ln/>
+        </p:spPr>
+        <p:txBody>
+          <a:bodyPr wrap="square" lIns="0" tIns="0" rIns="0" bIns="0" rtlCol="0" anchor="t"/>
+          <a:lstStyle/>
+          <a:p>
+            <a:pPr indent="0" marL="0">
+              <a:buNone/>
+            </a:pPr>
+            <a:r>
+              <a:rPr lang="en-US" sz="2400" b="1" dirty="0">
+                <a:solidFill>
+                  <a:srgbClr val="D9534F"/>
+                </a:solidFill>
+                <a:latin typeface="Cambria" pitchFamily="34" charset="0"/>
+                <a:ea typeface="Cambria" pitchFamily="34" charset="-122"/>
+                <a:cs typeface="Cambria" pitchFamily="34" charset="-120"/>
+              </a:rPr>
+              <a:t>B</a:t>
+            </a:r>
+            <a:endParaRPr lang="en-US" sz="2400" dirty="0"/>
+          </a:p>
+        </p:txBody>
+      </p:sp>
+      <p:sp>
+        <p:nvSpPr>
+          <p:cNvPr id="14" name="Text 11"/>
+          <p:cNvSpPr txBox="1"/>
+          <p:nvPr/>
+        </p:nvSpPr>
+        <p:spPr>
+          <a:xfrm>
+            <a:off x="1463040" y="2843784"/>
+            <a:ext cx="8138160" cy="457200"/>
+          </a:xfrm>
+          <a:prstGeom prst="rect">
+            <a:avLst/>
+          </a:prstGeom>
+          <a:noFill/>
+          <a:ln/>
+        </p:spPr>
+        <p:txBody>
+          <a:bodyPr wrap="square" lIns="0" tIns="0" rIns="0" bIns="0" rtlCol="0" anchor="t"/>
+          <a:lstStyle/>
+          <a:p>
+            <a:pPr indent="0" marL="0">
+              <a:buNone/>
+            </a:pPr>
+            <a:r>
+              <a:rPr lang="en-US" sz="1900" dirty="0">
+                <a:solidFill>
+                  <a:srgbClr val="1E2761"/>
+                </a:solidFill>
+                <a:latin typeface="Cambria" pitchFamily="34" charset="0"/>
+                <a:ea typeface="Cambria" pitchFamily="34" charset="-122"/>
+                <a:cs typeface="Cambria" pitchFamily="34" charset="-120"/>
+              </a:rPr>
+              <a:t>Da lief er heim in jähem Schreck.</a:t>
+            </a:r>
+            <a:endParaRPr lang="en-US" sz="1900" dirty="0"/>
+          </a:p>
+        </p:txBody>
+      </p:sp>
+      <p:sp>
+        <p:nvSpPr>
+          <p:cNvPr id="15" name="Text 12"/>
+          <p:cNvSpPr txBox="1"/>
+          <p:nvPr/>
+        </p:nvSpPr>
+        <p:spPr>
+          <a:xfrm>
+            <a:off x="9509760" y="2898648"/>
+            <a:ext cx="1920240" cy="365760"/>
+          </a:xfrm>
+          <a:prstGeom prst="rect">
+            <a:avLst/>
+          </a:prstGeom>
+          <a:noFill/>
+          <a:ln/>
+        </p:spPr>
+        <p:txBody>
+          <a:bodyPr wrap="square" lIns="0" tIns="0" rIns="0" bIns="0" rtlCol="0" anchor="t"/>
+          <a:lstStyle/>
+          <a:p>
+            <a:pPr algn="r" indent="0" marL="0">
+              <a:buNone/>
+            </a:pPr>
+            <a:r>
+              <a:rPr lang="en-US" sz="1400" dirty="0">
+                <a:solidFill>
+                  <a:srgbClr val="5B6B8C"/>
+                </a:solidFill>
+                <a:latin typeface="Calibri" pitchFamily="34" charset="0"/>
+                <a:ea typeface="Calibri" pitchFamily="34" charset="-122"/>
+                <a:cs typeface="Calibri" pitchFamily="34" charset="-120"/>
+              </a:rPr>
+              <a:t>Str. 4, V. 16</a:t>
+            </a:r>
+            <a:endParaRPr lang="en-US" sz="1400" dirty="0"/>
+          </a:p>
+        </p:txBody>
+      </p:sp>
+      <p:sp>
+        <p:nvSpPr>
+          <p:cNvPr id="16" name="Shape 13"/>
+          <p:cNvSpPr/>
+          <p:nvPr/>
+        </p:nvSpPr>
+        <p:spPr>
+          <a:xfrm>
+            <a:off x="548640" y="3520440"/>
+            <a:ext cx="11064240" cy="713232"/>
+          </a:xfrm>
+          <a:prstGeom prst="roundRect">
+            <a:avLst>
+              <a:gd name="adj" fmla="val 10256"/>
+            </a:avLst>
+          </a:prstGeom>
+          <a:solidFill>
+            <a:srgbClr val="F4F7FD"/>
+          </a:solidFill>
+          <a:ln/>
+        </p:spPr>
+      </p:sp>
+      <p:sp>
+        <p:nvSpPr>
+          <p:cNvPr id="17" name="Text 14"/>
+          <p:cNvSpPr txBox="1"/>
+          <p:nvPr/>
+        </p:nvSpPr>
+        <p:spPr>
+          <a:xfrm>
+            <a:off x="777240" y="3630168"/>
+            <a:ext cx="548640" cy="502920"/>
+          </a:xfrm>
+          <a:prstGeom prst="rect">
+            <a:avLst/>
+          </a:prstGeom>
+          <a:noFill/>
+          <a:ln/>
+        </p:spPr>
+        <p:txBody>
+          <a:bodyPr wrap="square" lIns="0" tIns="0" rIns="0" bIns="0" rtlCol="0" anchor="t"/>
+          <a:lstStyle/>
+          <a:p>
+            <a:pPr indent="0" marL="0">
+              <a:buNone/>
+            </a:pPr>
+            <a:r>
+              <a:rPr lang="en-US" sz="2400" b="1" dirty="0">
+                <a:solidFill>
+                  <a:srgbClr val="D9534F"/>
+                </a:solidFill>
+                <a:latin typeface="Cambria" pitchFamily="34" charset="0"/>
+                <a:ea typeface="Cambria" pitchFamily="34" charset="-122"/>
+                <a:cs typeface="Cambria" pitchFamily="34" charset="-120"/>
+              </a:rPr>
+              <a:t>C</a:t>
+            </a:r>
+            <a:endParaRPr lang="en-US" sz="2400" dirty="0"/>
+          </a:p>
+        </p:txBody>
+      </p:sp>
+      <p:sp>
+        <p:nvSpPr>
+          <p:cNvPr id="18" name="Text 15"/>
+          <p:cNvSpPr txBox="1"/>
+          <p:nvPr/>
+        </p:nvSpPr>
+        <p:spPr>
+          <a:xfrm>
+            <a:off x="1463040" y="3666744"/>
+            <a:ext cx="8138160" cy="457200"/>
+          </a:xfrm>
+          <a:prstGeom prst="rect">
+            <a:avLst/>
+          </a:prstGeom>
+          <a:noFill/>
+          <a:ln/>
+        </p:spPr>
+        <p:txBody>
+          <a:bodyPr wrap="square" lIns="0" tIns="0" rIns="0" bIns="0" rtlCol="0" anchor="t"/>
+          <a:lstStyle/>
+          <a:p>
+            <a:pPr indent="0" marL="0">
+              <a:buNone/>
+            </a:pPr>
+            <a:r>
+              <a:rPr lang="en-US" sz="1900" dirty="0">
+                <a:solidFill>
+                  <a:srgbClr val="1E2761"/>
+                </a:solidFill>
+                <a:latin typeface="Cambria" pitchFamily="34" charset="0"/>
+                <a:ea typeface="Cambria" pitchFamily="34" charset="-122"/>
+                <a:cs typeface="Cambria" pitchFamily="34" charset="-120"/>
+              </a:rPr>
+              <a:t>„Ist das ein Baby, wie Ihr sagt, / ein Narr, wer’s mit ihm selber wagt!“</a:t>
+            </a:r>
+            <a:endParaRPr lang="en-US" sz="1900" dirty="0"/>
+          </a:p>
+        </p:txBody>
+      </p:sp>
+      <p:sp>
+        <p:nvSpPr>
+          <p:cNvPr id="19" name="Text 16"/>
+          <p:cNvSpPr txBox="1"/>
+          <p:nvPr/>
+        </p:nvSpPr>
+        <p:spPr>
+          <a:xfrm>
+            <a:off x="9509760" y="3721608"/>
+            <a:ext cx="1920240" cy="365760"/>
+          </a:xfrm>
+          <a:prstGeom prst="rect">
+            <a:avLst/>
+          </a:prstGeom>
+          <a:noFill/>
+          <a:ln/>
+        </p:spPr>
+        <p:txBody>
+          <a:bodyPr wrap="square" lIns="0" tIns="0" rIns="0" bIns="0" rtlCol="0" anchor="t"/>
+          <a:lstStyle/>
+          <a:p>
+            <a:pPr algn="r" indent="0" marL="0">
+              <a:buNone/>
+            </a:pPr>
+            <a:r>
+              <a:rPr lang="en-US" sz="1400" dirty="0">
+                <a:solidFill>
+                  <a:srgbClr val="5B6B8C"/>
+                </a:solidFill>
+                <a:latin typeface="Calibri" pitchFamily="34" charset="0"/>
+                <a:ea typeface="Calibri" pitchFamily="34" charset="-122"/>
+                <a:cs typeface="Calibri" pitchFamily="34" charset="-120"/>
+              </a:rPr>
+              <a:t>Str. 9, V. 43–44</a:t>
+            </a:r>
+            <a:endParaRPr lang="en-US" sz="1400" dirty="0"/>
+          </a:p>
+        </p:txBody>
+      </p:sp>
+      <p:sp>
+        <p:nvSpPr>
+          <p:cNvPr id="20" name="Shape 17"/>
+          <p:cNvSpPr/>
+          <p:nvPr/>
+        </p:nvSpPr>
+        <p:spPr>
+          <a:xfrm>
+            <a:off x="548640" y="4434840"/>
+            <a:ext cx="11064240" cy="1097280"/>
+          </a:xfrm>
+          <a:prstGeom prst="roundRect">
+            <a:avLst>
+              <a:gd name="adj" fmla="val 6667"/>
+            </a:avLst>
+          </a:prstGeom>
+          <a:solidFill>
+            <a:srgbClr val="EAF0FA"/>
+          </a:solidFill>
+          <a:ln w="19050">
+            <a:solidFill>
+              <a:srgbClr val="D9534F"/>
+            </a:solidFill>
+            <a:prstDash val="solid"/>
+          </a:ln>
+        </p:spPr>
+      </p:sp>
+      <p:sp>
+        <p:nvSpPr>
+          <p:cNvPr id="21" name="Text 18"/>
+          <p:cNvSpPr txBox="1"/>
+          <p:nvPr/>
+        </p:nvSpPr>
+        <p:spPr>
+          <a:xfrm>
+            <a:off x="822960" y="4544568"/>
+            <a:ext cx="10607040" cy="914400"/>
+          </a:xfrm>
+          <a:prstGeom prst="rect">
+            <a:avLst/>
+          </a:prstGeom>
+          <a:noFill/>
+          <a:ln/>
+        </p:spPr>
+        <p:txBody>
+          <a:bodyPr wrap="square" lIns="0" tIns="0" rIns="0" bIns="0" rtlCol="0" anchor="t"/>
+          <a:lstStyle/>
+          <a:p>
+            <a:pPr indent="0" marL="0">
+              <a:buNone/>
+            </a:pPr>
+            <a:r>
+              <a:rPr lang="en-US" sz="1800" b="1" dirty="0">
+                <a:solidFill>
+                  <a:srgbClr val="D9534F"/>
+                </a:solidFill>
+                <a:latin typeface="Calibri" pitchFamily="34" charset="0"/>
+                <a:ea typeface="Calibri" pitchFamily="34" charset="-122"/>
+                <a:cs typeface="Calibri" pitchFamily="34" charset="-120"/>
+              </a:rPr>
+              <a:t>D  Prüfstein: </a:t>
+            </a:r>
+            <a:pPr indent="0" marL="0">
+              <a:buNone/>
+            </a:pPr>
+            <a:r>
+              <a:rPr lang="en-US" sz="1800" dirty="0">
+                <a:solidFill>
+                  <a:srgbClr val="1E2761"/>
+                </a:solidFill>
+                <a:latin typeface="Cambria" pitchFamily="34" charset="0"/>
+                <a:ea typeface="Cambria" pitchFamily="34" charset="-122"/>
+                <a:cs typeface="Cambria" pitchFamily="34" charset="-120"/>
+              </a:rPr>
+              <a:t>„Da lief er heim in jähem Schreck: / O Schaya, birg mich im Versteck!“ (Str. 4, V. 16–17)
+</a:t>
+            </a:r>
+            <a:pPr indent="0" marL="0">
+              <a:buNone/>
+            </a:pPr>
+            <a:r>
+              <a:rPr lang="en-US" sz="1800" b="1" dirty="0">
+                <a:solidFill>
+                  <a:srgbClr val="1E2761"/>
+                </a:solidFill>
+                <a:latin typeface="Calibri" pitchFamily="34" charset="0"/>
+                <a:ea typeface="Calibri" pitchFamily="34" charset="-122"/>
+                <a:cs typeface="Calibri" pitchFamily="34" charset="-120"/>
+              </a:rPr>
+              <a:t>Epik oder Dramatik? Begründe.</a:t>
+            </a:r>
+            <a:endParaRPr lang="en-US" sz="1800" dirty="0"/>
+          </a:p>
+        </p:txBody>
+      </p:sp>
+      <p:sp>
+        <p:nvSpPr>
+          <p:cNvPr id="22" name="Shape 19"/>
+          <p:cNvSpPr/>
+          <p:nvPr/>
+        </p:nvSpPr>
+        <p:spPr>
+          <a:xfrm>
+            <a:off x="548640" y="5715000"/>
+            <a:ext cx="11064240" cy="502920"/>
+          </a:xfrm>
+          <a:prstGeom prst="roundRect">
+            <a:avLst>
+              <a:gd name="adj" fmla="val 14545"/>
+            </a:avLst>
+          </a:prstGeom>
+          <a:solidFill>
+            <a:srgbClr val="EAF0FA"/>
+          </a:solidFill>
+          <a:ln/>
+        </p:spPr>
+      </p:sp>
+      <p:sp>
+        <p:nvSpPr>
+          <p:cNvPr id="23" name="Text 20"/>
+          <p:cNvSpPr txBox="1"/>
+          <p:nvPr/>
+        </p:nvSpPr>
+        <p:spPr>
+          <a:xfrm>
+            <a:off x="777240" y="5788152"/>
+            <a:ext cx="10698480" cy="365760"/>
+          </a:xfrm>
+          <a:prstGeom prst="rect">
+            <a:avLst/>
+          </a:prstGeom>
+          <a:noFill/>
+          <a:ln/>
+        </p:spPr>
+        <p:txBody>
+          <a:bodyPr wrap="square" lIns="0" tIns="0" rIns="0" bIns="0" rtlCol="0" anchor="t"/>
+          <a:lstStyle/>
+          <a:p>
+            <a:pPr indent="0" marL="0">
+              <a:buNone/>
+            </a:pPr>
+            <a:r>
+              <a:rPr lang="en-US" sz="1600" b="1" dirty="0">
+                <a:solidFill>
+                  <a:srgbClr val="1E2761"/>
+                </a:solidFill>
+                <a:latin typeface="Calibri" pitchFamily="34" charset="0"/>
+                <a:ea typeface="Calibri" pitchFamily="34" charset="-122"/>
+                <a:cs typeface="Calibri" pitchFamily="34" charset="-120"/>
+              </a:rPr>
+              <a:t>Zeit: </a:t>
+            </a:r>
+            <a:pPr indent="0" marL="0">
+              <a:buNone/>
+            </a:pPr>
+            <a:r>
+              <a:rPr lang="en-US" sz="1600" dirty="0">
+                <a:solidFill>
+                  <a:srgbClr val="1E2761"/>
+                </a:solidFill>
+                <a:latin typeface="Calibri" pitchFamily="34" charset="0"/>
+                <a:ea typeface="Calibri" pitchFamily="34" charset="-122"/>
+                <a:cs typeface="Calibri" pitchFamily="34" charset="-120"/>
+              </a:rPr>
+              <a:t>4 Minuten · allein im Heft      </a:t>
+            </a:r>
+            <a:pPr indent="0" marL="0">
+              <a:buNone/>
+            </a:pPr>
+            <a:r>
+              <a:rPr lang="en-US" sz="1600" i="1" dirty="0">
+                <a:solidFill>
+                  <a:srgbClr val="5B6B8C"/>
+                </a:solidFill>
+                <a:latin typeface="Calibri" pitchFamily="34" charset="0"/>
+                <a:ea typeface="Calibri" pitchFamily="34" charset="-122"/>
+                <a:cs typeface="Calibri" pitchFamily="34" charset="-120"/>
+              </a:rPr>
+              <a:t>Fertig? Stift hinlegen.</a:t>
+            </a:r>
+            <a:endParaRPr lang="en-US" sz="1600" dirty="0"/>
+          </a:p>
+        </p:txBody>
+      </p:sp>
+    </p:spTree>
+  </p:cSld>
+  <p:clrMapOvr>
+    <a:masterClrMapping/>
+  </p:clrMapOvr>
+</p:sld>
+</file>
+
+<file path=ppt/slides/slide14.xml><?xml version="1.0" encoding="utf-8"?>
+<p:sld xmlns:a="http://schemas.openxmlformats.org/drawingml/2006/main" xmlns:r="http://schemas.openxmlformats.org/officeDocument/2006/relationships" xmlns:p="http://schemas.openxmlformats.org/presentationml/2006/main">
+  <p:cSld name="Slide 14">
+    <p:bg>
+      <p:bgPr>
+        <a:solidFill>
+          <a:srgbClr val="FFFFFF"/>
+        </a:solidFill>
+      </p:bgPr>
+    </p:bg>
+    <p:spTree>
+      <p:nvGrpSpPr>
+        <p:cNvPr id="1" name=""/>
+        <p:cNvGrpSpPr/>
+        <p:nvPr/>
+      </p:nvGrpSpPr>
+      <p:grpSpPr>
+        <a:xfrm>
+          <a:off x="0" y="0"/>
+          <a:ext cx="0" cy="0"/>
+          <a:chOff x="0" y="0"/>
+          <a:chExt cx="0" cy="0"/>
+        </a:xfrm>
+      </p:grpSpPr>
+      <p:sp>
+        <p:nvSpPr>
+          <p:cNvPr id="2" name="Text 0"/>
+          <p:cNvSpPr txBox="1"/>
+          <p:nvPr/>
+        </p:nvSpPr>
+        <p:spPr>
+          <a:xfrm>
+            <a:off x="548640" y="365760"/>
+            <a:ext cx="8229600" cy="274320"/>
+          </a:xfrm>
+          <a:prstGeom prst="rect">
+            <a:avLst/>
+          </a:prstGeom>
+          <a:noFill/>
+          <a:ln/>
+        </p:spPr>
+        <p:txBody>
+          <a:bodyPr wrap="square" lIns="0" tIns="0" rIns="0" bIns="0" rtlCol="0" anchor="t"/>
+          <a:lstStyle/>
+          <a:p>
+            <a:pPr indent="0" marL="0">
+              <a:buNone/>
+            </a:pPr>
+            <a:r>
+              <a:rPr lang="en-US" sz="1200" spc="200" kern="0" dirty="0">
+                <a:solidFill>
+                  <a:srgbClr val="5B6B8C"/>
+                </a:solidFill>
+                <a:latin typeface="Calibri" pitchFamily="34" charset="0"/>
+                <a:ea typeface="Calibri" pitchFamily="34" charset="-122"/>
+                <a:cs typeface="Calibri" pitchFamily="34" charset="-120"/>
+              </a:rPr>
+              <a:t>AUSWERTEN · SELBSTKONTROLLE</a:t>
+            </a:r>
+            <a:endParaRPr lang="en-US" sz="1200" dirty="0"/>
+          </a:p>
+        </p:txBody>
+      </p:sp>
+      <p:sp>
+        <p:nvSpPr>
+          <p:cNvPr id="3" name="Text 1"/>
+          <p:cNvSpPr txBox="1"/>
+          <p:nvPr/>
+        </p:nvSpPr>
+        <p:spPr>
+          <a:xfrm>
+            <a:off x="548640" y="658368"/>
+            <a:ext cx="11064240" cy="640080"/>
+          </a:xfrm>
+          <a:prstGeom prst="rect">
+            <a:avLst/>
+          </a:prstGeom>
+          <a:noFill/>
+          <a:ln/>
+        </p:spPr>
+        <p:txBody>
+          <a:bodyPr wrap="square" lIns="0" tIns="0" rIns="0" bIns="0" rtlCol="0" anchor="t"/>
+          <a:lstStyle/>
+          <a:p>
+            <a:pPr indent="0" marL="0">
+              <a:buNone/>
+            </a:pPr>
+            <a:r>
+              <a:rPr lang="en-US" sz="3200" b="1" dirty="0">
+                <a:solidFill>
+                  <a:srgbClr val="1E2761"/>
+                </a:solidFill>
+                <a:latin typeface="Cambria" pitchFamily="34" charset="0"/>
+                <a:ea typeface="Cambria" pitchFamily="34" charset="-122"/>
+                <a:cs typeface="Cambria" pitchFamily="34" charset="-120"/>
+              </a:rPr>
+              <a:t>Zielcheck – Lösung</a:t>
+            </a:r>
+            <a:endParaRPr lang="en-US" sz="3200" dirty="0"/>
+          </a:p>
+        </p:txBody>
+      </p:sp>
+      <p:sp>
+        <p:nvSpPr>
+          <p:cNvPr id="4" name="Text 2"/>
+          <p:cNvSpPr txBox="1"/>
+          <p:nvPr/>
+        </p:nvSpPr>
+        <p:spPr>
+          <a:xfrm>
+            <a:off x="548640" y="6400800"/>
+            <a:ext cx="6400800" cy="228600"/>
+          </a:xfrm>
+          <a:prstGeom prst="rect">
+            <a:avLst/>
+          </a:prstGeom>
+          <a:noFill/>
+          <a:ln/>
+        </p:spPr>
+        <p:txBody>
+          <a:bodyPr wrap="square" lIns="0" tIns="0" rIns="0" bIns="0" rtlCol="0" anchor="t"/>
+          <a:lstStyle/>
+          <a:p>
+            <a:pPr indent="0" marL="0">
+              <a:buNone/>
+            </a:pPr>
+            <a:r>
+              <a:rPr lang="en-US" sz="1000" dirty="0">
+                <a:solidFill>
+                  <a:srgbClr val="5B6B8C"/>
+                </a:solidFill>
+                <a:latin typeface="Calibri" pitchFamily="34" charset="0"/>
+                <a:ea typeface="Calibri" pitchFamily="34" charset="-122"/>
+                <a:cs typeface="Calibri" pitchFamily="34" charset="-120"/>
+              </a:rPr>
+              <a:t>Freitag, 6.11. · Die Ballade als Ur-Ei · Deutsch 7A</a:t>
+            </a:r>
+            <a:endParaRPr lang="en-US" sz="1000" dirty="0"/>
+          </a:p>
+        </p:txBody>
+      </p:sp>
+      <p:sp>
+        <p:nvSpPr>
+          <p:cNvPr id="5" name="Text 3"/>
+          <p:cNvSpPr txBox="1"/>
+          <p:nvPr/>
+        </p:nvSpPr>
+        <p:spPr>
+          <a:xfrm>
+            <a:off x="11155680" y="6400800"/>
+            <a:ext cx="457200" cy="228600"/>
+          </a:xfrm>
+          <a:prstGeom prst="rect">
+            <a:avLst/>
+          </a:prstGeom>
+          <a:noFill/>
+          <a:ln/>
+        </p:spPr>
+        <p:txBody>
+          <a:bodyPr wrap="square" lIns="0" tIns="0" rIns="0" bIns="0" rtlCol="0" anchor="t"/>
+          <a:lstStyle/>
+          <a:p>
+            <a:pPr algn="r" indent="0" marL="0">
+              <a:buNone/>
+            </a:pPr>
+            <a:r>
+              <a:rPr lang="en-US" sz="1000" dirty="0">
+                <a:solidFill>
+                  <a:srgbClr val="5B6B8C"/>
+                </a:solidFill>
+                <a:latin typeface="Calibri" pitchFamily="34" charset="0"/>
+                <a:ea typeface="Calibri" pitchFamily="34" charset="-122"/>
+                <a:cs typeface="Calibri" pitchFamily="34" charset="-120"/>
+              </a:rPr>
+              <a:t>14</a:t>
+            </a:r>
+            <a:endParaRPr lang="en-US" sz="1000" dirty="0"/>
+          </a:p>
+        </p:txBody>
+      </p:sp>
+      <p:sp>
+        <p:nvSpPr>
+          <p:cNvPr id="7" name="Shape 4"/>
+          <p:cNvSpPr/>
+          <p:nvPr/>
+        </p:nvSpPr>
+        <p:spPr>
+          <a:xfrm>
+            <a:off x="548640" y="1463040"/>
+            <a:ext cx="11064240" cy="822960"/>
+          </a:xfrm>
+          <a:prstGeom prst="roundRect">
+            <a:avLst>
+              <a:gd name="adj" fmla="val 8889"/>
+            </a:avLst>
+          </a:prstGeom>
+          <a:solidFill>
+            <a:srgbClr val="F4F7FD"/>
+          </a:solidFill>
+          <a:ln/>
+        </p:spPr>
+      </p:sp>
+      <p:sp>
+        <p:nvSpPr>
           <p:cNvPr id="8" name="Shape 5"/>
           <p:cNvSpPr/>
           <p:nvPr/>
         </p:nvSpPr>
         <p:spPr>
           <a:xfrm>
-            <a:off x="548640" y="1554480"/>
-            <a:ext cx="109728" cy="1005840"/>
+            <a:off x="548640" y="1463040"/>
+            <a:ext cx="109728" cy="822960"/>
           </a:xfrm>
           <a:prstGeom prst="rect">
             <a:avLst/>
@@ -4013,24 +4707,24 @@
         </p:nvSpPr>
         <p:spPr>
           <a:xfrm>
-            <a:off x="868680" y="1801368"/>
-            <a:ext cx="10515600" cy="548640"/>
-          </a:xfrm>
-          <a:prstGeom prst="rect">
-            <a:avLst/>
-          </a:prstGeom>
-          <a:noFill/>
-          <a:ln/>
-        </p:spPr>
-        <p:txBody>
-          <a:bodyPr wrap="square" lIns="0" tIns="0" rIns="0" bIns="0" rtlCol="0" anchor="t"/>
-          <a:lstStyle/>
-          <a:p>
-            <a:pPr indent="0" marL="0">
-              <a:buNone/>
-            </a:pPr>
-            <a:r>
-              <a:rPr lang="en-US" sz="2100" b="1" dirty="0">
+            <a:off x="868680" y="1645920"/>
+            <a:ext cx="10515600" cy="502920"/>
+          </a:xfrm>
+          <a:prstGeom prst="rect">
+            <a:avLst/>
+          </a:prstGeom>
+          <a:noFill/>
+          <a:ln/>
+        </p:spPr>
+        <p:txBody>
+          <a:bodyPr wrap="square" lIns="0" tIns="0" rIns="0" bIns="0" rtlCol="0" anchor="t"/>
+          <a:lstStyle/>
+          <a:p>
+            <a:pPr indent="0" marL="0">
+              <a:buNone/>
+            </a:pPr>
+            <a:r>
+              <a:rPr lang="en-US" sz="1900" b="1" dirty="0">
                 <a:solidFill>
                   <a:srgbClr val="D9534F"/>
                 </a:solidFill>
@@ -4044,7 +4738,7 @@
               <a:buNone/>
             </a:pPr>
             <a:r>
-              <a:rPr lang="en-US" sz="2100" b="1" dirty="0">
+              <a:rPr lang="en-US" sz="1900" b="1" dirty="0">
                 <a:solidFill>
                   <a:srgbClr val="2A8C8C"/>
                 </a:solidFill>
@@ -4058,7 +4752,7 @@
               <a:buNone/>
             </a:pPr>
             <a:r>
-              <a:rPr lang="en-US" sz="2100" dirty="0">
+              <a:rPr lang="en-US" sz="1900" dirty="0">
                 <a:solidFill>
                   <a:srgbClr val="1E2761"/>
                 </a:solidFill>
@@ -4068,7 +4762,7 @@
               </a:rPr>
               <a:t>Reim: Riesenart und Bart klingen ab dem betonten Vokal gleich (Paarreim).</a:t>
             </a:r>
-            <a:endParaRPr lang="en-US" sz="2100" dirty="0"/>
+            <a:endParaRPr lang="en-US" sz="1900" dirty="0"/>
           </a:p>
         </p:txBody>
       </p:sp>
@@ -4080,12 +4774,12 @@
         </p:nvSpPr>
         <p:spPr>
           <a:xfrm>
-            <a:off x="548640" y="2743200"/>
-            <a:ext cx="11064240" cy="1005840"/>
+            <a:off x="548640" y="2423160"/>
+            <a:ext cx="11064240" cy="822960"/>
           </a:xfrm>
           <a:prstGeom prst="roundRect">
             <a:avLst>
-              <a:gd name="adj" fmla="val 7273"/>
+              <a:gd name="adj" fmla="val 8889"/>
             </a:avLst>
           </a:prstGeom>
           <a:solidFill>
@@ -4102,8 +4796,8 @@
         </p:nvSpPr>
         <p:spPr>
           <a:xfrm>
-            <a:off x="548640" y="2743200"/>
-            <a:ext cx="109728" cy="1005840"/>
+            <a:off x="548640" y="2423160"/>
+            <a:ext cx="109728" cy="822960"/>
           </a:xfrm>
           <a:prstGeom prst="rect">
             <a:avLst/>
@@ -4122,24 +4816,24 @@
         </p:nvSpPr>
         <p:spPr>
           <a:xfrm>
-            <a:off x="868680" y="2990088"/>
-            <a:ext cx="10515600" cy="548640"/>
-          </a:xfrm>
-          <a:prstGeom prst="rect">
-            <a:avLst/>
-          </a:prstGeom>
-          <a:noFill/>
-          <a:ln/>
-        </p:spPr>
-        <p:txBody>
-          <a:bodyPr wrap="square" lIns="0" tIns="0" rIns="0" bIns="0" rtlCol="0" anchor="t"/>
-          <a:lstStyle/>
-          <a:p>
-            <a:pPr indent="0" marL="0">
-              <a:buNone/>
-            </a:pPr>
-            <a:r>
-              <a:rPr lang="en-US" sz="2100" b="1" dirty="0">
+            <a:off x="868680" y="2606040"/>
+            <a:ext cx="10515600" cy="502920"/>
+          </a:xfrm>
+          <a:prstGeom prst="rect">
+            <a:avLst/>
+          </a:prstGeom>
+          <a:noFill/>
+          <a:ln/>
+        </p:spPr>
+        <p:txBody>
+          <a:bodyPr wrap="square" lIns="0" tIns="0" rIns="0" bIns="0" rtlCol="0" anchor="t"/>
+          <a:lstStyle/>
+          <a:p>
+            <a:pPr indent="0" marL="0">
+              <a:buNone/>
+            </a:pPr>
+            <a:r>
+              <a:rPr lang="en-US" sz="1900" b="1" dirty="0">
                 <a:solidFill>
                   <a:srgbClr val="D9534F"/>
                 </a:solidFill>
@@ -4153,7 +4847,7 @@
               <a:buNone/>
             </a:pPr>
             <a:r>
-              <a:rPr lang="en-US" sz="2100" b="1" dirty="0">
+              <a:rPr lang="en-US" sz="1900" b="1" dirty="0">
                 <a:solidFill>
                   <a:srgbClr val="7A5BA6"/>
                 </a:solidFill>
@@ -4167,7 +4861,7 @@
               <a:buNone/>
             </a:pPr>
             <a:r>
-              <a:rPr lang="en-US" sz="2100" dirty="0">
+              <a:rPr lang="en-US" sz="1900" dirty="0">
                 <a:solidFill>
                   <a:srgbClr val="1E2761"/>
                 </a:solidFill>
@@ -4177,7 +4871,7 @@
               </a:rPr>
               <a:t>Ein Erzähler erzählt, was passiert – im Präteritum („lief“).</a:t>
             </a:r>
-            <a:endParaRPr lang="en-US" sz="2100" dirty="0"/>
+            <a:endParaRPr lang="en-US" sz="1900" dirty="0"/>
           </a:p>
         </p:txBody>
       </p:sp>
@@ -4189,12 +4883,12 @@
         </p:nvSpPr>
         <p:spPr>
           <a:xfrm>
-            <a:off x="548640" y="3931920"/>
-            <a:ext cx="11064240" cy="1005840"/>
+            <a:off x="548640" y="3383280"/>
+            <a:ext cx="11064240" cy="822960"/>
           </a:xfrm>
           <a:prstGeom prst="roundRect">
             <a:avLst>
-              <a:gd name="adj" fmla="val 7273"/>
+              <a:gd name="adj" fmla="val 8889"/>
             </a:avLst>
           </a:prstGeom>
           <a:solidFill>
@@ -4211,8 +4905,8 @@
         </p:nvSpPr>
         <p:spPr>
           <a:xfrm>
-            <a:off x="548640" y="3931920"/>
-            <a:ext cx="109728" cy="1005840"/>
+            <a:off x="548640" y="3383280"/>
+            <a:ext cx="109728" cy="822960"/>
           </a:xfrm>
           <a:prstGeom prst="rect">
             <a:avLst/>
@@ -4231,24 +4925,24 @@
         </p:nvSpPr>
         <p:spPr>
           <a:xfrm>
-            <a:off x="868680" y="4178808"/>
-            <a:ext cx="10515600" cy="548640"/>
-          </a:xfrm>
-          <a:prstGeom prst="rect">
-            <a:avLst/>
-          </a:prstGeom>
-          <a:noFill/>
-          <a:ln/>
-        </p:spPr>
-        <p:txBody>
-          <a:bodyPr wrap="square" lIns="0" tIns="0" rIns="0" bIns="0" rtlCol="0" anchor="t"/>
-          <a:lstStyle/>
-          <a:p>
-            <a:pPr indent="0" marL="0">
-              <a:buNone/>
-            </a:pPr>
-            <a:r>
-              <a:rPr lang="en-US" sz="2100" b="1" dirty="0">
+            <a:off x="868680" y="3566160"/>
+            <a:ext cx="10515600" cy="502920"/>
+          </a:xfrm>
+          <a:prstGeom prst="rect">
+            <a:avLst/>
+          </a:prstGeom>
+          <a:noFill/>
+          <a:ln/>
+        </p:spPr>
+        <p:txBody>
+          <a:bodyPr wrap="square" lIns="0" tIns="0" rIns="0" bIns="0" rtlCol="0" anchor="t"/>
+          <a:lstStyle/>
+          <a:p>
+            <a:pPr indent="0" marL="0">
+              <a:buNone/>
+            </a:pPr>
+            <a:r>
+              <a:rPr lang="en-US" sz="1900" b="1" dirty="0">
                 <a:solidFill>
                   <a:srgbClr val="D9534F"/>
                 </a:solidFill>
@@ -4262,7 +4956,7 @@
               <a:buNone/>
             </a:pPr>
             <a:r>
-              <a:rPr lang="en-US" sz="2100" b="1" dirty="0">
+              <a:rPr lang="en-US" sz="1900" b="1" dirty="0">
                 <a:solidFill>
                   <a:srgbClr val="C77C12"/>
                 </a:solidFill>
@@ -4276,7 +4970,7 @@
               <a:buNone/>
             </a:pPr>
             <a:r>
-              <a:rPr lang="en-US" sz="2100" dirty="0">
+              <a:rPr lang="en-US" sz="1900" dirty="0">
                 <a:solidFill>
                   <a:srgbClr val="1E2761"/>
                 </a:solidFill>
@@ -4284,22 +4978,131 @@
                 <a:ea typeface="Calibri" pitchFamily="34" charset="-122"/>
                 <a:cs typeface="Calibri" pitchFamily="34" charset="-120"/>
               </a:rPr>
-              <a:t>Eine Figur spricht selbst: wörtliche Rede von Paddy.</a:t>
-            </a:r>
-            <a:endParaRPr lang="en-US" sz="2100" dirty="0"/>
-          </a:p>
-        </p:txBody>
-      </p:sp>
-      <p:sp>
-        <p:nvSpPr>
-          <p:cNvPr id="16" name="Text 13"/>
-          <p:cNvSpPr txBox="1"/>
-          <p:nvPr/>
-        </p:nvSpPr>
-        <p:spPr>
-          <a:xfrm>
-            <a:off x="548640" y="5257800"/>
-            <a:ext cx="11064240" cy="457200"/>
+              <a:t>Die ganze Strophe ist Rede des Schotten – kein Erzähler dazwischen.</a:t>
+            </a:r>
+            <a:endParaRPr lang="en-US" sz="1900" dirty="0"/>
+          </a:p>
+        </p:txBody>
+      </p:sp>
+      <p:sp>
+        <p:nvSpPr>
+          <p:cNvPr id="16" name="Shape 13"/>
+          <p:cNvSpPr/>
+          <p:nvPr/>
+        </p:nvSpPr>
+        <p:spPr>
+          <a:xfrm>
+            <a:off x="548640" y="4343400"/>
+            <a:ext cx="11064240" cy="822960"/>
+          </a:xfrm>
+          <a:prstGeom prst="roundRect">
+            <a:avLst>
+              <a:gd name="adj" fmla="val 8889"/>
+            </a:avLst>
+          </a:prstGeom>
+          <a:solidFill>
+            <a:srgbClr val="F4F7FD"/>
+          </a:solidFill>
+          <a:ln/>
+        </p:spPr>
+      </p:sp>
+      <p:sp>
+        <p:nvSpPr>
+          <p:cNvPr id="17" name="Shape 14"/>
+          <p:cNvSpPr/>
+          <p:nvPr/>
+        </p:nvSpPr>
+        <p:spPr>
+          <a:xfrm>
+            <a:off x="548640" y="4343400"/>
+            <a:ext cx="109728" cy="822960"/>
+          </a:xfrm>
+          <a:prstGeom prst="rect">
+            <a:avLst/>
+          </a:prstGeom>
+          <a:solidFill>
+            <a:srgbClr val="7A5BA6"/>
+          </a:solidFill>
+          <a:ln/>
+        </p:spPr>
+      </p:sp>
+      <p:sp>
+        <p:nvSpPr>
+          <p:cNvPr id="18" name="Text 15"/>
+          <p:cNvSpPr txBox="1"/>
+          <p:nvPr/>
+        </p:nvSpPr>
+        <p:spPr>
+          <a:xfrm>
+            <a:off x="868680" y="4526280"/>
+            <a:ext cx="10515600" cy="502920"/>
+          </a:xfrm>
+          <a:prstGeom prst="rect">
+            <a:avLst/>
+          </a:prstGeom>
+          <a:noFill/>
+          <a:ln/>
+        </p:spPr>
+        <p:txBody>
+          <a:bodyPr wrap="square" lIns="0" tIns="0" rIns="0" bIns="0" rtlCol="0" anchor="t"/>
+          <a:lstStyle/>
+          <a:p>
+            <a:pPr indent="0" marL="0">
+              <a:buNone/>
+            </a:pPr>
+            <a:r>
+              <a:rPr lang="en-US" sz="1900" b="1" dirty="0">
+                <a:solidFill>
+                  <a:srgbClr val="D9534F"/>
+                </a:solidFill>
+                <a:latin typeface="Calibri" pitchFamily="34" charset="0"/>
+                <a:ea typeface="Calibri" pitchFamily="34" charset="-122"/>
+                <a:cs typeface="Calibri" pitchFamily="34" charset="-120"/>
+              </a:rPr>
+              <a:t>D  </a:t>
+            </a:r>
+            <a:pPr indent="0" marL="0">
+              <a:buNone/>
+            </a:pPr>
+            <a:r>
+              <a:rPr lang="en-US" sz="1900" b="1" dirty="0">
+                <a:solidFill>
+                  <a:srgbClr val="7A5BA6"/>
+                </a:solidFill>
+                <a:latin typeface="Calibri" pitchFamily="34" charset="0"/>
+                <a:ea typeface="Calibri" pitchFamily="34" charset="-122"/>
+                <a:cs typeface="Calibri" pitchFamily="34" charset="-120"/>
+              </a:rPr>
+              <a:t>Epik: </a:t>
+            </a:r>
+            <a:pPr indent="0" marL="0">
+              <a:buNone/>
+            </a:pPr>
+            <a:r>
+              <a:rPr lang="en-US" sz="1900" dirty="0">
+                <a:solidFill>
+                  <a:srgbClr val="1E2761"/>
+                </a:solidFill>
+                <a:latin typeface="Calibri" pitchFamily="34" charset="0"/>
+                <a:ea typeface="Calibri" pitchFamily="34" charset="-122"/>
+                <a:cs typeface="Calibri" pitchFamily="34" charset="-120"/>
+              </a:rPr>
+              <a:t>Zwar wörtliche Rede – aber der Erzähler leitet sie ein („Da lief er heim …:“). Er vermittelt.</a:t>
+            </a:r>
+            <a:endParaRPr lang="en-US" sz="1900" dirty="0"/>
+          </a:p>
+        </p:txBody>
+      </p:sp>
+      <p:sp>
+        <p:nvSpPr>
+          <p:cNvPr id="19" name="Text 16"/>
+          <p:cNvSpPr txBox="1"/>
+          <p:nvPr/>
+        </p:nvSpPr>
+        <p:spPr>
+          <a:xfrm>
+            <a:off x="548640" y="5440680"/>
+            <a:ext cx="11064240" cy="411480"/>
           </a:xfrm>
           <a:prstGeom prst="rect">
             <a:avLst/>
@@ -4315,7 +5118,7 @@
               <a:buNone/>
             </a:pPr>
             <a:r>
-              <a:rPr lang="en-US" sz="2000" b="1" dirty="0">
+              <a:rPr lang="en-US" sz="1900" b="1" dirty="0">
                 <a:solidFill>
                   <a:srgbClr val="1E2761"/>
                 </a:solidFill>
@@ -4325,7 +5128,7 @@
               </a:rPr>
               <a:t>Verbessere mit Grün. Alles richtig? Dann hast du das Ziel erreicht.</a:t>
             </a:r>
-            <a:endParaRPr lang="en-US" sz="2000" dirty="0"/>
+            <a:endParaRPr lang="en-US" sz="1900" dirty="0"/>
           </a:p>
         </p:txBody>
       </p:sp>
@@ -7146,7 +7949,7 @@
                 <a:ea typeface="Calibri" pitchFamily="34" charset="-122"/>
                 <a:cs typeface="Calibri" pitchFamily="34" charset="-120"/>
               </a:rPr>
-              <a:t>INFORMIEREN · VERGLEICH</a:t>
+              <a:t>INFORMIEREN · EIN TRAINING – DREI GATTUNGEN</a:t>
             </a:r>
             <a:endParaRPr lang="en-US" sz="1200" dirty="0"/>
           </a:p>
@@ -7185,7 +7988,7 @@
                 <a:ea typeface="Cambria" pitchFamily="34" charset="-122"/>
                 <a:cs typeface="Cambria" pitchFamily="34" charset="-120"/>
               </a:rPr>
-              <a:t>Woran erkennst du …?</a:t>
+              <a:t>Welcher Text ist Lyrik, Epik, Dramatik?</a:t>
             </a:r>
             <a:endParaRPr lang="en-US" sz="3200" dirty="0"/>
           </a:p>
@@ -7277,16 +8080,16 @@
         </p:nvSpPr>
         <p:spPr>
           <a:xfrm>
-            <a:off x="548640" y="1463040"/>
-            <a:ext cx="3611880" cy="685800"/>
+            <a:off x="548640" y="1417320"/>
+            <a:ext cx="3611880" cy="502920"/>
           </a:xfrm>
           <a:prstGeom prst="roundRect">
             <a:avLst>
-              <a:gd name="adj" fmla="val 10667"/>
+              <a:gd name="adj" fmla="val 14545"/>
             </a:avLst>
           </a:prstGeom>
           <a:solidFill>
-            <a:srgbClr val="2A8C8C"/>
+            <a:srgbClr val="1E2761"/>
           </a:solidFill>
           <a:ln/>
         </p:spPr>
@@ -7299,8 +8102,8 @@
         </p:nvSpPr>
         <p:spPr>
           <a:xfrm>
-            <a:off x="548640" y="1463040"/>
-            <a:ext cx="3611880" cy="685800"/>
+            <a:off x="548640" y="1417320"/>
+            <a:ext cx="3611880" cy="502920"/>
           </a:xfrm>
           <a:prstGeom prst="rect">
             <a:avLst/>
@@ -7316,7 +8119,7 @@
               <a:buNone/>
             </a:pPr>
             <a:r>
-              <a:rPr lang="en-US" sz="2400" b="1" dirty="0">
+              <a:rPr lang="en-US" sz="1900" b="1" dirty="0">
                 <a:solidFill>
                   <a:srgbClr val="FFFFFF"/>
                 </a:solidFill>
@@ -7324,9 +8127,9 @@
                 <a:ea typeface="Cambria" pitchFamily="34" charset="-122"/>
                 <a:cs typeface="Cambria" pitchFamily="34" charset="-120"/>
               </a:rPr>
-              <a:t>Lyrik</a:t>
-            </a:r>
-            <a:endParaRPr lang="en-US" sz="2400" dirty="0"/>
+              <a:t>Text A</a:t>
+            </a:r>
+            <a:endParaRPr lang="en-US" sz="1900" dirty="0"/>
           </a:p>
         </p:txBody>
       </p:sp>
@@ -7338,16 +8141,16 @@
         </p:nvSpPr>
         <p:spPr>
           <a:xfrm>
-            <a:off x="548640" y="2240280"/>
-            <a:ext cx="3611880" cy="640080"/>
+            <a:off x="548640" y="2011680"/>
+            <a:ext cx="3611880" cy="3429000"/>
           </a:xfrm>
           <a:prstGeom prst="roundRect">
             <a:avLst>
-              <a:gd name="adj" fmla="val 11429"/>
+              <a:gd name="adj" fmla="val 2133"/>
             </a:avLst>
           </a:prstGeom>
           <a:solidFill>
-            <a:srgbClr val="EAF0FA"/>
+            <a:srgbClr val="F4F7FD"/>
           </a:solidFill>
           <a:ln/>
         </p:spPr>
@@ -7360,196 +8163,69 @@
         </p:nvSpPr>
         <p:spPr>
           <a:xfrm>
-            <a:off x="548640" y="2240280"/>
-            <a:ext cx="3611880" cy="640080"/>
-          </a:xfrm>
-          <a:prstGeom prst="rect">
-            <a:avLst/>
-          </a:prstGeom>
-          <a:noFill/>
-          <a:ln/>
-        </p:spPr>
-        <p:txBody>
-          <a:bodyPr wrap="square" lIns="0" tIns="0" rIns="0" bIns="0" rtlCol="0" anchor="ctr"/>
-          <a:lstStyle/>
-          <a:p>
-            <a:pPr algn="ctr" indent="0" marL="0">
-              <a:buNone/>
-            </a:pPr>
-            <a:r>
-              <a:rPr lang="en-US" sz="1800" b="1" dirty="0">
+            <a:off x="685800" y="2103120"/>
+            <a:ext cx="3337560" cy="3246120"/>
+          </a:xfrm>
+          <a:prstGeom prst="rect">
+            <a:avLst/>
+          </a:prstGeom>
+          <a:noFill/>
+          <a:ln/>
+        </p:spPr>
+        <p:txBody>
+          <a:bodyPr wrap="square" lIns="0" tIns="0" rIns="0" bIns="0" rtlCol="0" anchor="t"/>
+          <a:lstStyle/>
+          <a:p>
+            <a:pPr indent="0" marL="0">
+              <a:buNone/>
+            </a:pPr>
+            <a:r>
+              <a:rPr lang="en-US" sz="1500" dirty="0">
                 <a:solidFill>
                   <a:srgbClr val="1E2761"/>
-                </a:solidFill>
-                <a:latin typeface="Calibri" pitchFamily="34" charset="0"/>
-                <a:ea typeface="Calibri" pitchFamily="34" charset="-122"/>
-                <a:cs typeface="Calibri" pitchFamily="34" charset="-120"/>
-              </a:rPr>
-              <a:t>wie ein Song-Text</a:t>
-            </a:r>
-            <a:endParaRPr lang="en-US" sz="1800" dirty="0"/>
-          </a:p>
-        </p:txBody>
-      </p:sp>
-      <p:sp>
-        <p:nvSpPr>
-          <p:cNvPr id="11" name="Shape 8"/>
-          <p:cNvSpPr/>
-          <p:nvPr/>
-        </p:nvSpPr>
-        <p:spPr>
-          <a:xfrm>
-            <a:off x="548640" y="3017520"/>
-            <a:ext cx="3611880" cy="2103120"/>
-          </a:xfrm>
-          <a:prstGeom prst="roundRect">
-            <a:avLst>
-              <a:gd name="adj" fmla="val 3478"/>
-            </a:avLst>
-          </a:prstGeom>
-          <a:solidFill>
-            <a:srgbClr val="FFFFFF"/>
-          </a:solidFill>
-          <a:ln w="19050">
-            <a:solidFill>
-              <a:srgbClr val="C9D3EA"/>
-            </a:solidFill>
-            <a:prstDash val="solid"/>
-          </a:ln>
-        </p:spPr>
-      </p:sp>
-      <p:sp>
-        <p:nvSpPr>
-          <p:cNvPr id="12" name="Text 9"/>
-          <p:cNvSpPr txBox="1"/>
-          <p:nvPr/>
-        </p:nvSpPr>
-        <p:spPr>
-          <a:xfrm>
-            <a:off x="731520" y="3154680"/>
-            <a:ext cx="3246120" cy="1874520"/>
-          </a:xfrm>
-          <a:prstGeom prst="rect">
-            <a:avLst/>
-          </a:prstGeom>
-          <a:noFill/>
-          <a:ln/>
-        </p:spPr>
-        <p:txBody>
-          <a:bodyPr wrap="square" lIns="0" tIns="0" rIns="0" bIns="0" rtlCol="0" anchor="ctr"/>
-          <a:lstStyle/>
-          <a:p>
-            <a:pPr algn="ctr" indent="0" marL="0">
-              <a:buNone/>
-            </a:pPr>
-            <a:r>
-              <a:rPr lang="en-US" sz="4000" dirty="0">
-                <a:solidFill>
-                  <a:srgbClr val="C9D3EA"/>
-                </a:solidFill>
-                <a:latin typeface="Calibri" pitchFamily="34" charset="0"/>
-                <a:ea typeface="Calibri" pitchFamily="34" charset="-122"/>
-                <a:cs typeface="Calibri" pitchFamily="34" charset="-120"/>
-              </a:rPr>
-              <a:t>?</a:t>
-            </a:r>
-            <a:endParaRPr lang="en-US" sz="4000" dirty="0"/>
-          </a:p>
-        </p:txBody>
-      </p:sp>
-      <p:sp>
-        <p:nvSpPr>
-          <p:cNvPr id="13" name="Shape 10"/>
-          <p:cNvSpPr/>
-          <p:nvPr/>
-        </p:nvSpPr>
-        <p:spPr>
-          <a:xfrm>
-            <a:off x="4297680" y="1463040"/>
-            <a:ext cx="3611880" cy="685800"/>
-          </a:xfrm>
-          <a:prstGeom prst="roundRect">
-            <a:avLst>
-              <a:gd name="adj" fmla="val 10667"/>
-            </a:avLst>
-          </a:prstGeom>
-          <a:solidFill>
-            <a:srgbClr val="7A5BA6"/>
-          </a:solidFill>
-          <a:ln/>
-        </p:spPr>
-      </p:sp>
-      <p:sp>
-        <p:nvSpPr>
-          <p:cNvPr id="14" name="Text 11"/>
-          <p:cNvSpPr txBox="1"/>
-          <p:nvPr/>
-        </p:nvSpPr>
-        <p:spPr>
-          <a:xfrm>
-            <a:off x="4297680" y="1463040"/>
-            <a:ext cx="3611880" cy="685800"/>
-          </a:xfrm>
-          <a:prstGeom prst="rect">
-            <a:avLst/>
-          </a:prstGeom>
-          <a:noFill/>
-          <a:ln/>
-        </p:spPr>
-        <p:txBody>
-          <a:bodyPr wrap="square" lIns="0" tIns="0" rIns="0" bIns="0" rtlCol="0" anchor="ctr"/>
-          <a:lstStyle/>
-          <a:p>
-            <a:pPr algn="ctr" indent="0" marL="0">
-              <a:buNone/>
-            </a:pPr>
-            <a:r>
-              <a:rPr lang="en-US" sz="2400" b="1" dirty="0">
-                <a:solidFill>
-                  <a:srgbClr val="FFFFFF"/>
                 </a:solidFill>
                 <a:latin typeface="Cambria" pitchFamily="34" charset="0"/>
                 <a:ea typeface="Cambria" pitchFamily="34" charset="-122"/>
                 <a:cs typeface="Cambria" pitchFamily="34" charset="-120"/>
               </a:rPr>
-              <a:t>Epik</a:t>
-            </a:r>
-            <a:endParaRPr lang="en-US" sz="2400" dirty="0"/>
-          </a:p>
-        </p:txBody>
-      </p:sp>
-      <p:sp>
-        <p:nvSpPr>
-          <p:cNvPr id="15" name="Shape 12"/>
+              <a:t>Bei der letzten Runde waren meine Beine schwer wie Blei. Ich bekam kaum noch Luft und wollte aufhören. „Noch zwanzig Meter!“, rief mein Trainer vom Rand. Ich biss die Zähne zusammen und lief bis zur Linie.</a:t>
+            </a:r>
+            <a:endParaRPr lang="en-US" sz="1500" dirty="0"/>
+          </a:p>
+        </p:txBody>
+      </p:sp>
+      <p:sp>
+        <p:nvSpPr>
+          <p:cNvPr id="11" name="Shape 8"/>
           <p:cNvSpPr/>
           <p:nvPr/>
         </p:nvSpPr>
         <p:spPr>
           <a:xfrm>
-            <a:off x="4297680" y="2240280"/>
-            <a:ext cx="3611880" cy="640080"/>
+            <a:off x="4297680" y="1417320"/>
+            <a:ext cx="3611880" cy="502920"/>
           </a:xfrm>
           <a:prstGeom prst="roundRect">
             <a:avLst>
-              <a:gd name="adj" fmla="val 11429"/>
+              <a:gd name="adj" fmla="val 14545"/>
             </a:avLst>
           </a:prstGeom>
           <a:solidFill>
-            <a:srgbClr val="EAF0FA"/>
+            <a:srgbClr val="1E2761"/>
           </a:solidFill>
           <a:ln/>
         </p:spPr>
       </p:sp>
       <p:sp>
         <p:nvSpPr>
-          <p:cNvPr id="16" name="Text 13"/>
-          <p:cNvSpPr txBox="1"/>
-          <p:nvPr/>
-        </p:nvSpPr>
-        <p:spPr>
-          <a:xfrm>
-            <a:off x="4297680" y="2240280"/>
-            <a:ext cx="3611880" cy="640080"/>
+          <p:cNvPr id="12" name="Text 9"/>
+          <p:cNvSpPr txBox="1"/>
+          <p:nvPr/>
+        </p:nvSpPr>
+        <p:spPr>
+          <a:xfrm>
+            <a:off x="4297680" y="1417320"/>
+            <a:ext cx="3611880" cy="502920"/>
           </a:xfrm>
           <a:prstGeom prst="rect">
             <a:avLst/>
@@ -7565,134 +8241,7 @@
               <a:buNone/>
             </a:pPr>
             <a:r>
-              <a:rPr lang="en-US" sz="1800" b="1" dirty="0">
-                <a:solidFill>
-                  <a:srgbClr val="1E2761"/>
-                </a:solidFill>
-                <a:latin typeface="Calibri" pitchFamily="34" charset="0"/>
-                <a:ea typeface="Calibri" pitchFamily="34" charset="-122"/>
-                <a:cs typeface="Calibri" pitchFamily="34" charset="-120"/>
-              </a:rPr>
-              <a:t>wie ein Roman oder Spielbericht</a:t>
-            </a:r>
-            <a:endParaRPr lang="en-US" sz="1800" dirty="0"/>
-          </a:p>
-        </p:txBody>
-      </p:sp>
-      <p:sp>
-        <p:nvSpPr>
-          <p:cNvPr id="17" name="Shape 14"/>
-          <p:cNvSpPr/>
-          <p:nvPr/>
-        </p:nvSpPr>
-        <p:spPr>
-          <a:xfrm>
-            <a:off x="4297680" y="3017520"/>
-            <a:ext cx="3611880" cy="2103120"/>
-          </a:xfrm>
-          <a:prstGeom prst="roundRect">
-            <a:avLst>
-              <a:gd name="adj" fmla="val 3478"/>
-            </a:avLst>
-          </a:prstGeom>
-          <a:solidFill>
-            <a:srgbClr val="FFFFFF"/>
-          </a:solidFill>
-          <a:ln w="19050">
-            <a:solidFill>
-              <a:srgbClr val="C9D3EA"/>
-            </a:solidFill>
-            <a:prstDash val="solid"/>
-          </a:ln>
-        </p:spPr>
-      </p:sp>
-      <p:sp>
-        <p:nvSpPr>
-          <p:cNvPr id="18" name="Text 15"/>
-          <p:cNvSpPr txBox="1"/>
-          <p:nvPr/>
-        </p:nvSpPr>
-        <p:spPr>
-          <a:xfrm>
-            <a:off x="4480560" y="3154680"/>
-            <a:ext cx="3246120" cy="1874520"/>
-          </a:xfrm>
-          <a:prstGeom prst="rect">
-            <a:avLst/>
-          </a:prstGeom>
-          <a:noFill/>
-          <a:ln/>
-        </p:spPr>
-        <p:txBody>
-          <a:bodyPr wrap="square" lIns="0" tIns="0" rIns="0" bIns="0" rtlCol="0" anchor="ctr"/>
-          <a:lstStyle/>
-          <a:p>
-            <a:pPr algn="ctr" indent="0" marL="0">
-              <a:buNone/>
-            </a:pPr>
-            <a:r>
-              <a:rPr lang="en-US" sz="4000" dirty="0">
-                <a:solidFill>
-                  <a:srgbClr val="C9D3EA"/>
-                </a:solidFill>
-                <a:latin typeface="Calibri" pitchFamily="34" charset="0"/>
-                <a:ea typeface="Calibri" pitchFamily="34" charset="-122"/>
-                <a:cs typeface="Calibri" pitchFamily="34" charset="-120"/>
-              </a:rPr>
-              <a:t>?</a:t>
-            </a:r>
-            <a:endParaRPr lang="en-US" sz="4000" dirty="0"/>
-          </a:p>
-        </p:txBody>
-      </p:sp>
-      <p:sp>
-        <p:nvSpPr>
-          <p:cNvPr id="19" name="Shape 16"/>
-          <p:cNvSpPr/>
-          <p:nvPr/>
-        </p:nvSpPr>
-        <p:spPr>
-          <a:xfrm>
-            <a:off x="8046720" y="1463040"/>
-            <a:ext cx="3611880" cy="685800"/>
-          </a:xfrm>
-          <a:prstGeom prst="roundRect">
-            <a:avLst>
-              <a:gd name="adj" fmla="val 10667"/>
-            </a:avLst>
-          </a:prstGeom>
-          <a:solidFill>
-            <a:srgbClr val="C77C12"/>
-          </a:solidFill>
-          <a:ln/>
-        </p:spPr>
-      </p:sp>
-      <p:sp>
-        <p:nvSpPr>
-          <p:cNvPr id="20" name="Text 17"/>
-          <p:cNvSpPr txBox="1"/>
-          <p:nvPr/>
-        </p:nvSpPr>
-        <p:spPr>
-          <a:xfrm>
-            <a:off x="8046720" y="1463040"/>
-            <a:ext cx="3611880" cy="685800"/>
-          </a:xfrm>
-          <a:prstGeom prst="rect">
-            <a:avLst/>
-          </a:prstGeom>
-          <a:noFill/>
-          <a:ln/>
-        </p:spPr>
-        <p:txBody>
-          <a:bodyPr wrap="square" lIns="0" tIns="0" rIns="0" bIns="0" rtlCol="0" anchor="ctr"/>
-          <a:lstStyle/>
-          <a:p>
-            <a:pPr algn="ctr" indent="0" marL="0">
-              <a:buNone/>
-            </a:pPr>
-            <a:r>
-              <a:rPr lang="en-US" sz="2400" b="1" dirty="0">
+              <a:rPr lang="en-US" sz="1900" b="1" dirty="0">
                 <a:solidFill>
                   <a:srgbClr val="FFFFFF"/>
                 </a:solidFill>
@@ -7700,110 +8249,220 @@
                 <a:ea typeface="Cambria" pitchFamily="34" charset="-122"/>
                 <a:cs typeface="Cambria" pitchFamily="34" charset="-120"/>
               </a:rPr>
-              <a:t>Dramatik</a:t>
-            </a:r>
-            <a:endParaRPr lang="en-US" sz="2400" dirty="0"/>
-          </a:p>
-        </p:txBody>
-      </p:sp>
-      <p:sp>
-        <p:nvSpPr>
-          <p:cNvPr id="21" name="Shape 18"/>
+              <a:t>Text B</a:t>
+            </a:r>
+            <a:endParaRPr lang="en-US" sz="1900" dirty="0"/>
+          </a:p>
+        </p:txBody>
+      </p:sp>
+      <p:sp>
+        <p:nvSpPr>
+          <p:cNvPr id="13" name="Shape 10"/>
           <p:cNvSpPr/>
           <p:nvPr/>
         </p:nvSpPr>
         <p:spPr>
           <a:xfrm>
-            <a:off x="8046720" y="2240280"/>
-            <a:ext cx="3611880" cy="640080"/>
+            <a:off x="4297680" y="2011680"/>
+            <a:ext cx="3611880" cy="3429000"/>
           </a:xfrm>
           <a:prstGeom prst="roundRect">
             <a:avLst>
-              <a:gd name="adj" fmla="val 11429"/>
+              <a:gd name="adj" fmla="val 2133"/>
             </a:avLst>
           </a:prstGeom>
           <a:solidFill>
-            <a:srgbClr val="EAF0FA"/>
+            <a:srgbClr val="F4F7FD"/>
           </a:solidFill>
           <a:ln/>
         </p:spPr>
       </p:sp>
       <p:sp>
         <p:nvSpPr>
-          <p:cNvPr id="22" name="Text 19"/>
-          <p:cNvSpPr txBox="1"/>
-          <p:nvPr/>
-        </p:nvSpPr>
-        <p:spPr>
-          <a:xfrm>
-            <a:off x="8046720" y="2240280"/>
-            <a:ext cx="3611880" cy="640080"/>
-          </a:xfrm>
-          <a:prstGeom prst="rect">
-            <a:avLst/>
-          </a:prstGeom>
-          <a:noFill/>
-          <a:ln/>
-        </p:spPr>
-        <p:txBody>
-          <a:bodyPr wrap="square" lIns="0" tIns="0" rIns="0" bIns="0" rtlCol="0" anchor="ctr"/>
-          <a:lstStyle/>
-          <a:p>
-            <a:pPr algn="ctr" indent="0" marL="0">
-              <a:buNone/>
-            </a:pPr>
-            <a:r>
-              <a:rPr lang="en-US" sz="1800" b="1" dirty="0">
+          <p:cNvPr id="14" name="Text 11"/>
+          <p:cNvSpPr txBox="1"/>
+          <p:nvPr/>
+        </p:nvSpPr>
+        <p:spPr>
+          <a:xfrm>
+            <a:off x="4434840" y="2103120"/>
+            <a:ext cx="3337560" cy="3246120"/>
+          </a:xfrm>
+          <a:prstGeom prst="rect">
+            <a:avLst/>
+          </a:prstGeom>
+          <a:noFill/>
+          <a:ln/>
+        </p:spPr>
+        <p:txBody>
+          <a:bodyPr wrap="square" lIns="0" tIns="0" rIns="0" bIns="0" rtlCol="0" anchor="t"/>
+          <a:lstStyle/>
+          <a:p>
+            <a:pPr indent="0" marL="0">
+              <a:buNone/>
+            </a:pPr>
+            <a:r>
+              <a:rPr lang="en-US" sz="1500" b="1" dirty="0">
                 <a:solidFill>
                   <a:srgbClr val="1E2761"/>
                 </a:solidFill>
-                <a:latin typeface="Calibri" pitchFamily="34" charset="0"/>
-                <a:ea typeface="Calibri" pitchFamily="34" charset="-122"/>
-                <a:cs typeface="Calibri" pitchFamily="34" charset="-120"/>
-              </a:rPr>
-              <a:t>wie eine Serienszene</a:t>
-            </a:r>
-            <a:endParaRPr lang="en-US" sz="1800" dirty="0"/>
-          </a:p>
-        </p:txBody>
-      </p:sp>
-      <p:sp>
-        <p:nvSpPr>
-          <p:cNvPr id="23" name="Shape 20"/>
+                <a:latin typeface="Cambria" pitchFamily="34" charset="0"/>
+                <a:ea typeface="Cambria" pitchFamily="34" charset="-122"/>
+                <a:cs typeface="Cambria" pitchFamily="34" charset="-120"/>
+              </a:rPr>
+              <a:t>TRAINER </a:t>
+            </a:r>
+            <a:pPr indent="0" marL="0">
+              <a:buNone/>
+            </a:pPr>
+            <a:r>
+              <a:rPr lang="en-US" sz="1500" i="1" dirty="0">
+                <a:solidFill>
+                  <a:srgbClr val="1E2761"/>
+                </a:solidFill>
+                <a:latin typeface="Cambria" pitchFamily="34" charset="0"/>
+                <a:ea typeface="Cambria" pitchFamily="34" charset="-122"/>
+                <a:cs typeface="Cambria" pitchFamily="34" charset="-120"/>
+              </a:rPr>
+              <a:t>(klatscht in die Hände)</a:t>
+            </a:r>
+            <a:pPr indent="0" marL="0">
+              <a:buNone/>
+            </a:pPr>
+            <a:r>
+              <a:rPr lang="en-US" sz="1500" dirty="0">
+                <a:solidFill>
+                  <a:srgbClr val="1E2761"/>
+                </a:solidFill>
+                <a:latin typeface="Cambria" pitchFamily="34" charset="0"/>
+                <a:ea typeface="Cambria" pitchFamily="34" charset="-122"/>
+                <a:cs typeface="Cambria" pitchFamily="34" charset="-120"/>
+              </a:rPr>
+              <a:t>: Letzte Runde! Los!
+</a:t>
+            </a:r>
+            <a:pPr indent="0" marL="0">
+              <a:buNone/>
+            </a:pPr>
+            <a:r>
+              <a:rPr lang="en-US" sz="1500" b="1" dirty="0">
+                <a:solidFill>
+                  <a:srgbClr val="1E2761"/>
+                </a:solidFill>
+                <a:latin typeface="Cambria" pitchFamily="34" charset="0"/>
+                <a:ea typeface="Cambria" pitchFamily="34" charset="-122"/>
+                <a:cs typeface="Cambria" pitchFamily="34" charset="-120"/>
+              </a:rPr>
+              <a:t>SPORTLERIN </a:t>
+            </a:r>
+            <a:pPr indent="0" marL="0">
+              <a:buNone/>
+            </a:pPr>
+            <a:r>
+              <a:rPr lang="en-US" sz="1500" i="1" dirty="0">
+                <a:solidFill>
+                  <a:srgbClr val="1E2761"/>
+                </a:solidFill>
+                <a:latin typeface="Cambria" pitchFamily="34" charset="0"/>
+                <a:ea typeface="Cambria" pitchFamily="34" charset="-122"/>
+                <a:cs typeface="Cambria" pitchFamily="34" charset="-120"/>
+              </a:rPr>
+              <a:t>(keucht)</a:t>
+            </a:r>
+            <a:pPr indent="0" marL="0">
+              <a:buNone/>
+            </a:pPr>
+            <a:r>
+              <a:rPr lang="en-US" sz="1500" dirty="0">
+                <a:solidFill>
+                  <a:srgbClr val="1E2761"/>
+                </a:solidFill>
+                <a:latin typeface="Cambria" pitchFamily="34" charset="0"/>
+                <a:ea typeface="Cambria" pitchFamily="34" charset="-122"/>
+                <a:cs typeface="Cambria" pitchFamily="34" charset="-120"/>
+              </a:rPr>
+              <a:t>: Ich kann nicht mehr …
+</a:t>
+            </a:r>
+            <a:pPr indent="0" marL="0">
+              <a:buNone/>
+            </a:pPr>
+            <a:r>
+              <a:rPr lang="en-US" sz="1500" b="1" dirty="0">
+                <a:solidFill>
+                  <a:srgbClr val="1E2761"/>
+                </a:solidFill>
+                <a:latin typeface="Cambria" pitchFamily="34" charset="0"/>
+                <a:ea typeface="Cambria" pitchFamily="34" charset="-122"/>
+                <a:cs typeface="Cambria" pitchFamily="34" charset="-120"/>
+              </a:rPr>
+              <a:t>TRAINER</a:t>
+            </a:r>
+            <a:pPr indent="0" marL="0">
+              <a:buNone/>
+            </a:pPr>
+            <a:r>
+              <a:rPr lang="en-US" sz="1500" dirty="0">
+                <a:solidFill>
+                  <a:srgbClr val="1E2761"/>
+                </a:solidFill>
+                <a:latin typeface="Cambria" pitchFamily="34" charset="0"/>
+                <a:ea typeface="Cambria" pitchFamily="34" charset="-122"/>
+                <a:cs typeface="Cambria" pitchFamily="34" charset="-120"/>
+              </a:rPr>
+              <a:t>: Noch zwanzig Meter! Du schaffst das!
+</a:t>
+            </a:r>
+            <a:pPr indent="0" marL="0">
+              <a:buNone/>
+            </a:pPr>
+            <a:r>
+              <a:rPr lang="en-US" sz="1500" i="1" dirty="0">
+                <a:solidFill>
+                  <a:srgbClr val="1E2761"/>
+                </a:solidFill>
+                <a:latin typeface="Cambria" pitchFamily="34" charset="0"/>
+                <a:ea typeface="Cambria" pitchFamily="34" charset="-122"/>
+                <a:cs typeface="Cambria" pitchFamily="34" charset="-120"/>
+              </a:rPr>
+              <a:t>(Die Sportlerin läuft bis zur Linie und lässt sich ins Gras fallen.)</a:t>
+            </a:r>
+            <a:endParaRPr lang="en-US" sz="1500" dirty="0"/>
+          </a:p>
+        </p:txBody>
+      </p:sp>
+      <p:sp>
+        <p:nvSpPr>
+          <p:cNvPr id="15" name="Shape 12"/>
           <p:cNvSpPr/>
           <p:nvPr/>
         </p:nvSpPr>
         <p:spPr>
           <a:xfrm>
-            <a:off x="8046720" y="3017520"/>
-            <a:ext cx="3611880" cy="2103120"/>
+            <a:off x="8046720" y="1417320"/>
+            <a:ext cx="3611880" cy="502920"/>
           </a:xfrm>
           <a:prstGeom prst="roundRect">
             <a:avLst>
-              <a:gd name="adj" fmla="val 3478"/>
+              <a:gd name="adj" fmla="val 14545"/>
             </a:avLst>
           </a:prstGeom>
           <a:solidFill>
-            <a:srgbClr val="FFFFFF"/>
+            <a:srgbClr val="1E2761"/>
           </a:solidFill>
-          <a:ln w="19050">
-            <a:solidFill>
-              <a:srgbClr val="C9D3EA"/>
-            </a:solidFill>
-            <a:prstDash val="solid"/>
-          </a:ln>
-        </p:spPr>
-      </p:sp>
-      <p:sp>
-        <p:nvSpPr>
-          <p:cNvPr id="24" name="Text 21"/>
-          <p:cNvSpPr txBox="1"/>
-          <p:nvPr/>
-        </p:nvSpPr>
-        <p:spPr>
-          <a:xfrm>
-            <a:off x="8229600" y="3154680"/>
-            <a:ext cx="3246120" cy="1874520"/>
+          <a:ln/>
+        </p:spPr>
+      </p:sp>
+      <p:sp>
+        <p:nvSpPr>
+          <p:cNvPr id="16" name="Text 13"/>
+          <p:cNvSpPr txBox="1"/>
+          <p:nvPr/>
+        </p:nvSpPr>
+        <p:spPr>
+          <a:xfrm>
+            <a:off x="8046720" y="1417320"/>
+            <a:ext cx="3611880" cy="502920"/>
           </a:xfrm>
           <a:prstGeom prst="rect">
             <a:avLst/>
@@ -7819,56 +8478,168 @@
               <a:buNone/>
             </a:pPr>
             <a:r>
-              <a:rPr lang="en-US" sz="4000" dirty="0">
-                <a:solidFill>
-                  <a:srgbClr val="C9D3EA"/>
-                </a:solidFill>
-                <a:latin typeface="Calibri" pitchFamily="34" charset="0"/>
-                <a:ea typeface="Calibri" pitchFamily="34" charset="-122"/>
-                <a:cs typeface="Calibri" pitchFamily="34" charset="-120"/>
-              </a:rPr>
-              <a:t>?</a:t>
-            </a:r>
-            <a:endParaRPr lang="en-US" sz="4000" dirty="0"/>
-          </a:p>
-        </p:txBody>
-      </p:sp>
-      <p:sp>
-        <p:nvSpPr>
-          <p:cNvPr id="25" name="Text 22"/>
-          <p:cNvSpPr txBox="1"/>
-          <p:nvPr/>
-        </p:nvSpPr>
-        <p:spPr>
-          <a:xfrm>
-            <a:off x="548640" y="5303520"/>
-            <a:ext cx="11064240" cy="457200"/>
-          </a:xfrm>
-          <a:prstGeom prst="rect">
-            <a:avLst/>
-          </a:prstGeom>
-          <a:noFill/>
-          <a:ln/>
-        </p:spPr>
-        <p:txBody>
-          <a:bodyPr wrap="square" lIns="0" tIns="0" rIns="0" bIns="0" rtlCol="0" anchor="t"/>
-          <a:lstStyle/>
-          <a:p>
-            <a:pPr algn="ctr" indent="0" marL="0">
-              <a:buNone/>
-            </a:pPr>
-            <a:r>
-              <a:rPr lang="en-US" sz="2100" b="1" dirty="0">
+              <a:rPr lang="en-US" sz="1900" b="1" dirty="0">
+                <a:solidFill>
+                  <a:srgbClr val="FFFFFF"/>
+                </a:solidFill>
+                <a:latin typeface="Cambria" pitchFamily="34" charset="0"/>
+                <a:ea typeface="Cambria" pitchFamily="34" charset="-122"/>
+                <a:cs typeface="Cambria" pitchFamily="34" charset="-120"/>
+              </a:rPr>
+              <a:t>Text C</a:t>
+            </a:r>
+            <a:endParaRPr lang="en-US" sz="1900" dirty="0"/>
+          </a:p>
+        </p:txBody>
+      </p:sp>
+      <p:sp>
+        <p:nvSpPr>
+          <p:cNvPr id="17" name="Shape 14"/>
+          <p:cNvSpPr/>
+          <p:nvPr/>
+        </p:nvSpPr>
+        <p:spPr>
+          <a:xfrm>
+            <a:off x="8046720" y="2011680"/>
+            <a:ext cx="3611880" cy="3429000"/>
+          </a:xfrm>
+          <a:prstGeom prst="roundRect">
+            <a:avLst>
+              <a:gd name="adj" fmla="val 2133"/>
+            </a:avLst>
+          </a:prstGeom>
+          <a:solidFill>
+            <a:srgbClr val="F4F7FD"/>
+          </a:solidFill>
+          <a:ln/>
+        </p:spPr>
+      </p:sp>
+      <p:sp>
+        <p:nvSpPr>
+          <p:cNvPr id="18" name="Text 15"/>
+          <p:cNvSpPr txBox="1"/>
+          <p:nvPr/>
+        </p:nvSpPr>
+        <p:spPr>
+          <a:xfrm>
+            <a:off x="8183880" y="2103120"/>
+            <a:ext cx="3337560" cy="3246120"/>
+          </a:xfrm>
+          <a:prstGeom prst="rect">
+            <a:avLst/>
+          </a:prstGeom>
+          <a:noFill/>
+          <a:ln/>
+        </p:spPr>
+        <p:txBody>
+          <a:bodyPr wrap="square" lIns="0" tIns="0" rIns="0" bIns="0" rtlCol="0" anchor="t"/>
+          <a:lstStyle/>
+          <a:p>
+            <a:pPr indent="0" marL="0">
+              <a:buNone/>
+            </a:pPr>
+            <a:r>
+              <a:rPr lang="en-US" sz="1500" dirty="0">
                 <a:solidFill>
                   <a:srgbClr val="1E2761"/>
                 </a:solidFill>
-                <a:latin typeface="Calibri" pitchFamily="34" charset="0"/>
-                <a:ea typeface="Calibri" pitchFamily="34" charset="-122"/>
-                <a:cs typeface="Calibri" pitchFamily="34" charset="-120"/>
-              </a:rPr>
-              <a:t>Woran erkennst du einen Song, einen Spielbericht, eine Serienszene?</a:t>
-            </a:r>
-            <a:endParaRPr lang="en-US" sz="2100" dirty="0"/>
+                <a:latin typeface="Cambria" pitchFamily="34" charset="0"/>
+                <a:ea typeface="Cambria" pitchFamily="34" charset="-122"/>
+                <a:cs typeface="Cambria" pitchFamily="34" charset="-120"/>
+              </a:rPr>
+              <a:t>Die letzte Runde, die Beine schwer,</a:t>
+            </a:r>
+            <a:endParaRPr lang="en-US" sz="1500" dirty="0"/>
+          </a:p>
+          <a:p>
+            <a:pPr indent="0" marL="0">
+              <a:buNone/>
+            </a:pPr>
+            <a:r>
+              <a:rPr lang="en-US" sz="1500" dirty="0">
+                <a:solidFill>
+                  <a:srgbClr val="1E2761"/>
+                </a:solidFill>
+                <a:latin typeface="Cambria" pitchFamily="34" charset="0"/>
+                <a:ea typeface="Cambria" pitchFamily="34" charset="-122"/>
+                <a:cs typeface="Cambria" pitchFamily="34" charset="-120"/>
+              </a:rPr>
+              <a:t>die Luft wird knapp, ich kann nicht mehr.</a:t>
+            </a:r>
+            <a:endParaRPr lang="en-US" sz="1500" dirty="0"/>
+          </a:p>
+          <a:p>
+            <a:pPr indent="0" marL="0">
+              <a:buNone/>
+            </a:pPr>
+            <a:r>
+              <a:rPr lang="en-US" sz="1500" dirty="0">
+                <a:solidFill>
+                  <a:srgbClr val="1E2761"/>
+                </a:solidFill>
+                <a:latin typeface="Cambria" pitchFamily="34" charset="0"/>
+                <a:ea typeface="Cambria" pitchFamily="34" charset="-122"/>
+                <a:cs typeface="Cambria" pitchFamily="34" charset="-120"/>
+              </a:rPr>
+              <a:t>Ein Schritt noch, dann ist’s geschafft,</a:t>
+            </a:r>
+            <a:endParaRPr lang="en-US" sz="1500" dirty="0"/>
+          </a:p>
+          <a:p>
+            <a:pPr indent="0" marL="0">
+              <a:buNone/>
+            </a:pPr>
+            <a:r>
+              <a:rPr lang="en-US" sz="1500" dirty="0">
+                <a:solidFill>
+                  <a:srgbClr val="1E2761"/>
+                </a:solidFill>
+                <a:latin typeface="Cambria" pitchFamily="34" charset="0"/>
+                <a:ea typeface="Cambria" pitchFamily="34" charset="-122"/>
+                <a:cs typeface="Cambria" pitchFamily="34" charset="-120"/>
+              </a:rPr>
+              <a:t>ich hol mir aus dem Bauch die Kraft.</a:t>
+            </a:r>
+            <a:endParaRPr lang="en-US" sz="1500" dirty="0"/>
+          </a:p>
+        </p:txBody>
+      </p:sp>
+      <p:sp>
+        <p:nvSpPr>
+          <p:cNvPr id="19" name="Text 16"/>
+          <p:cNvSpPr txBox="1"/>
+          <p:nvPr/>
+        </p:nvSpPr>
+        <p:spPr>
+          <a:xfrm>
+            <a:off x="548640" y="5577840"/>
+            <a:ext cx="11064240" cy="502920"/>
+          </a:xfrm>
+          <a:prstGeom prst="rect">
+            <a:avLst/>
+          </a:prstGeom>
+          <a:noFill/>
+          <a:ln/>
+        </p:spPr>
+        <p:txBody>
+          <a:bodyPr wrap="square" lIns="0" tIns="0" rIns="0" bIns="0" rtlCol="0" anchor="t"/>
+          <a:lstStyle/>
+          <a:p>
+            <a:pPr indent="0" marL="0">
+              <a:buNone/>
+            </a:pPr>
+            <a:r>
+              <a:rPr lang="en-US" sz="1600" b="1" dirty="0">
+                <a:solidFill>
+                  <a:srgbClr val="1E2761"/>
+                </a:solidFill>
+                <a:latin typeface="Calibri" pitchFamily="34" charset="0"/>
+                <a:ea typeface="Calibri" pitchFamily="34" charset="-122"/>
+                <a:cs typeface="Calibri" pitchFamily="34" charset="-120"/>
+              </a:rPr>
+              <a:t>Zu zweit: Ordnet A, B, C zu und notiert je ein Merkmal. Tipp: Wer erzählt hier – und gibt es überhaupt einen Erzähler?</a:t>
+            </a:r>
+            <a:endParaRPr lang="en-US" sz="1600" dirty="0"/>
           </a:p>
         </p:txBody>
       </p:sp>
@@ -7937,7 +8708,7 @@
                 <a:ea typeface="Calibri" pitchFamily="34" charset="-122"/>
                 <a:cs typeface="Calibri" pitchFamily="34" charset="-120"/>
               </a:rPr>
-              <a:t>INFORMIEREN · VERGLEICH</a:t>
+              <a:t>INFORMIEREN · EIN TRAINING – DREI GATTUNGEN</a:t>
             </a:r>
             <a:endParaRPr lang="en-US" sz="1200" dirty="0"/>
           </a:p>
@@ -7976,7 +8747,7 @@
                 <a:ea typeface="Cambria" pitchFamily="34" charset="-122"/>
                 <a:cs typeface="Cambria" pitchFamily="34" charset="-120"/>
               </a:rPr>
-              <a:t>Das steckt in der Ballade</a:t>
+              <a:t>So erkennst du die Gattung</a:t>
             </a:r>
             <a:endParaRPr lang="en-US" sz="3200" dirty="0"/>
           </a:p>
@@ -8068,12 +8839,578 @@
         </p:nvSpPr>
         <p:spPr>
           <a:xfrm>
-            <a:off x="548640" y="1463040"/>
-            <a:ext cx="3611880" cy="685800"/>
+            <a:off x="548640" y="1417320"/>
+            <a:ext cx="3611880" cy="502920"/>
           </a:xfrm>
           <a:prstGeom prst="roundRect">
             <a:avLst>
-              <a:gd name="adj" fmla="val 10667"/>
+              <a:gd name="adj" fmla="val 14545"/>
+            </a:avLst>
+          </a:prstGeom>
+          <a:solidFill>
+            <a:srgbClr val="7A5BA6"/>
+          </a:solidFill>
+          <a:ln/>
+        </p:spPr>
+      </p:sp>
+      <p:sp>
+        <p:nvSpPr>
+          <p:cNvPr id="8" name="Text 5"/>
+          <p:cNvSpPr txBox="1"/>
+          <p:nvPr/>
+        </p:nvSpPr>
+        <p:spPr>
+          <a:xfrm>
+            <a:off x="548640" y="1417320"/>
+            <a:ext cx="3611880" cy="502920"/>
+          </a:xfrm>
+          <a:prstGeom prst="rect">
+            <a:avLst/>
+          </a:prstGeom>
+          <a:noFill/>
+          <a:ln/>
+        </p:spPr>
+        <p:txBody>
+          <a:bodyPr wrap="square" lIns="0" tIns="0" rIns="0" bIns="0" rtlCol="0" anchor="ctr"/>
+          <a:lstStyle/>
+          <a:p>
+            <a:pPr algn="ctr" indent="0" marL="0">
+              <a:buNone/>
+            </a:pPr>
+            <a:r>
+              <a:rPr lang="en-US" sz="1900" b="1" dirty="0">
+                <a:solidFill>
+                  <a:srgbClr val="FFFFFF"/>
+                </a:solidFill>
+                <a:latin typeface="Cambria" pitchFamily="34" charset="0"/>
+                <a:ea typeface="Cambria" pitchFamily="34" charset="-122"/>
+                <a:cs typeface="Cambria" pitchFamily="34" charset="-120"/>
+              </a:rPr>
+              <a:t>A  Epik</a:t>
+            </a:r>
+            <a:endParaRPr lang="en-US" sz="1900" dirty="0"/>
+          </a:p>
+        </p:txBody>
+      </p:sp>
+      <p:sp>
+        <p:nvSpPr>
+          <p:cNvPr id="9" name="Shape 6"/>
+          <p:cNvSpPr/>
+          <p:nvPr/>
+        </p:nvSpPr>
+        <p:spPr>
+          <a:xfrm>
+            <a:off x="548640" y="2011680"/>
+            <a:ext cx="3611880" cy="2240280"/>
+          </a:xfrm>
+          <a:prstGeom prst="roundRect">
+            <a:avLst>
+              <a:gd name="adj" fmla="val 3265"/>
+            </a:avLst>
+          </a:prstGeom>
+          <a:solidFill>
+            <a:srgbClr val="F4F7FD"/>
+          </a:solidFill>
+          <a:ln/>
+        </p:spPr>
+      </p:sp>
+      <p:sp>
+        <p:nvSpPr>
+          <p:cNvPr id="10" name="Text 7"/>
+          <p:cNvSpPr txBox="1"/>
+          <p:nvPr/>
+        </p:nvSpPr>
+        <p:spPr>
+          <a:xfrm>
+            <a:off x="685800" y="2103120"/>
+            <a:ext cx="3337560" cy="2057400"/>
+          </a:xfrm>
+          <a:prstGeom prst="rect">
+            <a:avLst/>
+          </a:prstGeom>
+          <a:noFill/>
+          <a:ln/>
+        </p:spPr>
+        <p:txBody>
+          <a:bodyPr wrap="square" lIns="0" tIns="0" rIns="0" bIns="0" rtlCol="0" anchor="t"/>
+          <a:lstStyle/>
+          <a:p>
+            <a:pPr indent="0" marL="0">
+              <a:buNone/>
+            </a:pPr>
+            <a:r>
+              <a:rPr lang="en-US" sz="1500" dirty="0">
+                <a:solidFill>
+                  <a:srgbClr val="1E2761"/>
+                </a:solidFill>
+                <a:latin typeface="Cambria" pitchFamily="34" charset="0"/>
+                <a:ea typeface="Cambria" pitchFamily="34" charset="-122"/>
+                <a:cs typeface="Cambria" pitchFamily="34" charset="-120"/>
+              </a:rPr>
+              <a:t>Bei der letzten Runde waren meine Beine schwer wie Blei. Ich bekam kaum noch Luft und wollte aufhören. „Noch zwanzig Meter!“, rief mein Trainer vom Rand. Ich biss die Zähne zusammen und lief bis zur Linie.</a:t>
+            </a:r>
+            <a:endParaRPr lang="en-US" sz="1250" dirty="0"/>
+          </a:p>
+        </p:txBody>
+      </p:sp>
+      <p:sp>
+        <p:nvSpPr>
+          <p:cNvPr id="11" name="Shape 8"/>
+          <p:cNvSpPr/>
+          <p:nvPr/>
+        </p:nvSpPr>
+        <p:spPr>
+          <a:xfrm>
+            <a:off x="548640" y="4343400"/>
+            <a:ext cx="3611880" cy="1280160"/>
+          </a:xfrm>
+          <a:prstGeom prst="roundRect">
+            <a:avLst>
+              <a:gd name="adj" fmla="val 5714"/>
+            </a:avLst>
+          </a:prstGeom>
+          <a:solidFill>
+            <a:srgbClr val="FFFFFF"/>
+          </a:solidFill>
+          <a:ln w="25400">
+            <a:solidFill>
+              <a:srgbClr val="7A5BA6"/>
+            </a:solidFill>
+            <a:prstDash val="solid"/>
+          </a:ln>
+        </p:spPr>
+      </p:sp>
+      <p:sp>
+        <p:nvSpPr>
+          <p:cNvPr id="12" name="Text 9"/>
+          <p:cNvSpPr txBox="1"/>
+          <p:nvPr/>
+        </p:nvSpPr>
+        <p:spPr>
+          <a:xfrm>
+            <a:off x="658368" y="4407408"/>
+            <a:ext cx="3383280" cy="1188720"/>
+          </a:xfrm>
+          <a:prstGeom prst="rect">
+            <a:avLst/>
+          </a:prstGeom>
+          <a:noFill/>
+          <a:ln/>
+        </p:spPr>
+        <p:txBody>
+          <a:bodyPr wrap="square" lIns="0" tIns="0" rIns="0" bIns="0" rtlCol="0" anchor="t"/>
+          <a:lstStyle/>
+          <a:p>
+            <a:pPr indent="0" marL="0">
+              <a:buNone/>
+            </a:pPr>
+            <a:r>
+              <a:rPr lang="en-US" sz="1250" dirty="0">
+                <a:solidFill>
+                  <a:srgbClr val="1E2761"/>
+                </a:solidFill>
+                <a:latin typeface="Calibri" pitchFamily="34" charset="0"/>
+                <a:ea typeface="Calibri" pitchFamily="34" charset="-122"/>
+                <a:cs typeface="Calibri" pitchFamily="34" charset="-120"/>
+              </a:rPr>
+              <a:t>• Ein Erzähler erzählt (hier: Ich-Erzähler)
+</a:t>
+            </a:r>
+            <a:pPr indent="0" marL="0">
+              <a:buNone/>
+            </a:pPr>
+            <a:r>
+              <a:rPr lang="en-US" sz="1250" dirty="0">
+                <a:solidFill>
+                  <a:srgbClr val="1E2761"/>
+                </a:solidFill>
+                <a:latin typeface="Calibri" pitchFamily="34" charset="0"/>
+                <a:ea typeface="Calibri" pitchFamily="34" charset="-122"/>
+                <a:cs typeface="Calibri" pitchFamily="34" charset="-120"/>
+              </a:rPr>
+              <a:t>• im Nachhinein, Präteritum
+</a:t>
+            </a:r>
+            <a:pPr indent="0" marL="0">
+              <a:buNone/>
+            </a:pPr>
+            <a:r>
+              <a:rPr lang="en-US" sz="1250" dirty="0">
+                <a:solidFill>
+                  <a:srgbClr val="1E2761"/>
+                </a:solidFill>
+                <a:latin typeface="Calibri" pitchFamily="34" charset="0"/>
+                <a:ea typeface="Calibri" pitchFamily="34" charset="-122"/>
+                <a:cs typeface="Calibri" pitchFamily="34" charset="-120"/>
+              </a:rPr>
+              <a:t>• er gibt die Rede wieder und leitet sie ein („rief mein Trainer“)</a:t>
+            </a:r>
+            <a:endParaRPr lang="en-US" sz="1250" dirty="0"/>
+          </a:p>
+        </p:txBody>
+      </p:sp>
+      <p:sp>
+        <p:nvSpPr>
+          <p:cNvPr id="13" name="Shape 10"/>
+          <p:cNvSpPr/>
+          <p:nvPr/>
+        </p:nvSpPr>
+        <p:spPr>
+          <a:xfrm>
+            <a:off x="4297680" y="1417320"/>
+            <a:ext cx="3611880" cy="502920"/>
+          </a:xfrm>
+          <a:prstGeom prst="roundRect">
+            <a:avLst>
+              <a:gd name="adj" fmla="val 14545"/>
+            </a:avLst>
+          </a:prstGeom>
+          <a:solidFill>
+            <a:srgbClr val="C77C12"/>
+          </a:solidFill>
+          <a:ln/>
+        </p:spPr>
+      </p:sp>
+      <p:sp>
+        <p:nvSpPr>
+          <p:cNvPr id="14" name="Text 11"/>
+          <p:cNvSpPr txBox="1"/>
+          <p:nvPr/>
+        </p:nvSpPr>
+        <p:spPr>
+          <a:xfrm>
+            <a:off x="4297680" y="1417320"/>
+            <a:ext cx="3611880" cy="502920"/>
+          </a:xfrm>
+          <a:prstGeom prst="rect">
+            <a:avLst/>
+          </a:prstGeom>
+          <a:noFill/>
+          <a:ln/>
+        </p:spPr>
+        <p:txBody>
+          <a:bodyPr wrap="square" lIns="0" tIns="0" rIns="0" bIns="0" rtlCol="0" anchor="ctr"/>
+          <a:lstStyle/>
+          <a:p>
+            <a:pPr algn="ctr" indent="0" marL="0">
+              <a:buNone/>
+            </a:pPr>
+            <a:r>
+              <a:rPr lang="en-US" sz="1900" b="1" dirty="0">
+                <a:solidFill>
+                  <a:srgbClr val="FFFFFF"/>
+                </a:solidFill>
+                <a:latin typeface="Cambria" pitchFamily="34" charset="0"/>
+                <a:ea typeface="Cambria" pitchFamily="34" charset="-122"/>
+                <a:cs typeface="Cambria" pitchFamily="34" charset="-120"/>
+              </a:rPr>
+              <a:t>B  Dramatik</a:t>
+            </a:r>
+            <a:endParaRPr lang="en-US" sz="1900" dirty="0"/>
+          </a:p>
+        </p:txBody>
+      </p:sp>
+      <p:sp>
+        <p:nvSpPr>
+          <p:cNvPr id="15" name="Shape 12"/>
+          <p:cNvSpPr/>
+          <p:nvPr/>
+        </p:nvSpPr>
+        <p:spPr>
+          <a:xfrm>
+            <a:off x="4297680" y="2011680"/>
+            <a:ext cx="3611880" cy="2240280"/>
+          </a:xfrm>
+          <a:prstGeom prst="roundRect">
+            <a:avLst>
+              <a:gd name="adj" fmla="val 3265"/>
+            </a:avLst>
+          </a:prstGeom>
+          <a:solidFill>
+            <a:srgbClr val="F4F7FD"/>
+          </a:solidFill>
+          <a:ln/>
+        </p:spPr>
+      </p:sp>
+      <p:sp>
+        <p:nvSpPr>
+          <p:cNvPr id="16" name="Text 13"/>
+          <p:cNvSpPr txBox="1"/>
+          <p:nvPr/>
+        </p:nvSpPr>
+        <p:spPr>
+          <a:xfrm>
+            <a:off x="4434840" y="2103120"/>
+            <a:ext cx="3337560" cy="2057400"/>
+          </a:xfrm>
+          <a:prstGeom prst="rect">
+            <a:avLst/>
+          </a:prstGeom>
+          <a:noFill/>
+          <a:ln/>
+        </p:spPr>
+        <p:txBody>
+          <a:bodyPr wrap="square" lIns="0" tIns="0" rIns="0" bIns="0" rtlCol="0" anchor="t"/>
+          <a:lstStyle/>
+          <a:p>
+            <a:pPr indent="0" marL="0">
+              <a:buNone/>
+            </a:pPr>
+            <a:r>
+              <a:rPr lang="en-US" sz="1500" b="1" dirty="0">
+                <a:solidFill>
+                  <a:srgbClr val="1E2761"/>
+                </a:solidFill>
+                <a:latin typeface="Cambria" pitchFamily="34" charset="0"/>
+                <a:ea typeface="Cambria" pitchFamily="34" charset="-122"/>
+                <a:cs typeface="Cambria" pitchFamily="34" charset="-120"/>
+              </a:rPr>
+              <a:t>TRAINER </a:t>
+            </a:r>
+            <a:pPr indent="0" marL="0">
+              <a:buNone/>
+            </a:pPr>
+            <a:r>
+              <a:rPr lang="en-US" sz="1500" i="1" dirty="0">
+                <a:solidFill>
+                  <a:srgbClr val="1E2761"/>
+                </a:solidFill>
+                <a:latin typeface="Cambria" pitchFamily="34" charset="0"/>
+                <a:ea typeface="Cambria" pitchFamily="34" charset="-122"/>
+                <a:cs typeface="Cambria" pitchFamily="34" charset="-120"/>
+              </a:rPr>
+              <a:t>(klatscht in die Hände)</a:t>
+            </a:r>
+            <a:pPr indent="0" marL="0">
+              <a:buNone/>
+            </a:pPr>
+            <a:r>
+              <a:rPr lang="en-US" sz="1500" dirty="0">
+                <a:solidFill>
+                  <a:srgbClr val="1E2761"/>
+                </a:solidFill>
+                <a:latin typeface="Cambria" pitchFamily="34" charset="0"/>
+                <a:ea typeface="Cambria" pitchFamily="34" charset="-122"/>
+                <a:cs typeface="Cambria" pitchFamily="34" charset="-120"/>
+              </a:rPr>
+              <a:t>: Letzte Runde! Los!
+</a:t>
+            </a:r>
+            <a:pPr indent="0" marL="0">
+              <a:buNone/>
+            </a:pPr>
+            <a:r>
+              <a:rPr lang="en-US" sz="1500" b="1" dirty="0">
+                <a:solidFill>
+                  <a:srgbClr val="1E2761"/>
+                </a:solidFill>
+                <a:latin typeface="Cambria" pitchFamily="34" charset="0"/>
+                <a:ea typeface="Cambria" pitchFamily="34" charset="-122"/>
+                <a:cs typeface="Cambria" pitchFamily="34" charset="-120"/>
+              </a:rPr>
+              <a:t>SPORTLERIN </a:t>
+            </a:r>
+            <a:pPr indent="0" marL="0">
+              <a:buNone/>
+            </a:pPr>
+            <a:r>
+              <a:rPr lang="en-US" sz="1500" i="1" dirty="0">
+                <a:solidFill>
+                  <a:srgbClr val="1E2761"/>
+                </a:solidFill>
+                <a:latin typeface="Cambria" pitchFamily="34" charset="0"/>
+                <a:ea typeface="Cambria" pitchFamily="34" charset="-122"/>
+                <a:cs typeface="Cambria" pitchFamily="34" charset="-120"/>
+              </a:rPr>
+              <a:t>(keucht)</a:t>
+            </a:r>
+            <a:pPr indent="0" marL="0">
+              <a:buNone/>
+            </a:pPr>
+            <a:r>
+              <a:rPr lang="en-US" sz="1500" dirty="0">
+                <a:solidFill>
+                  <a:srgbClr val="1E2761"/>
+                </a:solidFill>
+                <a:latin typeface="Cambria" pitchFamily="34" charset="0"/>
+                <a:ea typeface="Cambria" pitchFamily="34" charset="-122"/>
+                <a:cs typeface="Cambria" pitchFamily="34" charset="-120"/>
+              </a:rPr>
+              <a:t>: Ich kann nicht mehr …
+</a:t>
+            </a:r>
+            <a:pPr indent="0" marL="0">
+              <a:buNone/>
+            </a:pPr>
+            <a:r>
+              <a:rPr lang="en-US" sz="1500" b="1" dirty="0">
+                <a:solidFill>
+                  <a:srgbClr val="1E2761"/>
+                </a:solidFill>
+                <a:latin typeface="Cambria" pitchFamily="34" charset="0"/>
+                <a:ea typeface="Cambria" pitchFamily="34" charset="-122"/>
+                <a:cs typeface="Cambria" pitchFamily="34" charset="-120"/>
+              </a:rPr>
+              <a:t>TRAINER</a:t>
+            </a:r>
+            <a:pPr indent="0" marL="0">
+              <a:buNone/>
+            </a:pPr>
+            <a:r>
+              <a:rPr lang="en-US" sz="1500" dirty="0">
+                <a:solidFill>
+                  <a:srgbClr val="1E2761"/>
+                </a:solidFill>
+                <a:latin typeface="Cambria" pitchFamily="34" charset="0"/>
+                <a:ea typeface="Cambria" pitchFamily="34" charset="-122"/>
+                <a:cs typeface="Cambria" pitchFamily="34" charset="-120"/>
+              </a:rPr>
+              <a:t>: Noch zwanzig Meter! Du schaffst das!
+</a:t>
+            </a:r>
+            <a:pPr indent="0" marL="0">
+              <a:buNone/>
+            </a:pPr>
+            <a:r>
+              <a:rPr lang="en-US" sz="1500" i="1" dirty="0">
+                <a:solidFill>
+                  <a:srgbClr val="1E2761"/>
+                </a:solidFill>
+                <a:latin typeface="Cambria" pitchFamily="34" charset="0"/>
+                <a:ea typeface="Cambria" pitchFamily="34" charset="-122"/>
+                <a:cs typeface="Cambria" pitchFamily="34" charset="-120"/>
+              </a:rPr>
+              <a:t>(Die Sportlerin läuft bis zur Linie und lässt sich ins Gras fallen.)</a:t>
+            </a:r>
+            <a:endParaRPr lang="en-US" sz="1250" dirty="0"/>
+          </a:p>
+        </p:txBody>
+      </p:sp>
+      <p:sp>
+        <p:nvSpPr>
+          <p:cNvPr id="17" name="Shape 14"/>
+          <p:cNvSpPr/>
+          <p:nvPr/>
+        </p:nvSpPr>
+        <p:spPr>
+          <a:xfrm>
+            <a:off x="4297680" y="4343400"/>
+            <a:ext cx="3611880" cy="1280160"/>
+          </a:xfrm>
+          <a:prstGeom prst="roundRect">
+            <a:avLst>
+              <a:gd name="adj" fmla="val 5714"/>
+            </a:avLst>
+          </a:prstGeom>
+          <a:solidFill>
+            <a:srgbClr val="FFFFFF"/>
+          </a:solidFill>
+          <a:ln w="25400">
+            <a:solidFill>
+              <a:srgbClr val="C77C12"/>
+            </a:solidFill>
+            <a:prstDash val="solid"/>
+          </a:ln>
+        </p:spPr>
+      </p:sp>
+      <p:sp>
+        <p:nvSpPr>
+          <p:cNvPr id="18" name="Text 15"/>
+          <p:cNvSpPr txBox="1"/>
+          <p:nvPr/>
+        </p:nvSpPr>
+        <p:spPr>
+          <a:xfrm>
+            <a:off x="4407408" y="4407408"/>
+            <a:ext cx="3383280" cy="1188720"/>
+          </a:xfrm>
+          <a:prstGeom prst="rect">
+            <a:avLst/>
+          </a:prstGeom>
+          <a:noFill/>
+          <a:ln/>
+        </p:spPr>
+        <p:txBody>
+          <a:bodyPr wrap="square" lIns="0" tIns="0" rIns="0" bIns="0" rtlCol="0" anchor="t"/>
+          <a:lstStyle/>
+          <a:p>
+            <a:pPr indent="0" marL="0">
+              <a:buNone/>
+            </a:pPr>
+            <a:r>
+              <a:rPr lang="en-US" sz="1250" dirty="0">
+                <a:solidFill>
+                  <a:srgbClr val="1E2761"/>
+                </a:solidFill>
+                <a:latin typeface="Calibri" pitchFamily="34" charset="0"/>
+                <a:ea typeface="Calibri" pitchFamily="34" charset="-122"/>
+                <a:cs typeface="Calibri" pitchFamily="34" charset="-120"/>
+              </a:rPr>
+              <a:t>• Kein Erzähler
+</a:t>
+            </a:r>
+            <a:pPr indent="0" marL="0">
+              <a:buNone/>
+            </a:pPr>
+            <a:r>
+              <a:rPr lang="en-US" sz="1250" dirty="0">
+                <a:solidFill>
+                  <a:srgbClr val="1E2761"/>
+                </a:solidFill>
+                <a:latin typeface="Calibri" pitchFamily="34" charset="0"/>
+                <a:ea typeface="Calibri" pitchFamily="34" charset="-122"/>
+                <a:cs typeface="Calibri" pitchFamily="34" charset="-120"/>
+              </a:rPr>
+              <a:t>• die Figuren sprechen direkt miteinander, Name vor der Rede
+</a:t>
+            </a:r>
+            <a:pPr indent="0" marL="0">
+              <a:buNone/>
+            </a:pPr>
+            <a:r>
+              <a:rPr lang="en-US" sz="1250" dirty="0">
+                <a:solidFill>
+                  <a:srgbClr val="1E2761"/>
+                </a:solidFill>
+                <a:latin typeface="Calibri" pitchFamily="34" charset="0"/>
+                <a:ea typeface="Calibri" pitchFamily="34" charset="-122"/>
+                <a:cs typeface="Calibri" pitchFamily="34" charset="-120"/>
+              </a:rPr>
+              <a:t>• es passiert jetzt (Präsens)
+</a:t>
+            </a:r>
+            <a:pPr indent="0" marL="0">
+              <a:buNone/>
+            </a:pPr>
+            <a:r>
+              <a:rPr lang="en-US" sz="1250" dirty="0">
+                <a:solidFill>
+                  <a:srgbClr val="1E2761"/>
+                </a:solidFill>
+                <a:latin typeface="Calibri" pitchFamily="34" charset="0"/>
+                <a:ea typeface="Calibri" pitchFamily="34" charset="-122"/>
+                <a:cs typeface="Calibri" pitchFamily="34" charset="-120"/>
+              </a:rPr>
+              <a:t>• Regieanweisungen in Klammern</a:t>
+            </a:r>
+            <a:endParaRPr lang="en-US" sz="1250" dirty="0"/>
+          </a:p>
+        </p:txBody>
+      </p:sp>
+      <p:sp>
+        <p:nvSpPr>
+          <p:cNvPr id="19" name="Shape 16"/>
+          <p:cNvSpPr/>
+          <p:nvPr/>
+        </p:nvSpPr>
+        <p:spPr>
+          <a:xfrm>
+            <a:off x="8046720" y="1417320"/>
+            <a:ext cx="3611880" cy="502920"/>
+          </a:xfrm>
+          <a:prstGeom prst="roundRect">
+            <a:avLst>
+              <a:gd name="adj" fmla="val 14545"/>
             </a:avLst>
           </a:prstGeom>
           <a:solidFill>
@@ -8084,14 +9421,14 @@
       </p:sp>
       <p:sp>
         <p:nvSpPr>
-          <p:cNvPr id="8" name="Text 5"/>
-          <p:cNvSpPr txBox="1"/>
-          <p:nvPr/>
-        </p:nvSpPr>
-        <p:spPr>
-          <a:xfrm>
-            <a:off x="548640" y="1463040"/>
-            <a:ext cx="3611880" cy="685800"/>
+          <p:cNvPr id="20" name="Text 17"/>
+          <p:cNvSpPr txBox="1"/>
+          <p:nvPr/>
+        </p:nvSpPr>
+        <p:spPr>
+          <a:xfrm>
+            <a:off x="8046720" y="1417320"/>
+            <a:ext cx="3611880" cy="502920"/>
           </a:xfrm>
           <a:prstGeom prst="rect">
             <a:avLst/>
@@ -8107,7 +9444,7 @@
               <a:buNone/>
             </a:pPr>
             <a:r>
-              <a:rPr lang="en-US" sz="2400" b="1" dirty="0">
+              <a:rPr lang="en-US" sz="1900" b="1" dirty="0">
                 <a:solidFill>
                   <a:srgbClr val="FFFFFF"/>
                 </a:solidFill>
@@ -8115,87 +9452,26 @@
                 <a:ea typeface="Cambria" pitchFamily="34" charset="-122"/>
                 <a:cs typeface="Cambria" pitchFamily="34" charset="-120"/>
               </a:rPr>
-              <a:t>Lyrik</a:t>
-            </a:r>
-            <a:endParaRPr lang="en-US" sz="2400" dirty="0"/>
-          </a:p>
-        </p:txBody>
-      </p:sp>
-      <p:sp>
-        <p:nvSpPr>
-          <p:cNvPr id="9" name="Shape 6"/>
+              <a:t>C  Lyrik</a:t>
+            </a:r>
+            <a:endParaRPr lang="en-US" sz="1900" dirty="0"/>
+          </a:p>
+        </p:txBody>
+      </p:sp>
+      <p:sp>
+        <p:nvSpPr>
+          <p:cNvPr id="21" name="Shape 18"/>
           <p:cNvSpPr/>
           <p:nvPr/>
         </p:nvSpPr>
         <p:spPr>
           <a:xfrm>
-            <a:off x="548640" y="2240280"/>
-            <a:ext cx="3611880" cy="640080"/>
+            <a:off x="8046720" y="2011680"/>
+            <a:ext cx="3611880" cy="2240280"/>
           </a:xfrm>
           <a:prstGeom prst="roundRect">
             <a:avLst>
-              <a:gd name="adj" fmla="val 11429"/>
-            </a:avLst>
-          </a:prstGeom>
-          <a:solidFill>
-            <a:srgbClr val="EAF0FA"/>
-          </a:solidFill>
-          <a:ln/>
-        </p:spPr>
-      </p:sp>
-      <p:sp>
-        <p:nvSpPr>
-          <p:cNvPr id="10" name="Text 7"/>
-          <p:cNvSpPr txBox="1"/>
-          <p:nvPr/>
-        </p:nvSpPr>
-        <p:spPr>
-          <a:xfrm>
-            <a:off x="548640" y="2240280"/>
-            <a:ext cx="3611880" cy="640080"/>
-          </a:xfrm>
-          <a:prstGeom prst="rect">
-            <a:avLst/>
-          </a:prstGeom>
-          <a:noFill/>
-          <a:ln/>
-        </p:spPr>
-        <p:txBody>
-          <a:bodyPr wrap="square" lIns="0" tIns="0" rIns="0" bIns="0" rtlCol="0" anchor="ctr"/>
-          <a:lstStyle/>
-          <a:p>
-            <a:pPr algn="ctr" indent="0" marL="0">
-              <a:buNone/>
-            </a:pPr>
-            <a:r>
-              <a:rPr lang="en-US" sz="1800" b="1" dirty="0">
-                <a:solidFill>
-                  <a:srgbClr val="1E2761"/>
-                </a:solidFill>
-                <a:latin typeface="Calibri" pitchFamily="34" charset="0"/>
-                <a:ea typeface="Calibri" pitchFamily="34" charset="-122"/>
-                <a:cs typeface="Calibri" pitchFamily="34" charset="-120"/>
-              </a:rPr>
-              <a:t>wie ein Song-Text</a:t>
-            </a:r>
-            <a:endParaRPr lang="en-US" sz="1800" dirty="0"/>
-          </a:p>
-        </p:txBody>
-      </p:sp>
-      <p:sp>
-        <p:nvSpPr>
-          <p:cNvPr id="11" name="Shape 8"/>
-          <p:cNvSpPr/>
-          <p:nvPr/>
-        </p:nvSpPr>
-        <p:spPr>
-          <a:xfrm>
-            <a:off x="548640" y="3017520"/>
-            <a:ext cx="3611880" cy="2103120"/>
-          </a:xfrm>
-          <a:prstGeom prst="roundRect">
-            <a:avLst>
-              <a:gd name="adj" fmla="val 3478"/>
+              <a:gd name="adj" fmla="val 3265"/>
             </a:avLst>
           </a:prstGeom>
           <a:solidFill>
@@ -8206,403 +9482,209 @@
       </p:sp>
       <p:sp>
         <p:nvSpPr>
-          <p:cNvPr id="12" name="Text 9"/>
-          <p:cNvSpPr txBox="1"/>
-          <p:nvPr/>
-        </p:nvSpPr>
-        <p:spPr>
-          <a:xfrm>
-            <a:off x="731520" y="3154680"/>
-            <a:ext cx="3246120" cy="1874520"/>
-          </a:xfrm>
-          <a:prstGeom prst="rect">
-            <a:avLst/>
-          </a:prstGeom>
-          <a:noFill/>
-          <a:ln/>
-        </p:spPr>
-        <p:txBody>
-          <a:bodyPr wrap="square" lIns="0" tIns="0" rIns="0" bIns="0" rtlCol="0" anchor="t"/>
-          <a:lstStyle/>
-          <a:p>
-            <a:pPr algn="l" indent="0" marL="0">
-              <a:buNone/>
-            </a:pPr>
-            <a:r>
-              <a:rPr lang="en-US" sz="1700" dirty="0">
+          <p:cNvPr id="22" name="Text 19"/>
+          <p:cNvSpPr txBox="1"/>
+          <p:nvPr/>
+        </p:nvSpPr>
+        <p:spPr>
+          <a:xfrm>
+            <a:off x="8183880" y="2103120"/>
+            <a:ext cx="3337560" cy="2057400"/>
+          </a:xfrm>
+          <a:prstGeom prst="rect">
+            <a:avLst/>
+          </a:prstGeom>
+          <a:noFill/>
+          <a:ln/>
+        </p:spPr>
+        <p:txBody>
+          <a:bodyPr wrap="square" lIns="0" tIns="0" rIns="0" bIns="0" rtlCol="0" anchor="t"/>
+          <a:lstStyle/>
+          <a:p>
+            <a:pPr indent="0" marL="0">
+              <a:buNone/>
+            </a:pPr>
+            <a:r>
+              <a:rPr lang="en-US" sz="1500" dirty="0">
                 <a:solidFill>
                   <a:srgbClr val="1E2761"/>
-                </a:solidFill>
-                <a:latin typeface="Calibri" pitchFamily="34" charset="0"/>
-                <a:ea typeface="Calibri" pitchFamily="34" charset="-122"/>
-                <a:cs typeface="Calibri" pitchFamily="34" charset="-120"/>
-              </a:rPr>
-              <a:t>• Strophen und Verse
-</a:t>
-            </a:r>
-            <a:pPr algn="l" indent="0" marL="0">
-              <a:buNone/>
-            </a:pPr>
-            <a:r>
-              <a:rPr lang="en-US" sz="1700" dirty="0">
-                <a:solidFill>
-                  <a:srgbClr val="1E2761"/>
-                </a:solidFill>
-                <a:latin typeface="Calibri" pitchFamily="34" charset="0"/>
-                <a:ea typeface="Calibri" pitchFamily="34" charset="-122"/>
-                <a:cs typeface="Calibri" pitchFamily="34" charset="-120"/>
-              </a:rPr>
-              <a:t>• Reime
-</a:t>
-            </a:r>
-            <a:pPr algn="l" indent="0" marL="0">
-              <a:buNone/>
-            </a:pPr>
-            <a:r>
-              <a:rPr lang="en-US" sz="1700" dirty="0">
-                <a:solidFill>
-                  <a:srgbClr val="1E2761"/>
-                </a:solidFill>
-                <a:latin typeface="Calibri" pitchFamily="34" charset="0"/>
-                <a:ea typeface="Calibri" pitchFamily="34" charset="-122"/>
-                <a:cs typeface="Calibri" pitchFamily="34" charset="-120"/>
-              </a:rPr>
-              <a:t>• Refrain (Kehrreim)</a:t>
-            </a:r>
-            <a:endParaRPr lang="en-US" sz="1700" dirty="0"/>
-          </a:p>
-        </p:txBody>
-      </p:sp>
-      <p:sp>
-        <p:nvSpPr>
-          <p:cNvPr id="13" name="Shape 10"/>
-          <p:cNvSpPr/>
-          <p:nvPr/>
-        </p:nvSpPr>
-        <p:spPr>
-          <a:xfrm>
-            <a:off x="4297680" y="1463040"/>
-            <a:ext cx="3611880" cy="685800"/>
-          </a:xfrm>
-          <a:prstGeom prst="roundRect">
-            <a:avLst>
-              <a:gd name="adj" fmla="val 10667"/>
-            </a:avLst>
-          </a:prstGeom>
-          <a:solidFill>
-            <a:srgbClr val="7A5BA6"/>
-          </a:solidFill>
-          <a:ln/>
-        </p:spPr>
-      </p:sp>
-      <p:sp>
-        <p:nvSpPr>
-          <p:cNvPr id="14" name="Text 11"/>
-          <p:cNvSpPr txBox="1"/>
-          <p:nvPr/>
-        </p:nvSpPr>
-        <p:spPr>
-          <a:xfrm>
-            <a:off x="4297680" y="1463040"/>
-            <a:ext cx="3611880" cy="685800"/>
-          </a:xfrm>
-          <a:prstGeom prst="rect">
-            <a:avLst/>
-          </a:prstGeom>
-          <a:noFill/>
-          <a:ln/>
-        </p:spPr>
-        <p:txBody>
-          <a:bodyPr wrap="square" lIns="0" tIns="0" rIns="0" bIns="0" rtlCol="0" anchor="ctr"/>
-          <a:lstStyle/>
-          <a:p>
-            <a:pPr algn="ctr" indent="0" marL="0">
-              <a:buNone/>
-            </a:pPr>
-            <a:r>
-              <a:rPr lang="en-US" sz="2400" b="1" dirty="0">
-                <a:solidFill>
-                  <a:srgbClr val="FFFFFF"/>
                 </a:solidFill>
                 <a:latin typeface="Cambria" pitchFamily="34" charset="0"/>
                 <a:ea typeface="Cambria" pitchFamily="34" charset="-122"/>
                 <a:cs typeface="Cambria" pitchFamily="34" charset="-120"/>
               </a:rPr>
-              <a:t>Epik</a:t>
-            </a:r>
-            <a:endParaRPr lang="en-US" sz="2400" dirty="0"/>
-          </a:p>
-        </p:txBody>
-      </p:sp>
-      <p:sp>
-        <p:nvSpPr>
-          <p:cNvPr id="15" name="Shape 12"/>
-          <p:cNvSpPr/>
-          <p:nvPr/>
-        </p:nvSpPr>
-        <p:spPr>
-          <a:xfrm>
-            <a:off x="4297680" y="2240280"/>
-            <a:ext cx="3611880" cy="640080"/>
-          </a:xfrm>
-          <a:prstGeom prst="roundRect">
-            <a:avLst>
-              <a:gd name="adj" fmla="val 11429"/>
-            </a:avLst>
-          </a:prstGeom>
-          <a:solidFill>
-            <a:srgbClr val="EAF0FA"/>
-          </a:solidFill>
-          <a:ln/>
-        </p:spPr>
-      </p:sp>
-      <p:sp>
-        <p:nvSpPr>
-          <p:cNvPr id="16" name="Text 13"/>
-          <p:cNvSpPr txBox="1"/>
-          <p:nvPr/>
-        </p:nvSpPr>
-        <p:spPr>
-          <a:xfrm>
-            <a:off x="4297680" y="2240280"/>
-            <a:ext cx="3611880" cy="640080"/>
-          </a:xfrm>
-          <a:prstGeom prst="rect">
-            <a:avLst/>
-          </a:prstGeom>
-          <a:noFill/>
-          <a:ln/>
-        </p:spPr>
-        <p:txBody>
-          <a:bodyPr wrap="square" lIns="0" tIns="0" rIns="0" bIns="0" rtlCol="0" anchor="ctr"/>
-          <a:lstStyle/>
-          <a:p>
-            <a:pPr algn="ctr" indent="0" marL="0">
-              <a:buNone/>
-            </a:pPr>
-            <a:r>
-              <a:rPr lang="en-US" sz="1800" b="1" dirty="0">
+              <a:t>Die letzte Runde, die Beine schwer,</a:t>
+            </a:r>
+            <a:endParaRPr lang="en-US" sz="1250" dirty="0"/>
+          </a:p>
+          <a:p>
+            <a:pPr indent="0" marL="0">
+              <a:buNone/>
+            </a:pPr>
+            <a:r>
+              <a:rPr lang="en-US" sz="1500" dirty="0">
                 <a:solidFill>
                   <a:srgbClr val="1E2761"/>
-                </a:solidFill>
-                <a:latin typeface="Calibri" pitchFamily="34" charset="0"/>
-                <a:ea typeface="Calibri" pitchFamily="34" charset="-122"/>
-                <a:cs typeface="Calibri" pitchFamily="34" charset="-120"/>
-              </a:rPr>
-              <a:t>wie ein Roman oder Spielbericht</a:t>
-            </a:r>
-            <a:endParaRPr lang="en-US" sz="1800" dirty="0"/>
-          </a:p>
-        </p:txBody>
-      </p:sp>
-      <p:sp>
-        <p:nvSpPr>
-          <p:cNvPr id="17" name="Shape 14"/>
-          <p:cNvSpPr/>
-          <p:nvPr/>
-        </p:nvSpPr>
-        <p:spPr>
-          <a:xfrm>
-            <a:off x="4297680" y="3017520"/>
-            <a:ext cx="3611880" cy="2103120"/>
-          </a:xfrm>
-          <a:prstGeom prst="roundRect">
-            <a:avLst>
-              <a:gd name="adj" fmla="val 3478"/>
-            </a:avLst>
-          </a:prstGeom>
-          <a:solidFill>
-            <a:srgbClr val="F4F7FD"/>
-          </a:solidFill>
-          <a:ln/>
-        </p:spPr>
-      </p:sp>
-      <p:sp>
-        <p:nvSpPr>
-          <p:cNvPr id="18" name="Text 15"/>
-          <p:cNvSpPr txBox="1"/>
-          <p:nvPr/>
-        </p:nvSpPr>
-        <p:spPr>
-          <a:xfrm>
-            <a:off x="4480560" y="3154680"/>
-            <a:ext cx="3246120" cy="1874520"/>
-          </a:xfrm>
-          <a:prstGeom prst="rect">
-            <a:avLst/>
-          </a:prstGeom>
-          <a:noFill/>
-          <a:ln/>
-        </p:spPr>
-        <p:txBody>
-          <a:bodyPr wrap="square" lIns="0" tIns="0" rIns="0" bIns="0" rtlCol="0" anchor="t"/>
-          <a:lstStyle/>
-          <a:p>
-            <a:pPr algn="l" indent="0" marL="0">
-              <a:buNone/>
-            </a:pPr>
-            <a:r>
-              <a:rPr lang="en-US" sz="1700" dirty="0">
-                <a:solidFill>
-                  <a:srgbClr val="1E2761"/>
-                </a:solidFill>
-                <a:latin typeface="Calibri" pitchFamily="34" charset="0"/>
-                <a:ea typeface="Calibri" pitchFamily="34" charset="-122"/>
-                <a:cs typeface="Calibri" pitchFamily="34" charset="-120"/>
-              </a:rPr>
-              <a:t>• jemand erzählt (Erzähler)
-</a:t>
-            </a:r>
-            <a:pPr algn="l" indent="0" marL="0">
-              <a:buNone/>
-            </a:pPr>
-            <a:r>
-              <a:rPr lang="en-US" sz="1700" dirty="0">
-                <a:solidFill>
-                  <a:srgbClr val="1E2761"/>
-                </a:solidFill>
-                <a:latin typeface="Calibri" pitchFamily="34" charset="0"/>
-                <a:ea typeface="Calibri" pitchFamily="34" charset="-122"/>
-                <a:cs typeface="Calibri" pitchFamily="34" charset="-120"/>
-              </a:rPr>
-              <a:t>• Figuren
-</a:t>
-            </a:r>
-            <a:pPr algn="l" indent="0" marL="0">
-              <a:buNone/>
-            </a:pPr>
-            <a:r>
-              <a:rPr lang="en-US" sz="1700" dirty="0">
-                <a:solidFill>
-                  <a:srgbClr val="1E2761"/>
-                </a:solidFill>
-                <a:latin typeface="Calibri" pitchFamily="34" charset="0"/>
-                <a:ea typeface="Calibri" pitchFamily="34" charset="-122"/>
-                <a:cs typeface="Calibri" pitchFamily="34" charset="-120"/>
-              </a:rPr>
-              <a:t>• Handlung mit Anfang, Höhepunkt, Ende
-</a:t>
-            </a:r>
-            <a:pPr algn="l" indent="0" marL="0">
-              <a:buNone/>
-            </a:pPr>
-            <a:r>
-              <a:rPr lang="en-US" sz="1700" dirty="0">
-                <a:solidFill>
-                  <a:srgbClr val="1E2761"/>
-                </a:solidFill>
-                <a:latin typeface="Calibri" pitchFamily="34" charset="0"/>
-                <a:ea typeface="Calibri" pitchFamily="34" charset="-122"/>
-                <a:cs typeface="Calibri" pitchFamily="34" charset="-120"/>
-              </a:rPr>
-              <a:t>• meist Präteritum</a:t>
-            </a:r>
-            <a:endParaRPr lang="en-US" sz="1700" dirty="0"/>
-          </a:p>
-        </p:txBody>
-      </p:sp>
-      <p:sp>
-        <p:nvSpPr>
-          <p:cNvPr id="19" name="Shape 16"/>
-          <p:cNvSpPr/>
-          <p:nvPr/>
-        </p:nvSpPr>
-        <p:spPr>
-          <a:xfrm>
-            <a:off x="8046720" y="1463040"/>
-            <a:ext cx="3611880" cy="685800"/>
-          </a:xfrm>
-          <a:prstGeom prst="roundRect">
-            <a:avLst>
-              <a:gd name="adj" fmla="val 10667"/>
-            </a:avLst>
-          </a:prstGeom>
-          <a:solidFill>
-            <a:srgbClr val="C77C12"/>
-          </a:solidFill>
-          <a:ln/>
-        </p:spPr>
-      </p:sp>
-      <p:sp>
-        <p:nvSpPr>
-          <p:cNvPr id="20" name="Text 17"/>
-          <p:cNvSpPr txBox="1"/>
-          <p:nvPr/>
-        </p:nvSpPr>
-        <p:spPr>
-          <a:xfrm>
-            <a:off x="8046720" y="1463040"/>
-            <a:ext cx="3611880" cy="685800"/>
-          </a:xfrm>
-          <a:prstGeom prst="rect">
-            <a:avLst/>
-          </a:prstGeom>
-          <a:noFill/>
-          <a:ln/>
-        </p:spPr>
-        <p:txBody>
-          <a:bodyPr wrap="square" lIns="0" tIns="0" rIns="0" bIns="0" rtlCol="0" anchor="ctr"/>
-          <a:lstStyle/>
-          <a:p>
-            <a:pPr algn="ctr" indent="0" marL="0">
-              <a:buNone/>
-            </a:pPr>
-            <a:r>
-              <a:rPr lang="en-US" sz="2400" b="1" dirty="0">
-                <a:solidFill>
-                  <a:srgbClr val="FFFFFF"/>
                 </a:solidFill>
                 <a:latin typeface="Cambria" pitchFamily="34" charset="0"/>
                 <a:ea typeface="Cambria" pitchFamily="34" charset="-122"/>
                 <a:cs typeface="Cambria" pitchFamily="34" charset="-120"/>
               </a:rPr>
-              <a:t>Dramatik</a:t>
-            </a:r>
-            <a:endParaRPr lang="en-US" sz="2400" dirty="0"/>
-          </a:p>
-        </p:txBody>
-      </p:sp>
-      <p:sp>
-        <p:nvSpPr>
-          <p:cNvPr id="21" name="Shape 18"/>
+              <a:t>die Luft wird knapp, ich kann nicht mehr.</a:t>
+            </a:r>
+            <a:endParaRPr lang="en-US" sz="1250" dirty="0"/>
+          </a:p>
+          <a:p>
+            <a:pPr indent="0" marL="0">
+              <a:buNone/>
+            </a:pPr>
+            <a:r>
+              <a:rPr lang="en-US" sz="1500" dirty="0">
+                <a:solidFill>
+                  <a:srgbClr val="1E2761"/>
+                </a:solidFill>
+                <a:latin typeface="Cambria" pitchFamily="34" charset="0"/>
+                <a:ea typeface="Cambria" pitchFamily="34" charset="-122"/>
+                <a:cs typeface="Cambria" pitchFamily="34" charset="-120"/>
+              </a:rPr>
+              <a:t>Ein Schritt noch, dann ist’s geschafft,</a:t>
+            </a:r>
+            <a:endParaRPr lang="en-US" sz="1250" dirty="0"/>
+          </a:p>
+          <a:p>
+            <a:pPr indent="0" marL="0">
+              <a:buNone/>
+            </a:pPr>
+            <a:r>
+              <a:rPr lang="en-US" sz="1500" dirty="0">
+                <a:solidFill>
+                  <a:srgbClr val="1E2761"/>
+                </a:solidFill>
+                <a:latin typeface="Cambria" pitchFamily="34" charset="0"/>
+                <a:ea typeface="Cambria" pitchFamily="34" charset="-122"/>
+                <a:cs typeface="Cambria" pitchFamily="34" charset="-120"/>
+              </a:rPr>
+              <a:t>ich hol mir aus dem Bauch die Kraft.</a:t>
+            </a:r>
+            <a:endParaRPr lang="en-US" sz="1250" dirty="0"/>
+          </a:p>
+        </p:txBody>
+      </p:sp>
+      <p:sp>
+        <p:nvSpPr>
+          <p:cNvPr id="23" name="Shape 20"/>
           <p:cNvSpPr/>
           <p:nvPr/>
         </p:nvSpPr>
         <p:spPr>
           <a:xfrm>
-            <a:off x="8046720" y="2240280"/>
-            <a:ext cx="3611880" cy="640080"/>
+            <a:off x="8046720" y="4343400"/>
+            <a:ext cx="3611880" cy="1280160"/>
           </a:xfrm>
           <a:prstGeom prst="roundRect">
             <a:avLst>
-              <a:gd name="adj" fmla="val 11429"/>
+              <a:gd name="adj" fmla="val 5714"/>
             </a:avLst>
           </a:prstGeom>
           <a:solidFill>
-            <a:srgbClr val="EAF0FA"/>
+            <a:srgbClr val="FFFFFF"/>
           </a:solidFill>
-          <a:ln/>
-        </p:spPr>
-      </p:sp>
-      <p:sp>
-        <p:nvSpPr>
-          <p:cNvPr id="22" name="Text 19"/>
-          <p:cNvSpPr txBox="1"/>
-          <p:nvPr/>
-        </p:nvSpPr>
-        <p:spPr>
-          <a:xfrm>
-            <a:off x="8046720" y="2240280"/>
-            <a:ext cx="3611880" cy="640080"/>
-          </a:xfrm>
-          <a:prstGeom prst="rect">
-            <a:avLst/>
-          </a:prstGeom>
-          <a:noFill/>
-          <a:ln/>
-        </p:spPr>
-        <p:txBody>
-          <a:bodyPr wrap="square" lIns="0" tIns="0" rIns="0" bIns="0" rtlCol="0" anchor="ctr"/>
+          <a:ln w="25400">
+            <a:solidFill>
+              <a:srgbClr val="2A8C8C"/>
+            </a:solidFill>
+            <a:prstDash val="solid"/>
+          </a:ln>
+        </p:spPr>
+      </p:sp>
+      <p:sp>
+        <p:nvSpPr>
+          <p:cNvPr id="24" name="Text 21"/>
+          <p:cNvSpPr txBox="1"/>
+          <p:nvPr/>
+        </p:nvSpPr>
+        <p:spPr>
+          <a:xfrm>
+            <a:off x="8156448" y="4407408"/>
+            <a:ext cx="3383280" cy="1188720"/>
+          </a:xfrm>
+          <a:prstGeom prst="rect">
+            <a:avLst/>
+          </a:prstGeom>
+          <a:noFill/>
+          <a:ln/>
+        </p:spPr>
+        <p:txBody>
+          <a:bodyPr wrap="square" lIns="0" tIns="0" rIns="0" bIns="0" rtlCol="0" anchor="t"/>
+          <a:lstStyle/>
+          <a:p>
+            <a:pPr indent="0" marL="0">
+              <a:buNone/>
+            </a:pPr>
+            <a:r>
+              <a:rPr lang="en-US" sz="1250" dirty="0">
+                <a:solidFill>
+                  <a:srgbClr val="1E2761"/>
+                </a:solidFill>
+                <a:latin typeface="Calibri" pitchFamily="34" charset="0"/>
+                <a:ea typeface="Calibri" pitchFamily="34" charset="-122"/>
+                <a:cs typeface="Calibri" pitchFamily="34" charset="-120"/>
+              </a:rPr>
+              <a:t>• Verse und Strophe
+</a:t>
+            </a:r>
+            <a:pPr indent="0" marL="0">
+              <a:buNone/>
+            </a:pPr>
+            <a:r>
+              <a:rPr lang="en-US" sz="1250" dirty="0">
+                <a:solidFill>
+                  <a:srgbClr val="1E2761"/>
+                </a:solidFill>
+                <a:latin typeface="Calibri" pitchFamily="34" charset="0"/>
+                <a:ea typeface="Calibri" pitchFamily="34" charset="-122"/>
+                <a:cs typeface="Calibri" pitchFamily="34" charset="-120"/>
+              </a:rPr>
+              <a:t>• Reim (Paarreim: schwer – mehr, geschafft – Kraft)
+</a:t>
+            </a:r>
+            <a:pPr indent="0" marL="0">
+              <a:buNone/>
+            </a:pPr>
+            <a:r>
+              <a:rPr lang="en-US" sz="1250" dirty="0">
+                <a:solidFill>
+                  <a:srgbClr val="1E2761"/>
+                </a:solidFill>
+                <a:latin typeface="Calibri" pitchFamily="34" charset="0"/>
+                <a:ea typeface="Calibri" pitchFamily="34" charset="-122"/>
+                <a:cs typeface="Calibri" pitchFamily="34" charset="-120"/>
+              </a:rPr>
+              <a:t>• Rhythmus</a:t>
+            </a:r>
+            <a:endParaRPr lang="en-US" sz="1250" dirty="0"/>
+          </a:p>
+        </p:txBody>
+      </p:sp>
+      <p:sp>
+        <p:nvSpPr>
+          <p:cNvPr id="25" name="Text 22"/>
+          <p:cNvSpPr txBox="1"/>
+          <p:nvPr/>
+        </p:nvSpPr>
+        <p:spPr>
+          <a:xfrm>
+            <a:off x="548640" y="5760720"/>
+            <a:ext cx="11064240" cy="411480"/>
+          </a:xfrm>
+          <a:prstGeom prst="rect">
+            <a:avLst/>
+          </a:prstGeom>
+          <a:noFill/>
+          <a:ln/>
+        </p:spPr>
+        <p:txBody>
+          <a:bodyPr wrap="square" lIns="0" tIns="0" rIns="0" bIns="0" rtlCol="0" anchor="t"/>
           <a:lstStyle/>
           <a:p>
             <a:pPr algn="ctr" indent="0" marL="0">
@@ -8617,139 +9699,9 @@
                 <a:ea typeface="Calibri" pitchFamily="34" charset="-122"/>
                 <a:cs typeface="Calibri" pitchFamily="34" charset="-120"/>
               </a:rPr>
-              <a:t>wie eine Serienszene</a:t>
+              <a:t>Mit Erzähler = Epik · ohne Erzähler = Dramatik · gebundene Form = Lyrik</a:t>
             </a:r>
             <a:endParaRPr lang="en-US" sz="1800" dirty="0"/>
-          </a:p>
-        </p:txBody>
-      </p:sp>
-      <p:sp>
-        <p:nvSpPr>
-          <p:cNvPr id="23" name="Shape 20"/>
-          <p:cNvSpPr/>
-          <p:nvPr/>
-        </p:nvSpPr>
-        <p:spPr>
-          <a:xfrm>
-            <a:off x="8046720" y="3017520"/>
-            <a:ext cx="3611880" cy="2103120"/>
-          </a:xfrm>
-          <a:prstGeom prst="roundRect">
-            <a:avLst>
-              <a:gd name="adj" fmla="val 3478"/>
-            </a:avLst>
-          </a:prstGeom>
-          <a:solidFill>
-            <a:srgbClr val="F4F7FD"/>
-          </a:solidFill>
-          <a:ln/>
-        </p:spPr>
-      </p:sp>
-      <p:sp>
-        <p:nvSpPr>
-          <p:cNvPr id="24" name="Text 21"/>
-          <p:cNvSpPr txBox="1"/>
-          <p:nvPr/>
-        </p:nvSpPr>
-        <p:spPr>
-          <a:xfrm>
-            <a:off x="8229600" y="3154680"/>
-            <a:ext cx="3246120" cy="1874520"/>
-          </a:xfrm>
-          <a:prstGeom prst="rect">
-            <a:avLst/>
-          </a:prstGeom>
-          <a:noFill/>
-          <a:ln/>
-        </p:spPr>
-        <p:txBody>
-          <a:bodyPr wrap="square" lIns="0" tIns="0" rIns="0" bIns="0" rtlCol="0" anchor="t"/>
-          <a:lstStyle/>
-          <a:p>
-            <a:pPr algn="l" indent="0" marL="0">
-              <a:buNone/>
-            </a:pPr>
-            <a:r>
-              <a:rPr lang="en-US" sz="1700" dirty="0">
-                <a:solidFill>
-                  <a:srgbClr val="1E2761"/>
-                </a:solidFill>
-                <a:latin typeface="Calibri" pitchFamily="34" charset="0"/>
-                <a:ea typeface="Calibri" pitchFamily="34" charset="-122"/>
-                <a:cs typeface="Calibri" pitchFamily="34" charset="-120"/>
-              </a:rPr>
-              <a:t>• Figuren sprechen selbst (wörtliche Rede)
-</a:t>
-            </a:r>
-            <a:pPr algn="l" indent="0" marL="0">
-              <a:buNone/>
-            </a:pPr>
-            <a:r>
-              <a:rPr lang="en-US" sz="1700" dirty="0">
-                <a:solidFill>
-                  <a:srgbClr val="1E2761"/>
-                </a:solidFill>
-                <a:latin typeface="Calibri" pitchFamily="34" charset="0"/>
-                <a:ea typeface="Calibri" pitchFamily="34" charset="-122"/>
-                <a:cs typeface="Calibri" pitchFamily="34" charset="-120"/>
-              </a:rPr>
-              <a:t>• Konflikt
-</a:t>
-            </a:r>
-            <a:pPr algn="l" indent="0" marL="0">
-              <a:buNone/>
-            </a:pPr>
-            <a:r>
-              <a:rPr lang="en-US" sz="1700" dirty="0">
-                <a:solidFill>
-                  <a:srgbClr val="1E2761"/>
-                </a:solidFill>
-                <a:latin typeface="Calibri" pitchFamily="34" charset="0"/>
-                <a:ea typeface="Calibri" pitchFamily="34" charset="-122"/>
-                <a:cs typeface="Calibri" pitchFamily="34" charset="-120"/>
-              </a:rPr>
-              <a:t>• Spannung</a:t>
-            </a:r>
-            <a:endParaRPr lang="en-US" sz="1700" dirty="0"/>
-          </a:p>
-        </p:txBody>
-      </p:sp>
-      <p:sp>
-        <p:nvSpPr>
-          <p:cNvPr id="25" name="Text 22"/>
-          <p:cNvSpPr txBox="1"/>
-          <p:nvPr/>
-        </p:nvSpPr>
-        <p:spPr>
-          <a:xfrm>
-            <a:off x="548640" y="5303520"/>
-            <a:ext cx="11064240" cy="457200"/>
-          </a:xfrm>
-          <a:prstGeom prst="rect">
-            <a:avLst/>
-          </a:prstGeom>
-          <a:noFill/>
-          <a:ln/>
-        </p:spPr>
-        <p:txBody>
-          <a:bodyPr wrap="square" lIns="0" tIns="0" rIns="0" bIns="0" rtlCol="0" anchor="t"/>
-          <a:lstStyle/>
-          <a:p>
-            <a:pPr algn="ctr" indent="0" marL="0">
-              <a:buNone/>
-            </a:pPr>
-            <a:r>
-              <a:rPr lang="en-US" sz="2100" b="1" dirty="0">
-                <a:solidFill>
-                  <a:srgbClr val="1E2761"/>
-                </a:solidFill>
-                <a:latin typeface="Calibri" pitchFamily="34" charset="0"/>
-                <a:ea typeface="Calibri" pitchFamily="34" charset="-122"/>
-                <a:cs typeface="Calibri" pitchFamily="34" charset="-120"/>
-              </a:rPr>
-              <a:t>Die Ballade hat alle drei: Sie ist ein „Ur-Ei“.</a:t>
-            </a:r>
-            <a:endParaRPr lang="en-US" sz="2100" dirty="0"/>
           </a:p>
         </p:txBody>
       </p:sp>
@@ -8818,7 +9770,7 @@
                 <a:ea typeface="Calibri" pitchFamily="34" charset="-122"/>
                 <a:cs typeface="Calibri" pitchFamily="34" charset="-120"/>
               </a:rPr>
-              <a:t>VERARBEITEN · SCHNIPSEL</a:t>
+              <a:t>INFORMIEREN · ÜBERTRAGEN AUF PADDY FINGAL</a:t>
             </a:r>
             <a:endParaRPr lang="en-US" sz="1200" dirty="0"/>
           </a:p>
@@ -8857,7 +9809,7 @@
                 <a:ea typeface="Cambria" pitchFamily="34" charset="-122"/>
                 <a:cs typeface="Cambria" pitchFamily="34" charset="-120"/>
               </a:rPr>
-              <a:t>Ü2  Merkmale an Paddy Fingal nachweisen</a:t>
+              <a:t>Und in der Ballade?</a:t>
             </a:r>
             <a:endParaRPr lang="en-US" sz="3200" dirty="0"/>
           </a:p>
@@ -8949,400 +9901,8 @@
         </p:nvSpPr>
         <p:spPr>
           <a:xfrm>
-            <a:off x="548640" y="1600200"/>
-            <a:ext cx="457200" cy="457200"/>
-          </a:xfrm>
-          <a:prstGeom prst="ellipse">
-            <a:avLst/>
-          </a:prstGeom>
-          <a:solidFill>
-            <a:srgbClr val="1E2761"/>
-          </a:solidFill>
-          <a:ln/>
-        </p:spPr>
-      </p:sp>
-      <p:sp>
-        <p:nvSpPr>
-          <p:cNvPr id="8" name="Text 5"/>
-          <p:cNvSpPr txBox="1"/>
-          <p:nvPr/>
-        </p:nvSpPr>
-        <p:spPr>
-          <a:xfrm>
-            <a:off x="548640" y="1600200"/>
-            <a:ext cx="457200" cy="457200"/>
-          </a:xfrm>
-          <a:prstGeom prst="rect">
-            <a:avLst/>
-          </a:prstGeom>
-          <a:noFill/>
-          <a:ln/>
-        </p:spPr>
-        <p:txBody>
-          <a:bodyPr wrap="square" lIns="0" tIns="0" rIns="0" bIns="0" rtlCol="0" anchor="ctr"/>
-          <a:lstStyle/>
-          <a:p>
-            <a:pPr algn="ctr" indent="0" marL="0">
-              <a:buNone/>
-            </a:pPr>
-            <a:r>
-              <a:rPr lang="en-US" sz="1600" b="1" dirty="0">
-                <a:solidFill>
-                  <a:srgbClr val="FFFFFF"/>
-                </a:solidFill>
-                <a:latin typeface="Calibri" pitchFamily="34" charset="0"/>
-                <a:ea typeface="Calibri" pitchFamily="34" charset="-122"/>
-                <a:cs typeface="Calibri" pitchFamily="34" charset="-120"/>
-              </a:rPr>
-              <a:t>1</a:t>
-            </a:r>
-            <a:endParaRPr lang="en-US" sz="1600" dirty="0"/>
-          </a:p>
-        </p:txBody>
-      </p:sp>
-      <p:sp>
-        <p:nvSpPr>
-          <p:cNvPr id="9" name="Text 6"/>
-          <p:cNvSpPr txBox="1"/>
-          <p:nvPr/>
-        </p:nvSpPr>
-        <p:spPr>
-          <a:xfrm>
-            <a:off x="1188720" y="1636776"/>
-            <a:ext cx="10332720" cy="640080"/>
-          </a:xfrm>
-          <a:prstGeom prst="rect">
-            <a:avLst/>
-          </a:prstGeom>
-          <a:noFill/>
-          <a:ln/>
-        </p:spPr>
-        <p:txBody>
-          <a:bodyPr wrap="square" lIns="0" tIns="0" rIns="0" bIns="0" rtlCol="0" anchor="t"/>
-          <a:lstStyle/>
-          <a:p>
-            <a:pPr indent="0" marL="0">
-              <a:buNone/>
-            </a:pPr>
-            <a:r>
-              <a:rPr lang="en-US" sz="2100" b="1" dirty="0">
-                <a:solidFill>
-                  <a:srgbClr val="1E2761"/>
-                </a:solidFill>
-                <a:latin typeface="Calibri" pitchFamily="34" charset="0"/>
-                <a:ea typeface="Calibri" pitchFamily="34" charset="-122"/>
-                <a:cs typeface="Calibri" pitchFamily="34" charset="-120"/>
-              </a:rPr>
-              <a:t>Fülle Nr. 1–3 (Lyrik) aus – das kennst du schon.</a:t>
-            </a:r>
-            <a:endParaRPr lang="en-US" sz="2100" dirty="0"/>
-          </a:p>
-        </p:txBody>
-      </p:sp>
-      <p:sp>
-        <p:nvSpPr>
-          <p:cNvPr id="10" name="Shape 7"/>
-          <p:cNvSpPr/>
-          <p:nvPr/>
-        </p:nvSpPr>
-        <p:spPr>
-          <a:xfrm>
-            <a:off x="548640" y="2331720"/>
-            <a:ext cx="457200" cy="457200"/>
-          </a:xfrm>
-          <a:prstGeom prst="ellipse">
-            <a:avLst/>
-          </a:prstGeom>
-          <a:solidFill>
-            <a:srgbClr val="1E2761"/>
-          </a:solidFill>
-          <a:ln/>
-        </p:spPr>
-      </p:sp>
-      <p:sp>
-        <p:nvSpPr>
-          <p:cNvPr id="11" name="Text 8"/>
-          <p:cNvSpPr txBox="1"/>
-          <p:nvPr/>
-        </p:nvSpPr>
-        <p:spPr>
-          <a:xfrm>
-            <a:off x="548640" y="2331720"/>
-            <a:ext cx="457200" cy="457200"/>
-          </a:xfrm>
-          <a:prstGeom prst="rect">
-            <a:avLst/>
-          </a:prstGeom>
-          <a:noFill/>
-          <a:ln/>
-        </p:spPr>
-        <p:txBody>
-          <a:bodyPr wrap="square" lIns="0" tIns="0" rIns="0" bIns="0" rtlCol="0" anchor="ctr"/>
-          <a:lstStyle/>
-          <a:p>
-            <a:pPr algn="ctr" indent="0" marL="0">
-              <a:buNone/>
-            </a:pPr>
-            <a:r>
-              <a:rPr lang="en-US" sz="1600" b="1" dirty="0">
-                <a:solidFill>
-                  <a:srgbClr val="FFFFFF"/>
-                </a:solidFill>
-                <a:latin typeface="Calibri" pitchFamily="34" charset="0"/>
-                <a:ea typeface="Calibri" pitchFamily="34" charset="-122"/>
-                <a:cs typeface="Calibri" pitchFamily="34" charset="-120"/>
-              </a:rPr>
-              <a:t>2</a:t>
-            </a:r>
-            <a:endParaRPr lang="en-US" sz="1600" dirty="0"/>
-          </a:p>
-        </p:txBody>
-      </p:sp>
-      <p:sp>
-        <p:nvSpPr>
-          <p:cNvPr id="12" name="Text 9"/>
-          <p:cNvSpPr txBox="1"/>
-          <p:nvPr/>
-        </p:nvSpPr>
-        <p:spPr>
-          <a:xfrm>
-            <a:off x="1188720" y="2368296"/>
-            <a:ext cx="10332720" cy="640080"/>
-          </a:xfrm>
-          <a:prstGeom prst="rect">
-            <a:avLst/>
-          </a:prstGeom>
-          <a:noFill/>
-          <a:ln/>
-        </p:spPr>
-        <p:txBody>
-          <a:bodyPr wrap="square" lIns="0" tIns="0" rIns="0" bIns="0" rtlCol="0" anchor="t"/>
-          <a:lstStyle/>
-          <a:p>
-            <a:pPr indent="0" marL="0">
-              <a:buNone/>
-            </a:pPr>
-            <a:r>
-              <a:rPr lang="en-US" sz="2100" b="1" dirty="0">
-                <a:solidFill>
-                  <a:srgbClr val="1E2761"/>
-                </a:solidFill>
-                <a:latin typeface="Calibri" pitchFamily="34" charset="0"/>
-                <a:ea typeface="Calibri" pitchFamily="34" charset="-122"/>
-                <a:cs typeface="Calibri" pitchFamily="34" charset="-120"/>
-              </a:rPr>
-              <a:t>Weise Nr. 4–7 (Epik, Dramatik) an Paddy Fingal nach.</a:t>
-            </a:r>
-            <a:endParaRPr lang="en-US" sz="2100" dirty="0"/>
-          </a:p>
-        </p:txBody>
-      </p:sp>
-      <p:sp>
-        <p:nvSpPr>
-          <p:cNvPr id="13" name="Shape 10"/>
-          <p:cNvSpPr/>
-          <p:nvPr/>
-        </p:nvSpPr>
-        <p:spPr>
-          <a:xfrm>
-            <a:off x="548640" y="3063240"/>
-            <a:ext cx="457200" cy="457200"/>
-          </a:xfrm>
-          <a:prstGeom prst="ellipse">
-            <a:avLst/>
-          </a:prstGeom>
-          <a:solidFill>
-            <a:srgbClr val="1E2761"/>
-          </a:solidFill>
-          <a:ln/>
-        </p:spPr>
-      </p:sp>
-      <p:sp>
-        <p:nvSpPr>
-          <p:cNvPr id="14" name="Text 11"/>
-          <p:cNvSpPr txBox="1"/>
-          <p:nvPr/>
-        </p:nvSpPr>
-        <p:spPr>
-          <a:xfrm>
-            <a:off x="548640" y="3063240"/>
-            <a:ext cx="457200" cy="457200"/>
-          </a:xfrm>
-          <a:prstGeom prst="rect">
-            <a:avLst/>
-          </a:prstGeom>
-          <a:noFill/>
-          <a:ln/>
-        </p:spPr>
-        <p:txBody>
-          <a:bodyPr wrap="square" lIns="0" tIns="0" rIns="0" bIns="0" rtlCol="0" anchor="ctr"/>
-          <a:lstStyle/>
-          <a:p>
-            <a:pPr algn="ctr" indent="0" marL="0">
-              <a:buNone/>
-            </a:pPr>
-            <a:r>
-              <a:rPr lang="en-US" sz="1600" b="1" dirty="0">
-                <a:solidFill>
-                  <a:srgbClr val="FFFFFF"/>
-                </a:solidFill>
-                <a:latin typeface="Calibri" pitchFamily="34" charset="0"/>
-                <a:ea typeface="Calibri" pitchFamily="34" charset="-122"/>
-                <a:cs typeface="Calibri" pitchFamily="34" charset="-120"/>
-              </a:rPr>
-              <a:t>3</a:t>
-            </a:r>
-            <a:endParaRPr lang="en-US" sz="1600" dirty="0"/>
-          </a:p>
-        </p:txBody>
-      </p:sp>
-      <p:sp>
-        <p:nvSpPr>
-          <p:cNvPr id="15" name="Text 12"/>
-          <p:cNvSpPr txBox="1"/>
-          <p:nvPr/>
-        </p:nvSpPr>
-        <p:spPr>
-          <a:xfrm>
-            <a:off x="1188720" y="3099816"/>
-            <a:ext cx="10332720" cy="640080"/>
-          </a:xfrm>
-          <a:prstGeom prst="rect">
-            <a:avLst/>
-          </a:prstGeom>
-          <a:noFill/>
-          <a:ln/>
-        </p:spPr>
-        <p:txBody>
-          <a:bodyPr wrap="square" lIns="0" tIns="0" rIns="0" bIns="0" rtlCol="0" anchor="t"/>
-          <a:lstStyle/>
-          <a:p>
-            <a:pPr indent="0" marL="0">
-              <a:buNone/>
-            </a:pPr>
-            <a:r>
-              <a:rPr lang="en-US" sz="2100" b="1" dirty="0">
-                <a:solidFill>
-                  <a:srgbClr val="1E2761"/>
-                </a:solidFill>
-                <a:latin typeface="Calibri" pitchFamily="34" charset="0"/>
-                <a:ea typeface="Calibri" pitchFamily="34" charset="-122"/>
-                <a:cs typeface="Calibri" pitchFamily="34" charset="-120"/>
-              </a:rPr>
-              <a:t>Notiere bei jedem Merkmal die Strophe.</a:t>
-            </a:r>
-            <a:endParaRPr lang="en-US" sz="2100" dirty="0"/>
-          </a:p>
-        </p:txBody>
-      </p:sp>
-      <p:sp>
-        <p:nvSpPr>
-          <p:cNvPr id="16" name="Shape 13"/>
-          <p:cNvSpPr/>
-          <p:nvPr/>
-        </p:nvSpPr>
-        <p:spPr>
-          <a:xfrm>
-            <a:off x="548640" y="3794760"/>
-            <a:ext cx="457200" cy="457200"/>
-          </a:xfrm>
-          <a:prstGeom prst="ellipse">
-            <a:avLst/>
-          </a:prstGeom>
-          <a:solidFill>
-            <a:srgbClr val="1E2761"/>
-          </a:solidFill>
-          <a:ln/>
-        </p:spPr>
-      </p:sp>
-      <p:sp>
-        <p:nvSpPr>
-          <p:cNvPr id="17" name="Text 14"/>
-          <p:cNvSpPr txBox="1"/>
-          <p:nvPr/>
-        </p:nvSpPr>
-        <p:spPr>
-          <a:xfrm>
-            <a:off x="548640" y="3794760"/>
-            <a:ext cx="457200" cy="457200"/>
-          </a:xfrm>
-          <a:prstGeom prst="rect">
-            <a:avLst/>
-          </a:prstGeom>
-          <a:noFill/>
-          <a:ln/>
-        </p:spPr>
-        <p:txBody>
-          <a:bodyPr wrap="square" lIns="0" tIns="0" rIns="0" bIns="0" rtlCol="0" anchor="ctr"/>
-          <a:lstStyle/>
-          <a:p>
-            <a:pPr algn="ctr" indent="0" marL="0">
-              <a:buNone/>
-            </a:pPr>
-            <a:r>
-              <a:rPr lang="en-US" sz="1600" b="1" dirty="0">
-                <a:solidFill>
-                  <a:srgbClr val="FFFFFF"/>
-                </a:solidFill>
-                <a:latin typeface="Calibri" pitchFamily="34" charset="0"/>
-                <a:ea typeface="Calibri" pitchFamily="34" charset="-122"/>
-                <a:cs typeface="Calibri" pitchFamily="34" charset="-120"/>
-              </a:rPr>
-              <a:t>4</a:t>
-            </a:r>
-            <a:endParaRPr lang="en-US" sz="1600" dirty="0"/>
-          </a:p>
-        </p:txBody>
-      </p:sp>
-      <p:sp>
-        <p:nvSpPr>
-          <p:cNvPr id="18" name="Text 15"/>
-          <p:cNvSpPr txBox="1"/>
-          <p:nvPr/>
-        </p:nvSpPr>
-        <p:spPr>
-          <a:xfrm>
-            <a:off x="1188720" y="3831336"/>
-            <a:ext cx="10332720" cy="640080"/>
-          </a:xfrm>
-          <a:prstGeom prst="rect">
-            <a:avLst/>
-          </a:prstGeom>
-          <a:noFill/>
-          <a:ln/>
-        </p:spPr>
-        <p:txBody>
-          <a:bodyPr wrap="square" lIns="0" tIns="0" rIns="0" bIns="0" rtlCol="0" anchor="t"/>
-          <a:lstStyle/>
-          <a:p>
-            <a:pPr indent="0" marL="0">
-              <a:buNone/>
-            </a:pPr>
-            <a:r>
-              <a:rPr lang="en-US" sz="2100" b="1" dirty="0">
-                <a:solidFill>
-                  <a:srgbClr val="1E2761"/>
-                </a:solidFill>
-                <a:latin typeface="Calibri" pitchFamily="34" charset="0"/>
-                <a:ea typeface="Calibri" pitchFamily="34" charset="-122"/>
-                <a:cs typeface="Calibri" pitchFamily="34" charset="-120"/>
-              </a:rPr>
-              <a:t>Fertig? Dann * Nr. 8.</a:t>
-            </a:r>
-            <a:endParaRPr lang="en-US" sz="2100" dirty="0"/>
-          </a:p>
-        </p:txBody>
-      </p:sp>
-      <p:sp>
-        <p:nvSpPr>
-          <p:cNvPr id="19" name="Shape 16"/>
-          <p:cNvSpPr/>
-          <p:nvPr/>
-        </p:nvSpPr>
-        <p:spPr>
-          <a:xfrm>
-            <a:off x="548640" y="5715000"/>
-            <a:ext cx="11064240" cy="502920"/>
+            <a:off x="548640" y="1463040"/>
+            <a:ext cx="5440680" cy="502920"/>
           </a:xfrm>
           <a:prstGeom prst="roundRect">
             <a:avLst>
@@ -9350,6 +9910,362 @@
             </a:avLst>
           </a:prstGeom>
           <a:solidFill>
+            <a:srgbClr val="7A5BA6"/>
+          </a:solidFill>
+          <a:ln/>
+        </p:spPr>
+      </p:sp>
+      <p:sp>
+        <p:nvSpPr>
+          <p:cNvPr id="8" name="Text 5"/>
+          <p:cNvSpPr txBox="1"/>
+          <p:nvPr/>
+        </p:nvSpPr>
+        <p:spPr>
+          <a:xfrm>
+            <a:off x="548640" y="1463040"/>
+            <a:ext cx="5440680" cy="502920"/>
+          </a:xfrm>
+          <a:prstGeom prst="rect">
+            <a:avLst/>
+          </a:prstGeom>
+          <a:noFill/>
+          <a:ln/>
+        </p:spPr>
+        <p:txBody>
+          <a:bodyPr wrap="square" lIns="0" tIns="0" rIns="0" bIns="0" rtlCol="0" anchor="ctr"/>
+          <a:lstStyle/>
+          <a:p>
+            <a:pPr algn="ctr" indent="0" marL="0">
+              <a:buNone/>
+            </a:pPr>
+            <a:r>
+              <a:rPr lang="en-US" sz="1900" b="1" dirty="0">
+                <a:solidFill>
+                  <a:srgbClr val="FFFFFF"/>
+                </a:solidFill>
+                <a:latin typeface="Calibri" pitchFamily="34" charset="0"/>
+                <a:ea typeface="Calibri" pitchFamily="34" charset="-122"/>
+                <a:cs typeface="Calibri" pitchFamily="34" charset="-120"/>
+              </a:rPr>
+              <a:t>Mit Erzähler (Epik)</a:t>
+            </a:r>
+            <a:endParaRPr lang="en-US" sz="1900" dirty="0"/>
+          </a:p>
+        </p:txBody>
+      </p:sp>
+      <p:sp>
+        <p:nvSpPr>
+          <p:cNvPr id="9" name="Shape 6"/>
+          <p:cNvSpPr/>
+          <p:nvPr/>
+        </p:nvSpPr>
+        <p:spPr>
+          <a:xfrm>
+            <a:off x="548640" y="2057400"/>
+            <a:ext cx="5440680" cy="1737360"/>
+          </a:xfrm>
+          <a:prstGeom prst="roundRect">
+            <a:avLst>
+              <a:gd name="adj" fmla="val 4211"/>
+            </a:avLst>
+          </a:prstGeom>
+          <a:solidFill>
+            <a:srgbClr val="F4F7FD"/>
+          </a:solidFill>
+          <a:ln/>
+        </p:spPr>
+      </p:sp>
+      <p:sp>
+        <p:nvSpPr>
+          <p:cNvPr id="10" name="Text 7"/>
+          <p:cNvSpPr txBox="1"/>
+          <p:nvPr/>
+        </p:nvSpPr>
+        <p:spPr>
+          <a:xfrm>
+            <a:off x="731520" y="2194560"/>
+            <a:ext cx="5074920" cy="1463040"/>
+          </a:xfrm>
+          <a:prstGeom prst="rect">
+            <a:avLst/>
+          </a:prstGeom>
+          <a:noFill/>
+          <a:ln/>
+        </p:spPr>
+        <p:txBody>
+          <a:bodyPr wrap="square" lIns="0" tIns="0" rIns="0" bIns="0" rtlCol="0" anchor="t"/>
+          <a:lstStyle/>
+          <a:p>
+            <a:pPr indent="0" marL="0">
+              <a:buNone/>
+            </a:pPr>
+            <a:r>
+              <a:rPr lang="en-US" sz="1800" dirty="0">
+                <a:solidFill>
+                  <a:srgbClr val="1E2761"/>
+                </a:solidFill>
+                <a:latin typeface="Cambria" pitchFamily="34" charset="0"/>
+                <a:ea typeface="Cambria" pitchFamily="34" charset="-122"/>
+                <a:cs typeface="Cambria" pitchFamily="34" charset="-120"/>
+              </a:rPr>
+              <a:t>Da lief er heim in jähem Schreck:</a:t>
+            </a:r>
+            <a:endParaRPr lang="en-US" sz="1800" dirty="0"/>
+          </a:p>
+          <a:p>
+            <a:pPr indent="0" marL="0">
+              <a:buNone/>
+            </a:pPr>
+            <a:r>
+              <a:rPr lang="en-US" sz="1800" dirty="0">
+                <a:solidFill>
+                  <a:srgbClr val="1E2761"/>
+                </a:solidFill>
+                <a:latin typeface="Cambria" pitchFamily="34" charset="0"/>
+                <a:ea typeface="Cambria" pitchFamily="34" charset="-122"/>
+                <a:cs typeface="Cambria" pitchFamily="34" charset="-120"/>
+              </a:rPr>
+              <a:t>„O Schaya, birg mich im Versteck! …“</a:t>
+            </a:r>
+            <a:endParaRPr lang="en-US" sz="1800" dirty="0"/>
+          </a:p>
+        </p:txBody>
+      </p:sp>
+      <p:sp>
+        <p:nvSpPr>
+          <p:cNvPr id="11" name="Text 8"/>
+          <p:cNvSpPr txBox="1"/>
+          <p:nvPr/>
+        </p:nvSpPr>
+        <p:spPr>
+          <a:xfrm>
+            <a:off x="548640" y="3886200"/>
+            <a:ext cx="5440680" cy="457200"/>
+          </a:xfrm>
+          <a:prstGeom prst="rect">
+            <a:avLst/>
+          </a:prstGeom>
+          <a:noFill/>
+          <a:ln/>
+        </p:spPr>
+        <p:txBody>
+          <a:bodyPr wrap="square" lIns="0" tIns="0" rIns="0" bIns="0" rtlCol="0" anchor="t"/>
+          <a:lstStyle/>
+          <a:p>
+            <a:pPr algn="ctr" indent="0" marL="0">
+              <a:buNone/>
+            </a:pPr>
+            <a:r>
+              <a:rPr lang="en-US" sz="1500" i="1" dirty="0">
+                <a:solidFill>
+                  <a:srgbClr val="5B6B8C"/>
+                </a:solidFill>
+                <a:latin typeface="Calibri" pitchFamily="34" charset="0"/>
+                <a:ea typeface="Calibri" pitchFamily="34" charset="-122"/>
+                <a:cs typeface="Calibri" pitchFamily="34" charset="-120"/>
+              </a:rPr>
+              <a:t>Str. 4, V. 16–17 – der Erzähler leitet Paddys Rede ein</a:t>
+            </a:r>
+            <a:endParaRPr lang="en-US" sz="1500" dirty="0"/>
+          </a:p>
+        </p:txBody>
+      </p:sp>
+      <p:sp>
+        <p:nvSpPr>
+          <p:cNvPr id="12" name="Shape 9"/>
+          <p:cNvSpPr/>
+          <p:nvPr/>
+        </p:nvSpPr>
+        <p:spPr>
+          <a:xfrm>
+            <a:off x="6172200" y="1463040"/>
+            <a:ext cx="5440680" cy="502920"/>
+          </a:xfrm>
+          <a:prstGeom prst="roundRect">
+            <a:avLst>
+              <a:gd name="adj" fmla="val 14545"/>
+            </a:avLst>
+          </a:prstGeom>
+          <a:solidFill>
+            <a:srgbClr val="C77C12"/>
+          </a:solidFill>
+          <a:ln/>
+        </p:spPr>
+      </p:sp>
+      <p:sp>
+        <p:nvSpPr>
+          <p:cNvPr id="13" name="Text 10"/>
+          <p:cNvSpPr txBox="1"/>
+          <p:nvPr/>
+        </p:nvSpPr>
+        <p:spPr>
+          <a:xfrm>
+            <a:off x="6172200" y="1463040"/>
+            <a:ext cx="5440680" cy="502920"/>
+          </a:xfrm>
+          <a:prstGeom prst="rect">
+            <a:avLst/>
+          </a:prstGeom>
+          <a:noFill/>
+          <a:ln/>
+        </p:spPr>
+        <p:txBody>
+          <a:bodyPr wrap="square" lIns="0" tIns="0" rIns="0" bIns="0" rtlCol="0" anchor="ctr"/>
+          <a:lstStyle/>
+          <a:p>
+            <a:pPr algn="ctr" indent="0" marL="0">
+              <a:buNone/>
+            </a:pPr>
+            <a:r>
+              <a:rPr lang="en-US" sz="1900" b="1" dirty="0">
+                <a:solidFill>
+                  <a:srgbClr val="FFFFFF"/>
+                </a:solidFill>
+                <a:latin typeface="Calibri" pitchFamily="34" charset="0"/>
+                <a:ea typeface="Calibri" pitchFamily="34" charset="-122"/>
+                <a:cs typeface="Calibri" pitchFamily="34" charset="-120"/>
+              </a:rPr>
+              <a:t>Ohne Erzähler (Dramatik)</a:t>
+            </a:r>
+            <a:endParaRPr lang="en-US" sz="1900" dirty="0"/>
+          </a:p>
+        </p:txBody>
+      </p:sp>
+      <p:sp>
+        <p:nvSpPr>
+          <p:cNvPr id="14" name="Shape 11"/>
+          <p:cNvSpPr/>
+          <p:nvPr/>
+        </p:nvSpPr>
+        <p:spPr>
+          <a:xfrm>
+            <a:off x="6172200" y="2057400"/>
+            <a:ext cx="5440680" cy="1737360"/>
+          </a:xfrm>
+          <a:prstGeom prst="roundRect">
+            <a:avLst>
+              <a:gd name="adj" fmla="val 4211"/>
+            </a:avLst>
+          </a:prstGeom>
+          <a:solidFill>
+            <a:srgbClr val="F4F7FD"/>
+          </a:solidFill>
+          <a:ln/>
+        </p:spPr>
+      </p:sp>
+      <p:sp>
+        <p:nvSpPr>
+          <p:cNvPr id="15" name="Text 12"/>
+          <p:cNvSpPr txBox="1"/>
+          <p:nvPr/>
+        </p:nvSpPr>
+        <p:spPr>
+          <a:xfrm>
+            <a:off x="6355080" y="2194560"/>
+            <a:ext cx="5074920" cy="1463040"/>
+          </a:xfrm>
+          <a:prstGeom prst="rect">
+            <a:avLst/>
+          </a:prstGeom>
+          <a:noFill/>
+          <a:ln/>
+        </p:spPr>
+        <p:txBody>
+          <a:bodyPr wrap="square" lIns="0" tIns="0" rIns="0" bIns="0" rtlCol="0" anchor="t"/>
+          <a:lstStyle/>
+          <a:p>
+            <a:pPr indent="0" marL="0">
+              <a:buNone/>
+            </a:pPr>
+            <a:r>
+              <a:rPr lang="en-US" sz="1800" dirty="0">
+                <a:solidFill>
+                  <a:srgbClr val="1E2761"/>
+                </a:solidFill>
+                <a:latin typeface="Cambria" pitchFamily="34" charset="0"/>
+                <a:ea typeface="Cambria" pitchFamily="34" charset="-122"/>
+                <a:cs typeface="Cambria" pitchFamily="34" charset="-120"/>
+              </a:rPr>
+              <a:t>„Tut leise, Fremder, und tretet sacht,</a:t>
+            </a:r>
+            <a:endParaRPr lang="en-US" sz="1800" dirty="0"/>
+          </a:p>
+          <a:p>
+            <a:pPr indent="0" marL="0">
+              <a:buNone/>
+            </a:pPr>
+            <a:r>
+              <a:rPr lang="en-US" sz="1800" dirty="0">
+                <a:solidFill>
+                  <a:srgbClr val="1E2761"/>
+                </a:solidFill>
+                <a:latin typeface="Cambria" pitchFamily="34" charset="0"/>
+                <a:ea typeface="Cambria" pitchFamily="34" charset="-122"/>
+                <a:cs typeface="Cambria" pitchFamily="34" charset="-120"/>
+              </a:rPr>
+              <a:t>dass Paddys Kindlein nicht erwacht! …“</a:t>
+            </a:r>
+            <a:endParaRPr lang="en-US" sz="1800" dirty="0"/>
+          </a:p>
+        </p:txBody>
+      </p:sp>
+      <p:sp>
+        <p:nvSpPr>
+          <p:cNvPr id="16" name="Text 13"/>
+          <p:cNvSpPr txBox="1"/>
+          <p:nvPr/>
+        </p:nvSpPr>
+        <p:spPr>
+          <a:xfrm>
+            <a:off x="6172200" y="3886200"/>
+            <a:ext cx="5440680" cy="457200"/>
+          </a:xfrm>
+          <a:prstGeom prst="rect">
+            <a:avLst/>
+          </a:prstGeom>
+          <a:noFill/>
+          <a:ln/>
+        </p:spPr>
+        <p:txBody>
+          <a:bodyPr wrap="square" lIns="0" tIns="0" rIns="0" bIns="0" rtlCol="0" anchor="t"/>
+          <a:lstStyle/>
+          <a:p>
+            <a:pPr algn="ctr" indent="0" marL="0">
+              <a:buNone/>
+            </a:pPr>
+            <a:r>
+              <a:rPr lang="en-US" sz="1500" i="1" dirty="0">
+                <a:solidFill>
+                  <a:srgbClr val="5B6B8C"/>
+                </a:solidFill>
+                <a:latin typeface="Calibri" pitchFamily="34" charset="0"/>
+                <a:ea typeface="Calibri" pitchFamily="34" charset="-122"/>
+                <a:cs typeface="Calibri" pitchFamily="34" charset="-120"/>
+              </a:rPr>
+              <a:t>Str. 7 – die ganze Strophe ist Schayas Rede, kein Erzähler</a:t>
+            </a:r>
+            <a:endParaRPr lang="en-US" sz="1500" dirty="0"/>
+          </a:p>
+        </p:txBody>
+      </p:sp>
+      <p:sp>
+        <p:nvSpPr>
+          <p:cNvPr id="17" name="Shape 14"/>
+          <p:cNvSpPr/>
+          <p:nvPr/>
+        </p:nvSpPr>
+        <p:spPr>
+          <a:xfrm>
+            <a:off x="548640" y="4572000"/>
+            <a:ext cx="11064240" cy="822960"/>
+          </a:xfrm>
+          <a:prstGeom prst="roundRect">
+            <a:avLst>
+              <a:gd name="adj" fmla="val 8889"/>
+            </a:avLst>
+          </a:prstGeom>
+          <a:solidFill>
             <a:srgbClr val="EAF0FA"/>
           </a:solidFill>
           <a:ln/>
@@ -9357,30 +10273,44 @@
       </p:sp>
       <p:sp>
         <p:nvSpPr>
-          <p:cNvPr id="20" name="Text 17"/>
-          <p:cNvSpPr txBox="1"/>
-          <p:nvPr/>
-        </p:nvSpPr>
-        <p:spPr>
-          <a:xfrm>
-            <a:off x="777240" y="5788152"/>
-            <a:ext cx="10698480" cy="365760"/>
-          </a:xfrm>
-          <a:prstGeom prst="rect">
-            <a:avLst/>
-          </a:prstGeom>
-          <a:noFill/>
-          <a:ln/>
-        </p:spPr>
-        <p:txBody>
-          <a:bodyPr wrap="square" lIns="0" tIns="0" rIns="0" bIns="0" rtlCol="0" anchor="t"/>
-          <a:lstStyle/>
-          <a:p>
-            <a:pPr indent="0" marL="0">
-              <a:buNone/>
-            </a:pPr>
-            <a:r>
-              <a:rPr lang="en-US" sz="1600" b="1" dirty="0">
+          <p:cNvPr id="18" name="Text 15"/>
+          <p:cNvSpPr txBox="1"/>
+          <p:nvPr/>
+        </p:nvSpPr>
+        <p:spPr>
+          <a:xfrm>
+            <a:off x="822960" y="4754880"/>
+            <a:ext cx="10607040" cy="457200"/>
+          </a:xfrm>
+          <a:prstGeom prst="rect">
+            <a:avLst/>
+          </a:prstGeom>
+          <a:noFill/>
+          <a:ln/>
+        </p:spPr>
+        <p:txBody>
+          <a:bodyPr wrap="square" lIns="0" tIns="0" rIns="0" bIns="0" rtlCol="0" anchor="t"/>
+          <a:lstStyle/>
+          <a:p>
+            <a:pPr indent="0" marL="0">
+              <a:buNone/>
+            </a:pPr>
+            <a:r>
+              <a:rPr lang="en-US" sz="1900" b="1" dirty="0">
+                <a:solidFill>
+                  <a:srgbClr val="2A8C8C"/>
+                </a:solidFill>
+                <a:latin typeface="Calibri" pitchFamily="34" charset="0"/>
+                <a:ea typeface="Calibri" pitchFamily="34" charset="-122"/>
+                <a:cs typeface="Calibri" pitchFamily="34" charset="-120"/>
+              </a:rPr>
+              <a:t>Und alles in Versen mit Reim: </a:t>
+            </a:r>
+            <a:pPr indent="0" marL="0">
+              <a:buNone/>
+            </a:pPr>
+            <a:r>
+              <a:rPr lang="en-US" sz="1900" dirty="0">
                 <a:solidFill>
                   <a:srgbClr val="1E2761"/>
                 </a:solidFill>
@@ -9388,37 +10318,9 @@
                 <a:ea typeface="Calibri" pitchFamily="34" charset="-122"/>
                 <a:cs typeface="Calibri" pitchFamily="34" charset="-120"/>
               </a:rPr>
-              <a:t>Zeit: </a:t>
-            </a:r>
-            <a:pPr indent="0" marL="0">
-              <a:buNone/>
-            </a:pPr>
-            <a:r>
-              <a:rPr lang="en-US" sz="1600" dirty="0">
-                <a:solidFill>
-                  <a:srgbClr val="1E2761"/>
-                </a:solidFill>
-                <a:latin typeface="Calibri" pitchFamily="34" charset="0"/>
-                <a:ea typeface="Calibri" pitchFamily="34" charset="-122"/>
-                <a:cs typeface="Calibri" pitchFamily="34" charset="-120"/>
-              </a:rPr>
-              <a:t>12 Minuten · allein      </a:t>
-            </a:r>
-            <a:pPr indent="0" marL="0">
-              <a:buNone/>
-            </a:pPr>
-            <a:r>
-              <a:rPr lang="en-US" sz="1600" i="1" dirty="0">
-                <a:solidFill>
-                  <a:srgbClr val="5B6B8C"/>
-                </a:solidFill>
-                <a:latin typeface="Calibri" pitchFamily="34" charset="0"/>
-                <a:ea typeface="Calibri" pitchFamily="34" charset="-122"/>
-                <a:cs typeface="Calibri" pitchFamily="34" charset="-120"/>
-              </a:rPr>
-              <a:t>Fertig? Stift hinlegen.</a:t>
-            </a:r>
-            <a:endParaRPr lang="en-US" sz="1600" dirty="0"/>
+              <a:t>Lyrik. Die Ballade verbindet alle drei – ein „Ur-Ei“.</a:t>
+            </a:r>
+            <a:endParaRPr lang="en-US" sz="1900" dirty="0"/>
           </a:p>
         </p:txBody>
       </p:sp>
@@ -9487,7 +10389,7 @@
                 <a:ea typeface="Calibri" pitchFamily="34" charset="-122"/>
                 <a:cs typeface="Calibri" pitchFamily="34" charset="-120"/>
               </a:rPr>
-              <a:t>AUSWERTEN · Ü2 GEMEINSAM PRÜFEN</a:t>
+              <a:t>VERARBEITEN · SCHNIPSEL</a:t>
             </a:r>
             <a:endParaRPr lang="en-US" sz="1200" dirty="0"/>
           </a:p>
@@ -9526,7 +10428,7 @@
                 <a:ea typeface="Cambria" pitchFamily="34" charset="-122"/>
                 <a:cs typeface="Cambria" pitchFamily="34" charset="-120"/>
               </a:rPr>
-              <a:t>Ü2  Lösung – Lyrik – wie ein Gedicht</a:t>
+              <a:t>Ü2  Merkmale an Paddy Fingal nachweisen</a:t>
             </a:r>
             <a:endParaRPr lang="en-US" sz="3200" dirty="0"/>
           </a:p>
@@ -9618,107 +10520,438 @@
         </p:nvSpPr>
         <p:spPr>
           <a:xfrm>
-            <a:off x="548640" y="1417320"/>
-            <a:ext cx="11064240" cy="109728"/>
+            <a:off x="548640" y="1600200"/>
+            <a:ext cx="457200" cy="457200"/>
+          </a:xfrm>
+          <a:prstGeom prst="ellipse">
+            <a:avLst/>
+          </a:prstGeom>
+          <a:solidFill>
+            <a:srgbClr val="1E2761"/>
+          </a:solidFill>
+          <a:ln/>
+        </p:spPr>
+      </p:sp>
+      <p:sp>
+        <p:nvSpPr>
+          <p:cNvPr id="8" name="Text 5"/>
+          <p:cNvSpPr txBox="1"/>
+          <p:nvPr/>
+        </p:nvSpPr>
+        <p:spPr>
+          <a:xfrm>
+            <a:off x="548640" y="1600200"/>
+            <a:ext cx="457200" cy="457200"/>
+          </a:xfrm>
+          <a:prstGeom prst="rect">
+            <a:avLst/>
+          </a:prstGeom>
+          <a:noFill/>
+          <a:ln/>
+        </p:spPr>
+        <p:txBody>
+          <a:bodyPr wrap="square" lIns="0" tIns="0" rIns="0" bIns="0" rtlCol="0" anchor="ctr"/>
+          <a:lstStyle/>
+          <a:p>
+            <a:pPr algn="ctr" indent="0" marL="0">
+              <a:buNone/>
+            </a:pPr>
+            <a:r>
+              <a:rPr lang="en-US" sz="1600" b="1" dirty="0">
+                <a:solidFill>
+                  <a:srgbClr val="FFFFFF"/>
+                </a:solidFill>
+                <a:latin typeface="Calibri" pitchFamily="34" charset="0"/>
+                <a:ea typeface="Calibri" pitchFamily="34" charset="-122"/>
+                <a:cs typeface="Calibri" pitchFamily="34" charset="-120"/>
+              </a:rPr>
+              <a:t>1</a:t>
+            </a:r>
+            <a:endParaRPr lang="en-US" sz="1600" dirty="0"/>
+          </a:p>
+        </p:txBody>
+      </p:sp>
+      <p:sp>
+        <p:nvSpPr>
+          <p:cNvPr id="9" name="Text 6"/>
+          <p:cNvSpPr txBox="1"/>
+          <p:nvPr/>
+        </p:nvSpPr>
+        <p:spPr>
+          <a:xfrm>
+            <a:off x="1188720" y="1636776"/>
+            <a:ext cx="10332720" cy="640080"/>
+          </a:xfrm>
+          <a:prstGeom prst="rect">
+            <a:avLst/>
+          </a:prstGeom>
+          <a:noFill/>
+          <a:ln/>
+        </p:spPr>
+        <p:txBody>
+          <a:bodyPr wrap="square" lIns="0" tIns="0" rIns="0" bIns="0" rtlCol="0" anchor="t"/>
+          <a:lstStyle/>
+          <a:p>
+            <a:pPr indent="0" marL="0">
+              <a:buNone/>
+            </a:pPr>
+            <a:r>
+              <a:rPr lang="en-US" sz="2100" b="1" dirty="0">
+                <a:solidFill>
+                  <a:srgbClr val="1E2761"/>
+                </a:solidFill>
+                <a:latin typeface="Calibri" pitchFamily="34" charset="0"/>
+                <a:ea typeface="Calibri" pitchFamily="34" charset="-122"/>
+                <a:cs typeface="Calibri" pitchFamily="34" charset="-120"/>
+              </a:rPr>
+              <a:t>Fülle Nr. 1–3 (Lyrik) aus – das kennst du schon.</a:t>
+            </a:r>
+            <a:endParaRPr lang="en-US" sz="2100" dirty="0"/>
+          </a:p>
+        </p:txBody>
+      </p:sp>
+      <p:sp>
+        <p:nvSpPr>
+          <p:cNvPr id="10" name="Shape 7"/>
+          <p:cNvSpPr/>
+          <p:nvPr/>
+        </p:nvSpPr>
+        <p:spPr>
+          <a:xfrm>
+            <a:off x="548640" y="2331720"/>
+            <a:ext cx="457200" cy="457200"/>
+          </a:xfrm>
+          <a:prstGeom prst="ellipse">
+            <a:avLst/>
+          </a:prstGeom>
+          <a:solidFill>
+            <a:srgbClr val="1E2761"/>
+          </a:solidFill>
+          <a:ln/>
+        </p:spPr>
+      </p:sp>
+      <p:sp>
+        <p:nvSpPr>
+          <p:cNvPr id="11" name="Text 8"/>
+          <p:cNvSpPr txBox="1"/>
+          <p:nvPr/>
+        </p:nvSpPr>
+        <p:spPr>
+          <a:xfrm>
+            <a:off x="548640" y="2331720"/>
+            <a:ext cx="457200" cy="457200"/>
+          </a:xfrm>
+          <a:prstGeom prst="rect">
+            <a:avLst/>
+          </a:prstGeom>
+          <a:noFill/>
+          <a:ln/>
+        </p:spPr>
+        <p:txBody>
+          <a:bodyPr wrap="square" lIns="0" tIns="0" rIns="0" bIns="0" rtlCol="0" anchor="ctr"/>
+          <a:lstStyle/>
+          <a:p>
+            <a:pPr algn="ctr" indent="0" marL="0">
+              <a:buNone/>
+            </a:pPr>
+            <a:r>
+              <a:rPr lang="en-US" sz="1600" b="1" dirty="0">
+                <a:solidFill>
+                  <a:srgbClr val="FFFFFF"/>
+                </a:solidFill>
+                <a:latin typeface="Calibri" pitchFamily="34" charset="0"/>
+                <a:ea typeface="Calibri" pitchFamily="34" charset="-122"/>
+                <a:cs typeface="Calibri" pitchFamily="34" charset="-120"/>
+              </a:rPr>
+              <a:t>2</a:t>
+            </a:r>
+            <a:endParaRPr lang="en-US" sz="1600" dirty="0"/>
+          </a:p>
+        </p:txBody>
+      </p:sp>
+      <p:sp>
+        <p:nvSpPr>
+          <p:cNvPr id="12" name="Text 9"/>
+          <p:cNvSpPr txBox="1"/>
+          <p:nvPr/>
+        </p:nvSpPr>
+        <p:spPr>
+          <a:xfrm>
+            <a:off x="1188720" y="2368296"/>
+            <a:ext cx="10332720" cy="640080"/>
+          </a:xfrm>
+          <a:prstGeom prst="rect">
+            <a:avLst/>
+          </a:prstGeom>
+          <a:noFill/>
+          <a:ln/>
+        </p:spPr>
+        <p:txBody>
+          <a:bodyPr wrap="square" lIns="0" tIns="0" rIns="0" bIns="0" rtlCol="0" anchor="t"/>
+          <a:lstStyle/>
+          <a:p>
+            <a:pPr indent="0" marL="0">
+              <a:buNone/>
+            </a:pPr>
+            <a:r>
+              <a:rPr lang="en-US" sz="2100" b="1" dirty="0">
+                <a:solidFill>
+                  <a:srgbClr val="1E2761"/>
+                </a:solidFill>
+                <a:latin typeface="Calibri" pitchFamily="34" charset="0"/>
+                <a:ea typeface="Calibri" pitchFamily="34" charset="-122"/>
+                <a:cs typeface="Calibri" pitchFamily="34" charset="-120"/>
+              </a:rPr>
+              <a:t>Weise Nr. 4–7 (Epik, Dramatik) an Paddy Fingal nach.</a:t>
+            </a:r>
+            <a:endParaRPr lang="en-US" sz="2100" dirty="0"/>
+          </a:p>
+        </p:txBody>
+      </p:sp>
+      <p:sp>
+        <p:nvSpPr>
+          <p:cNvPr id="13" name="Shape 10"/>
+          <p:cNvSpPr/>
+          <p:nvPr/>
+        </p:nvSpPr>
+        <p:spPr>
+          <a:xfrm>
+            <a:off x="548640" y="3063240"/>
+            <a:ext cx="457200" cy="457200"/>
+          </a:xfrm>
+          <a:prstGeom prst="ellipse">
+            <a:avLst/>
+          </a:prstGeom>
+          <a:solidFill>
+            <a:srgbClr val="1E2761"/>
+          </a:solidFill>
+          <a:ln/>
+        </p:spPr>
+      </p:sp>
+      <p:sp>
+        <p:nvSpPr>
+          <p:cNvPr id="14" name="Text 11"/>
+          <p:cNvSpPr txBox="1"/>
+          <p:nvPr/>
+        </p:nvSpPr>
+        <p:spPr>
+          <a:xfrm>
+            <a:off x="548640" y="3063240"/>
+            <a:ext cx="457200" cy="457200"/>
+          </a:xfrm>
+          <a:prstGeom prst="rect">
+            <a:avLst/>
+          </a:prstGeom>
+          <a:noFill/>
+          <a:ln/>
+        </p:spPr>
+        <p:txBody>
+          <a:bodyPr wrap="square" lIns="0" tIns="0" rIns="0" bIns="0" rtlCol="0" anchor="ctr"/>
+          <a:lstStyle/>
+          <a:p>
+            <a:pPr algn="ctr" indent="0" marL="0">
+              <a:buNone/>
+            </a:pPr>
+            <a:r>
+              <a:rPr lang="en-US" sz="1600" b="1" dirty="0">
+                <a:solidFill>
+                  <a:srgbClr val="FFFFFF"/>
+                </a:solidFill>
+                <a:latin typeface="Calibri" pitchFamily="34" charset="0"/>
+                <a:ea typeface="Calibri" pitchFamily="34" charset="-122"/>
+                <a:cs typeface="Calibri" pitchFamily="34" charset="-120"/>
+              </a:rPr>
+              <a:t>3</a:t>
+            </a:r>
+            <a:endParaRPr lang="en-US" sz="1600" dirty="0"/>
+          </a:p>
+        </p:txBody>
+      </p:sp>
+      <p:sp>
+        <p:nvSpPr>
+          <p:cNvPr id="15" name="Text 12"/>
+          <p:cNvSpPr txBox="1"/>
+          <p:nvPr/>
+        </p:nvSpPr>
+        <p:spPr>
+          <a:xfrm>
+            <a:off x="1188720" y="3099816"/>
+            <a:ext cx="10332720" cy="640080"/>
+          </a:xfrm>
+          <a:prstGeom prst="rect">
+            <a:avLst/>
+          </a:prstGeom>
+          <a:noFill/>
+          <a:ln/>
+        </p:spPr>
+        <p:txBody>
+          <a:bodyPr wrap="square" lIns="0" tIns="0" rIns="0" bIns="0" rtlCol="0" anchor="t"/>
+          <a:lstStyle/>
+          <a:p>
+            <a:pPr indent="0" marL="0">
+              <a:buNone/>
+            </a:pPr>
+            <a:r>
+              <a:rPr lang="en-US" sz="2100" b="1" dirty="0">
+                <a:solidFill>
+                  <a:srgbClr val="1E2761"/>
+                </a:solidFill>
+                <a:latin typeface="Calibri" pitchFamily="34" charset="0"/>
+                <a:ea typeface="Calibri" pitchFamily="34" charset="-122"/>
+                <a:cs typeface="Calibri" pitchFamily="34" charset="-120"/>
+              </a:rPr>
+              <a:t>Notiere bei jedem Merkmal die Strophe.</a:t>
+            </a:r>
+            <a:endParaRPr lang="en-US" sz="2100" dirty="0"/>
+          </a:p>
+        </p:txBody>
+      </p:sp>
+      <p:sp>
+        <p:nvSpPr>
+          <p:cNvPr id="16" name="Shape 13"/>
+          <p:cNvSpPr/>
+          <p:nvPr/>
+        </p:nvSpPr>
+        <p:spPr>
+          <a:xfrm>
+            <a:off x="548640" y="3794760"/>
+            <a:ext cx="457200" cy="457200"/>
+          </a:xfrm>
+          <a:prstGeom prst="ellipse">
+            <a:avLst/>
+          </a:prstGeom>
+          <a:solidFill>
+            <a:srgbClr val="1E2761"/>
+          </a:solidFill>
+          <a:ln/>
+        </p:spPr>
+      </p:sp>
+      <p:sp>
+        <p:nvSpPr>
+          <p:cNvPr id="17" name="Text 14"/>
+          <p:cNvSpPr txBox="1"/>
+          <p:nvPr/>
+        </p:nvSpPr>
+        <p:spPr>
+          <a:xfrm>
+            <a:off x="548640" y="3794760"/>
+            <a:ext cx="457200" cy="457200"/>
+          </a:xfrm>
+          <a:prstGeom prst="rect">
+            <a:avLst/>
+          </a:prstGeom>
+          <a:noFill/>
+          <a:ln/>
+        </p:spPr>
+        <p:txBody>
+          <a:bodyPr wrap="square" lIns="0" tIns="0" rIns="0" bIns="0" rtlCol="0" anchor="ctr"/>
+          <a:lstStyle/>
+          <a:p>
+            <a:pPr algn="ctr" indent="0" marL="0">
+              <a:buNone/>
+            </a:pPr>
+            <a:r>
+              <a:rPr lang="en-US" sz="1600" b="1" dirty="0">
+                <a:solidFill>
+                  <a:srgbClr val="FFFFFF"/>
+                </a:solidFill>
+                <a:latin typeface="Calibri" pitchFamily="34" charset="0"/>
+                <a:ea typeface="Calibri" pitchFamily="34" charset="-122"/>
+                <a:cs typeface="Calibri" pitchFamily="34" charset="-120"/>
+              </a:rPr>
+              <a:t>4</a:t>
+            </a:r>
+            <a:endParaRPr lang="en-US" sz="1600" dirty="0"/>
+          </a:p>
+        </p:txBody>
+      </p:sp>
+      <p:sp>
+        <p:nvSpPr>
+          <p:cNvPr id="18" name="Text 15"/>
+          <p:cNvSpPr txBox="1"/>
+          <p:nvPr/>
+        </p:nvSpPr>
+        <p:spPr>
+          <a:xfrm>
+            <a:off x="1188720" y="3831336"/>
+            <a:ext cx="10332720" cy="640080"/>
+          </a:xfrm>
+          <a:prstGeom prst="rect">
+            <a:avLst/>
+          </a:prstGeom>
+          <a:noFill/>
+          <a:ln/>
+        </p:spPr>
+        <p:txBody>
+          <a:bodyPr wrap="square" lIns="0" tIns="0" rIns="0" bIns="0" rtlCol="0" anchor="t"/>
+          <a:lstStyle/>
+          <a:p>
+            <a:pPr indent="0" marL="0">
+              <a:buNone/>
+            </a:pPr>
+            <a:r>
+              <a:rPr lang="en-US" sz="2100" b="1" dirty="0">
+                <a:solidFill>
+                  <a:srgbClr val="1E2761"/>
+                </a:solidFill>
+                <a:latin typeface="Calibri" pitchFamily="34" charset="0"/>
+                <a:ea typeface="Calibri" pitchFamily="34" charset="-122"/>
+                <a:cs typeface="Calibri" pitchFamily="34" charset="-120"/>
+              </a:rPr>
+              <a:t>Fertig? Dann * Nr. 8.</a:t>
+            </a:r>
+            <a:endParaRPr lang="en-US" sz="2100" dirty="0"/>
+          </a:p>
+        </p:txBody>
+      </p:sp>
+      <p:sp>
+        <p:nvSpPr>
+          <p:cNvPr id="19" name="Shape 16"/>
+          <p:cNvSpPr/>
+          <p:nvPr/>
+        </p:nvSpPr>
+        <p:spPr>
+          <a:xfrm>
+            <a:off x="548640" y="5715000"/>
+            <a:ext cx="11064240" cy="502920"/>
           </a:xfrm>
           <a:prstGeom prst="roundRect">
             <a:avLst>
-              <a:gd name="adj" fmla="val 66667"/>
+              <a:gd name="adj" fmla="val 14545"/>
             </a:avLst>
           </a:prstGeom>
           <a:solidFill>
-            <a:srgbClr val="2A8C8C"/>
+            <a:srgbClr val="EAF0FA"/>
           </a:solidFill>
           <a:ln/>
         </p:spPr>
       </p:sp>
       <p:sp>
         <p:nvSpPr>
-          <p:cNvPr id="8" name="Shape 5"/>
-          <p:cNvSpPr/>
-          <p:nvPr/>
-        </p:nvSpPr>
-        <p:spPr>
-          <a:xfrm>
-            <a:off x="548640" y="1737360"/>
-            <a:ext cx="11064240" cy="914400"/>
-          </a:xfrm>
-          <a:prstGeom prst="roundRect">
-            <a:avLst>
-              <a:gd name="adj" fmla="val 8000"/>
-            </a:avLst>
-          </a:prstGeom>
-          <a:solidFill>
-            <a:srgbClr val="F4F7FD"/>
-          </a:solidFill>
-          <a:ln/>
-        </p:spPr>
-      </p:sp>
-      <p:sp>
-        <p:nvSpPr>
-          <p:cNvPr id="9" name="Text 6"/>
-          <p:cNvSpPr txBox="1"/>
-          <p:nvPr/>
-        </p:nvSpPr>
-        <p:spPr>
-          <a:xfrm>
-            <a:off x="731520" y="1965960"/>
-            <a:ext cx="731520" cy="457200"/>
-          </a:xfrm>
-          <a:prstGeom prst="rect">
-            <a:avLst/>
-          </a:prstGeom>
-          <a:noFill/>
-          <a:ln/>
-        </p:spPr>
-        <p:txBody>
-          <a:bodyPr wrap="square" lIns="0" tIns="0" rIns="0" bIns="0" rtlCol="0" anchor="t"/>
-          <a:lstStyle/>
-          <a:p>
-            <a:pPr indent="0" marL="0">
-              <a:buNone/>
-            </a:pPr>
-            <a:r>
-              <a:rPr lang="en-US" sz="2200" b="1" dirty="0">
-                <a:solidFill>
-                  <a:srgbClr val="2A8C8C"/>
-                </a:solidFill>
-                <a:latin typeface="Calibri" pitchFamily="34" charset="0"/>
-                <a:ea typeface="Calibri" pitchFamily="34" charset="-122"/>
-                <a:cs typeface="Calibri" pitchFamily="34" charset="-120"/>
-              </a:rPr>
-              <a:t>1</a:t>
-            </a:r>
-            <a:endParaRPr lang="en-US" sz="2200" dirty="0"/>
-          </a:p>
-        </p:txBody>
-      </p:sp>
-      <p:sp>
-        <p:nvSpPr>
-          <p:cNvPr id="10" name="Text 7"/>
-          <p:cNvSpPr txBox="1"/>
-          <p:nvPr/>
-        </p:nvSpPr>
-        <p:spPr>
-          <a:xfrm>
-            <a:off x="1463040" y="1874520"/>
-            <a:ext cx="9966960" cy="685800"/>
-          </a:xfrm>
-          <a:prstGeom prst="rect">
-            <a:avLst/>
-          </a:prstGeom>
-          <a:noFill/>
-          <a:ln/>
-        </p:spPr>
-        <p:txBody>
-          <a:bodyPr wrap="square" lIns="0" tIns="0" rIns="0" bIns="0" rtlCol="0" anchor="ctr"/>
-          <a:lstStyle/>
-          <a:p>
-            <a:pPr indent="0" marL="0">
-              <a:buNone/>
-            </a:pPr>
-            <a:r>
-              <a:rPr lang="en-US" sz="2000" dirty="0">
+          <p:cNvPr id="20" name="Text 17"/>
+          <p:cNvSpPr txBox="1"/>
+          <p:nvPr/>
+        </p:nvSpPr>
+        <p:spPr>
+          <a:xfrm>
+            <a:off x="777240" y="5788152"/>
+            <a:ext cx="10698480" cy="365760"/>
+          </a:xfrm>
+          <a:prstGeom prst="rect">
+            <a:avLst/>
+          </a:prstGeom>
+          <a:noFill/>
+          <a:ln/>
+        </p:spPr>
+        <p:txBody>
+          <a:bodyPr wrap="square" lIns="0" tIns="0" rIns="0" bIns="0" rtlCol="0" anchor="t"/>
+          <a:lstStyle/>
+          <a:p>
+            <a:pPr indent="0" marL="0">
+              <a:buNone/>
+            </a:pPr>
+            <a:r>
+              <a:rPr lang="en-US" sz="1600" b="1" dirty="0">
                 <a:solidFill>
                   <a:srgbClr val="1E2761"/>
                 </a:solidFill>
@@ -9726,99 +10959,13 @@
                 <a:ea typeface="Calibri" pitchFamily="34" charset="-122"/>
                 <a:cs typeface="Calibri" pitchFamily="34" charset="-120"/>
               </a:rPr>
-              <a:t>11 Strophen mit je 5 Versen</a:t>
-            </a:r>
-            <a:endParaRPr lang="en-US" sz="2000" dirty="0"/>
-          </a:p>
-        </p:txBody>
-      </p:sp>
-      <p:sp>
-        <p:nvSpPr>
-          <p:cNvPr id="11" name="Shape 8"/>
-          <p:cNvSpPr/>
-          <p:nvPr/>
-        </p:nvSpPr>
-        <p:spPr>
-          <a:xfrm>
-            <a:off x="548640" y="2834640"/>
-            <a:ext cx="11064240" cy="914400"/>
-          </a:xfrm>
-          <a:prstGeom prst="roundRect">
-            <a:avLst>
-              <a:gd name="adj" fmla="val 8000"/>
-            </a:avLst>
-          </a:prstGeom>
-          <a:solidFill>
-            <a:srgbClr val="F4F7FD"/>
-          </a:solidFill>
-          <a:ln/>
-        </p:spPr>
-      </p:sp>
-      <p:sp>
-        <p:nvSpPr>
-          <p:cNvPr id="12" name="Text 9"/>
-          <p:cNvSpPr txBox="1"/>
-          <p:nvPr/>
-        </p:nvSpPr>
-        <p:spPr>
-          <a:xfrm>
-            <a:off x="731520" y="3063240"/>
-            <a:ext cx="731520" cy="457200"/>
-          </a:xfrm>
-          <a:prstGeom prst="rect">
-            <a:avLst/>
-          </a:prstGeom>
-          <a:noFill/>
-          <a:ln/>
-        </p:spPr>
-        <p:txBody>
-          <a:bodyPr wrap="square" lIns="0" tIns="0" rIns="0" bIns="0" rtlCol="0" anchor="t"/>
-          <a:lstStyle/>
-          <a:p>
-            <a:pPr indent="0" marL="0">
-              <a:buNone/>
-            </a:pPr>
-            <a:r>
-              <a:rPr lang="en-US" sz="2200" b="1" dirty="0">
-                <a:solidFill>
-                  <a:srgbClr val="2A8C8C"/>
-                </a:solidFill>
-                <a:latin typeface="Calibri" pitchFamily="34" charset="0"/>
-                <a:ea typeface="Calibri" pitchFamily="34" charset="-122"/>
-                <a:cs typeface="Calibri" pitchFamily="34" charset="-120"/>
-              </a:rPr>
-              <a:t>2</a:t>
-            </a:r>
-            <a:endParaRPr lang="en-US" sz="2200" dirty="0"/>
-          </a:p>
-        </p:txBody>
-      </p:sp>
-      <p:sp>
-        <p:nvSpPr>
-          <p:cNvPr id="13" name="Text 10"/>
-          <p:cNvSpPr txBox="1"/>
-          <p:nvPr/>
-        </p:nvSpPr>
-        <p:spPr>
-          <a:xfrm>
-            <a:off x="1463040" y="2971800"/>
-            <a:ext cx="9966960" cy="685800"/>
-          </a:xfrm>
-          <a:prstGeom prst="rect">
-            <a:avLst/>
-          </a:prstGeom>
-          <a:noFill/>
-          <a:ln/>
-        </p:spPr>
-        <p:txBody>
-          <a:bodyPr wrap="square" lIns="0" tIns="0" rIns="0" bIns="0" rtlCol="0" anchor="ctr"/>
-          <a:lstStyle/>
-          <a:p>
-            <a:pPr indent="0" marL="0">
-              <a:buNone/>
-            </a:pPr>
-            <a:r>
-              <a:rPr lang="en-US" sz="2000" dirty="0">
+              <a:t>Zeit: </a:t>
+            </a:r>
+            <a:pPr indent="0" marL="0">
+              <a:buNone/>
+            </a:pPr>
+            <a:r>
+              <a:rPr lang="en-US" sz="1600" dirty="0">
                 <a:solidFill>
                   <a:srgbClr val="1E2761"/>
                 </a:solidFill>
@@ -9826,109 +10973,23 @@
                 <a:ea typeface="Calibri" pitchFamily="34" charset="-122"/>
                 <a:cs typeface="Calibri" pitchFamily="34" charset="-120"/>
               </a:rPr>
-              <a:t>Paarreim (aabb), z. B. Riesenart / Bart (Str. 1)</a:t>
-            </a:r>
-            <a:endParaRPr lang="en-US" sz="2000" dirty="0"/>
-          </a:p>
-        </p:txBody>
-      </p:sp>
-      <p:sp>
-        <p:nvSpPr>
-          <p:cNvPr id="14" name="Shape 11"/>
-          <p:cNvSpPr/>
-          <p:nvPr/>
-        </p:nvSpPr>
-        <p:spPr>
-          <a:xfrm>
-            <a:off x="548640" y="3931920"/>
-            <a:ext cx="11064240" cy="914400"/>
-          </a:xfrm>
-          <a:prstGeom prst="roundRect">
-            <a:avLst>
-              <a:gd name="adj" fmla="val 8000"/>
-            </a:avLst>
-          </a:prstGeom>
-          <a:solidFill>
-            <a:srgbClr val="F4F7FD"/>
-          </a:solidFill>
-          <a:ln/>
-        </p:spPr>
-      </p:sp>
-      <p:sp>
-        <p:nvSpPr>
-          <p:cNvPr id="15" name="Text 12"/>
-          <p:cNvSpPr txBox="1"/>
-          <p:nvPr/>
-        </p:nvSpPr>
-        <p:spPr>
-          <a:xfrm>
-            <a:off x="731520" y="4160520"/>
-            <a:ext cx="731520" cy="457200"/>
-          </a:xfrm>
-          <a:prstGeom prst="rect">
-            <a:avLst/>
-          </a:prstGeom>
-          <a:noFill/>
-          <a:ln/>
-        </p:spPr>
-        <p:txBody>
-          <a:bodyPr wrap="square" lIns="0" tIns="0" rIns="0" bIns="0" rtlCol="0" anchor="t"/>
-          <a:lstStyle/>
-          <a:p>
-            <a:pPr indent="0" marL="0">
-              <a:buNone/>
-            </a:pPr>
-            <a:r>
-              <a:rPr lang="en-US" sz="2200" b="1" dirty="0">
-                <a:solidFill>
-                  <a:srgbClr val="2A8C8C"/>
-                </a:solidFill>
-                <a:latin typeface="Calibri" pitchFamily="34" charset="0"/>
-                <a:ea typeface="Calibri" pitchFamily="34" charset="-122"/>
-                <a:cs typeface="Calibri" pitchFamily="34" charset="-120"/>
-              </a:rPr>
-              <a:t>3</a:t>
-            </a:r>
-            <a:endParaRPr lang="en-US" sz="2200" dirty="0"/>
-          </a:p>
-        </p:txBody>
-      </p:sp>
-      <p:sp>
-        <p:nvSpPr>
-          <p:cNvPr id="16" name="Text 13"/>
-          <p:cNvSpPr txBox="1"/>
-          <p:nvPr/>
-        </p:nvSpPr>
-        <p:spPr>
-          <a:xfrm>
-            <a:off x="1463040" y="4069080"/>
-            <a:ext cx="9966960" cy="685800"/>
-          </a:xfrm>
-          <a:prstGeom prst="rect">
-            <a:avLst/>
-          </a:prstGeom>
-          <a:noFill/>
-          <a:ln/>
-        </p:spPr>
-        <p:txBody>
-          <a:bodyPr wrap="square" lIns="0" tIns="0" rIns="0" bIns="0" rtlCol="0" anchor="ctr"/>
-          <a:lstStyle/>
-          <a:p>
-            <a:pPr indent="0" marL="0">
-              <a:buNone/>
-            </a:pPr>
-            <a:r>
-              <a:rPr lang="en-US" sz="2000" dirty="0">
-                <a:solidFill>
-                  <a:srgbClr val="1E2761"/>
-                </a:solidFill>
-                <a:latin typeface="Calibri" pitchFamily="34" charset="0"/>
-                <a:ea typeface="Calibri" pitchFamily="34" charset="-122"/>
-                <a:cs typeface="Calibri" pitchFamily="34" charset="-120"/>
-              </a:rPr>
-              <a:t>„… Paddy Fingal“ – der Kehrreim (wird leicht abgewandelt)</a:t>
-            </a:r>
-            <a:endParaRPr lang="en-US" sz="2000" dirty="0"/>
+              <a:t>12 Minuten · allein      </a:t>
+            </a:r>
+            <a:pPr indent="0" marL="0">
+              <a:buNone/>
+            </a:pPr>
+            <a:r>
+              <a:rPr lang="en-US" sz="1600" i="1" dirty="0">
+                <a:solidFill>
+                  <a:srgbClr val="5B6B8C"/>
+                </a:solidFill>
+                <a:latin typeface="Calibri" pitchFamily="34" charset="0"/>
+                <a:ea typeface="Calibri" pitchFamily="34" charset="-122"/>
+                <a:cs typeface="Calibri" pitchFamily="34" charset="-120"/>
+              </a:rPr>
+              <a:t>Fertig? Stift hinlegen.</a:t>
+            </a:r>
+            <a:endParaRPr lang="en-US" sz="1600" dirty="0"/>
           </a:p>
         </p:txBody>
       </p:sp>
